--- a/OwnIt_Uganda_Pitch_Deck.pptx
+++ b/OwnIt_Uganda_Pitch_Deck.pptx
@@ -1,24 +1,34 @@
 
 <file path=ppt/presentation.xml><?xml version="1.0" encoding="utf-8"?>
-<p:presentation xmlns:a="http://schemas.openxmlformats.org/drawingml/2006/main" xmlns:r="http://schemas.openxmlformats.org/officeDocument/2006/relationships" xmlns:p="http://schemas.openxmlformats.org/presentationml/2006/main" saveSubsetFonts="1" autoCompressPictures="0">
+<p:presentation xmlns:a="http://schemas.openxmlformats.org/drawingml/2006/main" xmlns:r="http://schemas.openxmlformats.org/officeDocument/2006/relationships" xmlns:p="http://schemas.openxmlformats.org/presentationml/2006/main" autoCompressPictures="0">
   <p:sldMasterIdLst>
     <p:sldMasterId id="2147483648" r:id="rId1"/>
   </p:sldMasterIdLst>
+  <p:notesMasterIdLst>
+    <p:notesMasterId r:id="rId4"/>
+  </p:notesMasterIdLst>
   <p:sldIdLst>
-    <p:sldId id="256" r:id="rId2"/>
-    <p:sldId id="257" r:id="rId3"/>
-    <p:sldId id="258" r:id="rId4"/>
-    <p:sldId id="259" r:id="rId5"/>
-    <p:sldId id="260" r:id="rId6"/>
-    <p:sldId id="261" r:id="rId7"/>
-    <p:sldId id="262" r:id="rId8"/>
-    <p:sldId id="263" r:id="rId9"/>
-    <p:sldId id="264" r:id="rId10"/>
-    <p:sldId id="265" r:id="rId11"/>
+    <p:sldId id="256" r:id="rId3"/>
+    <p:sldId id="257" r:id="rId5"/>
+    <p:sldId id="258" r:id="rId6"/>
+    <p:sldId id="259" r:id="rId7"/>
+    <p:sldId id="260" r:id="rId8"/>
+    <p:sldId id="261" r:id="rId9"/>
+    <p:sldId id="262" r:id="rId10"/>
+    <p:sldId id="263" r:id="rId11"/>
+    <p:sldId id="264" r:id="rId12"/>
+    <p:sldId id="265" r:id="rId13"/>
+    <p:sldId id="266" r:id="rId14"/>
+    <p:sldId id="267" r:id="rId15"/>
+    <p:sldId id="268" r:id="rId16"/>
+    <p:sldId id="269" r:id="rId17"/>
+    <p:sldId id="270" r:id="rId18"/>
+    <p:sldId id="271" r:id="rId19"/>
+    <p:sldId id="272" r:id="rId20"/>
+    <p:sldId id="273" r:id="rId21"/>
+    <p:sldId id="274" r:id="rId22"/>
+    <p:sldId id="275" r:id="rId23"/>
   </p:sldIdLst>
-  <p:notesMasterIdLst>
-    <p:notesMasterId r:id="rId12"/>
-  </p:notesMasterIdLst>
   <p:sldSz cx="9144000" cy="5143500"/>
   <p:notesSz cx="5143500" cy="9144000"/>
   <p:defaultTextStyle>
@@ -198,7 +208,6 @@
           <a:p>
             <a:fld id="{5282F153-3F37-0F45-9E97-73ACFA13230C}" type="datetimeFigureOut">
               <a:rPr lang="en-US"/>
-              <a:t>7/23/19</a:t>
             </a:fld>
             <a:endParaRPr lang="en-US"/>
           </a:p>
@@ -265,6 +274,7 @@
               <a:rPr lang="en-US"/>
               <a:t>Click to edit Master text styles</a:t>
             </a:r>
+            <a:endParaRPr lang="en-US"/>
           </a:p>
           <a:p>
             <a:pPr lvl="1"/>
@@ -272,6 +282,7 @@
               <a:rPr lang="en-US"/>
               <a:t>Second level</a:t>
             </a:r>
+            <a:endParaRPr lang="en-US"/>
           </a:p>
           <a:p>
             <a:pPr lvl="2"/>
@@ -279,6 +290,7 @@
               <a:rPr lang="en-US"/>
               <a:t>Third level</a:t>
             </a:r>
+            <a:endParaRPr lang="en-US"/>
           </a:p>
           <a:p>
             <a:pPr lvl="3"/>
@@ -286,6 +298,7 @@
               <a:rPr lang="en-US"/>
               <a:t>Fourth level</a:t>
             </a:r>
+            <a:endParaRPr lang="en-US"/>
           </a:p>
           <a:p>
             <a:pPr lvl="4"/>
@@ -293,6 +306,7 @@
               <a:rPr lang="en-US"/>
               <a:t>Fifth level</a:t>
             </a:r>
+            <a:endParaRPr lang="en-US"/>
           </a:p>
         </p:txBody>
       </p:sp>
@@ -356,18 +370,12 @@
           <a:p>
             <a:fld id="{CE5E9CC1-C706-0F49-92D6-E571CC5EEA8F}" type="slidenum">
               <a:rPr lang="en-US"/>
-              <a:t>‹#›</a:t>
             </a:fld>
             <a:endParaRPr lang="en-US"/>
           </a:p>
         </p:txBody>
       </p:sp>
     </p:spTree>
-    <p:extLst>
-      <p:ext uri="{BB962C8B-B14F-4D97-AF65-F5344CB8AC3E}">
-        <p14:creationId xmlns:p14="http://schemas.microsoft.com/office/powerpoint/2010/main" val="1024086991"/>
-      </p:ext>
-    </p:extLst>
   </p:cSld>
   <p:clrMap bg1="lt1" tx1="dk1" bg2="lt2" tx2="dk2" accent1="accent1" accent2="accent2" accent3="accent3" accent4="accent4" accent5="accent5" accent6="accent6" hlink="hlink" folHlink="folHlink"/>
   <p:notesStyle>
@@ -509,10 +517,6 @@
           <a:bodyPr/>
           <a:lstStyle/>
           <a:p>
-            <a:r>
-              <a:rPr lang="en-US" dirty="0"/>
-              <a:t/>
-            </a:r>
             <a:endParaRPr lang="en-US" dirty="0"/>
           </a:p>
         </p:txBody>
@@ -534,18 +538,12 @@
           <a:p>
             <a:fld id="{F7021451-1387-4CA6-816F-3879F97B5CBC}" type="slidenum">
               <a:rPr lang="en-US"/>
-              <a:t>1</a:t>
             </a:fld>
             <a:endParaRPr lang="en-US"/>
           </a:p>
         </p:txBody>
       </p:sp>
     </p:spTree>
-    <p:extLst>
-      <p:ext uri="{BB962C8B-B14F-4D97-AF65-F5344CB8AC3E}">
-        <p14:creationId xmlns:p14="http://schemas.microsoft.com/office/powerpoint/2010/main" val="1024086991"/>
-      </p:ext>
-    </p:extLst>
   </p:cSld>
   <p:clrMapOvr>
     <a:masterClrMapping/>
@@ -597,10 +595,6 @@
           <a:bodyPr/>
           <a:lstStyle/>
           <a:p>
-            <a:r>
-              <a:rPr lang="en-US" dirty="0"/>
-              <a:t/>
-            </a:r>
             <a:endParaRPr lang="en-US" dirty="0"/>
           </a:p>
         </p:txBody>
@@ -622,18 +616,108 @@
           <a:p>
             <a:fld id="{F7021451-1387-4CA6-816F-3879F97B5CBC}" type="slidenum">
               <a:rPr lang="en-US"/>
-              <a:t>10</a:t>
             </a:fld>
             <a:endParaRPr lang="en-US"/>
           </a:p>
         </p:txBody>
       </p:sp>
     </p:spTree>
-    <p:extLst>
-      <p:ext uri="{BB962C8B-B14F-4D97-AF65-F5344CB8AC3E}">
-        <p14:creationId xmlns:p14="http://schemas.microsoft.com/office/powerpoint/2010/main" val="1024086991"/>
-      </p:ext>
-    </p:extLst>
+  </p:cSld>
+  <p:clrMapOvr>
+    <a:masterClrMapping/>
+  </p:clrMapOvr>
+</p:notes>
+</file>
+
+<file path=ppt/notesSlides/notesSlide11.xml><?xml version="1.0" encoding="utf-8"?>
+<p:notes xmlns:a="http://schemas.openxmlformats.org/drawingml/2006/main" xmlns:r="http://schemas.openxmlformats.org/officeDocument/2006/relationships" xmlns:p="http://schemas.openxmlformats.org/presentationml/2006/main">
+  <p:cSld>
+    <p:spTree>
+      <p:nvGrpSpPr>
+        <p:cNvPr id="1" name=""/>
+        <p:cNvGrpSpPr/>
+        <p:nvPr/>
+      </p:nvGrpSpPr>
+      <p:grpSpPr/>
+      <p:sp>
+        <p:nvSpPr>
+          <p:cNvPr id="2" name="Slide Image Placeholder 1"/>
+          <p:cNvSpPr>
+            <a:spLocks noGrp="1"/>
+          </p:cNvSpPr>
+          <p:nvPr>
+            <p:ph type="sldImg" idx="2"/>
+          </p:nvPr>
+        </p:nvSpPr>
+        <p:spPr/>
+      </p:sp>
+      <p:sp>
+        <p:nvSpPr>
+          <p:cNvPr id="3" name="Text Placeholder 2"/>
+          <p:cNvSpPr>
+            <a:spLocks noGrp="1"/>
+          </p:cNvSpPr>
+          <p:nvPr>
+            <p:ph type="body" idx="3"/>
+          </p:nvPr>
+        </p:nvSpPr>
+        <p:spPr/>
+        <p:txBody>
+          <a:bodyPr/>
+          <a:p>
+            <a:endParaRPr lang="en-US"/>
+          </a:p>
+        </p:txBody>
+      </p:sp>
+    </p:spTree>
+  </p:cSld>
+  <p:clrMapOvr>
+    <a:masterClrMapping/>
+  </p:clrMapOvr>
+</p:notes>
+</file>
+
+<file path=ppt/notesSlides/notesSlide12.xml><?xml version="1.0" encoding="utf-8"?>
+<p:notes xmlns:a="http://schemas.openxmlformats.org/drawingml/2006/main" xmlns:r="http://schemas.openxmlformats.org/officeDocument/2006/relationships" xmlns:p="http://schemas.openxmlformats.org/presentationml/2006/main">
+  <p:cSld>
+    <p:spTree>
+      <p:nvGrpSpPr>
+        <p:cNvPr id="1" name=""/>
+        <p:cNvGrpSpPr/>
+        <p:nvPr/>
+      </p:nvGrpSpPr>
+      <p:grpSpPr/>
+      <p:sp>
+        <p:nvSpPr>
+          <p:cNvPr id="2" name="Slide Image Placeholder 1"/>
+          <p:cNvSpPr>
+            <a:spLocks noGrp="1"/>
+          </p:cNvSpPr>
+          <p:nvPr>
+            <p:ph type="sldImg" idx="2"/>
+          </p:nvPr>
+        </p:nvSpPr>
+        <p:spPr/>
+      </p:sp>
+      <p:sp>
+        <p:nvSpPr>
+          <p:cNvPr id="3" name="Text Placeholder 2"/>
+          <p:cNvSpPr>
+            <a:spLocks noGrp="1"/>
+          </p:cNvSpPr>
+          <p:nvPr>
+            <p:ph type="body" idx="3"/>
+          </p:nvPr>
+        </p:nvSpPr>
+        <p:spPr/>
+        <p:txBody>
+          <a:bodyPr/>
+          <a:p>
+            <a:endParaRPr lang="en-US"/>
+          </a:p>
+        </p:txBody>
+      </p:sp>
+    </p:spTree>
   </p:cSld>
   <p:clrMapOvr>
     <a:masterClrMapping/>
@@ -685,10 +769,6 @@
           <a:bodyPr/>
           <a:lstStyle/>
           <a:p>
-            <a:r>
-              <a:rPr lang="en-US" dirty="0"/>
-              <a:t/>
-            </a:r>
             <a:endParaRPr lang="en-US" dirty="0"/>
           </a:p>
         </p:txBody>
@@ -710,18 +790,12 @@
           <a:p>
             <a:fld id="{F7021451-1387-4CA6-816F-3879F97B5CBC}" type="slidenum">
               <a:rPr lang="en-US"/>
-              <a:t>2</a:t>
             </a:fld>
             <a:endParaRPr lang="en-US"/>
           </a:p>
         </p:txBody>
       </p:sp>
     </p:spTree>
-    <p:extLst>
-      <p:ext uri="{BB962C8B-B14F-4D97-AF65-F5344CB8AC3E}">
-        <p14:creationId xmlns:p14="http://schemas.microsoft.com/office/powerpoint/2010/main" val="1024086991"/>
-      </p:ext>
-    </p:extLst>
   </p:cSld>
   <p:clrMapOvr>
     <a:masterClrMapping/>
@@ -773,10 +847,6 @@
           <a:bodyPr/>
           <a:lstStyle/>
           <a:p>
-            <a:r>
-              <a:rPr lang="en-US" dirty="0"/>
-              <a:t/>
-            </a:r>
             <a:endParaRPr lang="en-US" dirty="0"/>
           </a:p>
         </p:txBody>
@@ -798,18 +868,12 @@
           <a:p>
             <a:fld id="{F7021451-1387-4CA6-816F-3879F97B5CBC}" type="slidenum">
               <a:rPr lang="en-US"/>
-              <a:t>3</a:t>
             </a:fld>
             <a:endParaRPr lang="en-US"/>
           </a:p>
         </p:txBody>
       </p:sp>
     </p:spTree>
-    <p:extLst>
-      <p:ext uri="{BB962C8B-B14F-4D97-AF65-F5344CB8AC3E}">
-        <p14:creationId xmlns:p14="http://schemas.microsoft.com/office/powerpoint/2010/main" val="1024086991"/>
-      </p:ext>
-    </p:extLst>
   </p:cSld>
   <p:clrMapOvr>
     <a:masterClrMapping/>
@@ -861,10 +925,6 @@
           <a:bodyPr/>
           <a:lstStyle/>
           <a:p>
-            <a:r>
-              <a:rPr lang="en-US" dirty="0"/>
-              <a:t/>
-            </a:r>
             <a:endParaRPr lang="en-US" dirty="0"/>
           </a:p>
         </p:txBody>
@@ -886,18 +946,12 @@
           <a:p>
             <a:fld id="{F7021451-1387-4CA6-816F-3879F97B5CBC}" type="slidenum">
               <a:rPr lang="en-US"/>
-              <a:t>4</a:t>
             </a:fld>
             <a:endParaRPr lang="en-US"/>
           </a:p>
         </p:txBody>
       </p:sp>
     </p:spTree>
-    <p:extLst>
-      <p:ext uri="{BB962C8B-B14F-4D97-AF65-F5344CB8AC3E}">
-        <p14:creationId xmlns:p14="http://schemas.microsoft.com/office/powerpoint/2010/main" val="1024086991"/>
-      </p:ext>
-    </p:extLst>
   </p:cSld>
   <p:clrMapOvr>
     <a:masterClrMapping/>
@@ -949,10 +1003,6 @@
           <a:bodyPr/>
           <a:lstStyle/>
           <a:p>
-            <a:r>
-              <a:rPr lang="en-US" dirty="0"/>
-              <a:t/>
-            </a:r>
             <a:endParaRPr lang="en-US" dirty="0"/>
           </a:p>
         </p:txBody>
@@ -974,18 +1024,12 @@
           <a:p>
             <a:fld id="{F7021451-1387-4CA6-816F-3879F97B5CBC}" type="slidenum">
               <a:rPr lang="en-US"/>
-              <a:t>5</a:t>
             </a:fld>
             <a:endParaRPr lang="en-US"/>
           </a:p>
         </p:txBody>
       </p:sp>
     </p:spTree>
-    <p:extLst>
-      <p:ext uri="{BB962C8B-B14F-4D97-AF65-F5344CB8AC3E}">
-        <p14:creationId xmlns:p14="http://schemas.microsoft.com/office/powerpoint/2010/main" val="1024086991"/>
-      </p:ext>
-    </p:extLst>
   </p:cSld>
   <p:clrMapOvr>
     <a:masterClrMapping/>
@@ -1037,10 +1081,6 @@
           <a:bodyPr/>
           <a:lstStyle/>
           <a:p>
-            <a:r>
-              <a:rPr lang="en-US" dirty="0"/>
-              <a:t/>
-            </a:r>
             <a:endParaRPr lang="en-US" dirty="0"/>
           </a:p>
         </p:txBody>
@@ -1062,18 +1102,12 @@
           <a:p>
             <a:fld id="{F7021451-1387-4CA6-816F-3879F97B5CBC}" type="slidenum">
               <a:rPr lang="en-US"/>
-              <a:t>6</a:t>
             </a:fld>
             <a:endParaRPr lang="en-US"/>
           </a:p>
         </p:txBody>
       </p:sp>
     </p:spTree>
-    <p:extLst>
-      <p:ext uri="{BB962C8B-B14F-4D97-AF65-F5344CB8AC3E}">
-        <p14:creationId xmlns:p14="http://schemas.microsoft.com/office/powerpoint/2010/main" val="1024086991"/>
-      </p:ext>
-    </p:extLst>
   </p:cSld>
   <p:clrMapOvr>
     <a:masterClrMapping/>
@@ -1125,10 +1159,6 @@
           <a:bodyPr/>
           <a:lstStyle/>
           <a:p>
-            <a:r>
-              <a:rPr lang="en-US" dirty="0"/>
-              <a:t/>
-            </a:r>
             <a:endParaRPr lang="en-US" dirty="0"/>
           </a:p>
         </p:txBody>
@@ -1150,18 +1180,12 @@
           <a:p>
             <a:fld id="{F7021451-1387-4CA6-816F-3879F97B5CBC}" type="slidenum">
               <a:rPr lang="en-US"/>
-              <a:t>7</a:t>
             </a:fld>
             <a:endParaRPr lang="en-US"/>
           </a:p>
         </p:txBody>
       </p:sp>
     </p:spTree>
-    <p:extLst>
-      <p:ext uri="{BB962C8B-B14F-4D97-AF65-F5344CB8AC3E}">
-        <p14:creationId xmlns:p14="http://schemas.microsoft.com/office/powerpoint/2010/main" val="1024086991"/>
-      </p:ext>
-    </p:extLst>
   </p:cSld>
   <p:clrMapOvr>
     <a:masterClrMapping/>
@@ -1213,10 +1237,6 @@
           <a:bodyPr/>
           <a:lstStyle/>
           <a:p>
-            <a:r>
-              <a:rPr lang="en-US" dirty="0"/>
-              <a:t/>
-            </a:r>
             <a:endParaRPr lang="en-US" dirty="0"/>
           </a:p>
         </p:txBody>
@@ -1238,18 +1258,12 @@
           <a:p>
             <a:fld id="{F7021451-1387-4CA6-816F-3879F97B5CBC}" type="slidenum">
               <a:rPr lang="en-US"/>
-              <a:t>8</a:t>
             </a:fld>
             <a:endParaRPr lang="en-US"/>
           </a:p>
         </p:txBody>
       </p:sp>
     </p:spTree>
-    <p:extLst>
-      <p:ext uri="{BB962C8B-B14F-4D97-AF65-F5344CB8AC3E}">
-        <p14:creationId xmlns:p14="http://schemas.microsoft.com/office/powerpoint/2010/main" val="1024086991"/>
-      </p:ext>
-    </p:extLst>
   </p:cSld>
   <p:clrMapOvr>
     <a:masterClrMapping/>
@@ -1301,10 +1315,6 @@
           <a:bodyPr/>
           <a:lstStyle/>
           <a:p>
-            <a:r>
-              <a:rPr lang="en-US" dirty="0"/>
-              <a:t/>
-            </a:r>
             <a:endParaRPr lang="en-US" dirty="0"/>
           </a:p>
         </p:txBody>
@@ -1326,18 +1336,12 @@
           <a:p>
             <a:fld id="{F7021451-1387-4CA6-816F-3879F97B5CBC}" type="slidenum">
               <a:rPr lang="en-US"/>
-              <a:t>9</a:t>
             </a:fld>
             <a:endParaRPr lang="en-US"/>
           </a:p>
         </p:txBody>
       </p:sp>
     </p:spTree>
-    <p:extLst>
-      <p:ext uri="{BB962C8B-B14F-4D97-AF65-F5344CB8AC3E}">
-        <p14:creationId xmlns:p14="http://schemas.microsoft.com/office/powerpoint/2010/main" val="1024086991"/>
-      </p:ext>
-    </p:extLst>
   </p:cSld>
   <p:clrMapOvr>
     <a:masterClrMapping/>
@@ -1378,6 +1382,11 @@
 <file path=ppt/slideMasters/slideMaster1.xml><?xml version="1.0" encoding="utf-8"?>
 <p:sldMaster xmlns:a="http://schemas.openxmlformats.org/drawingml/2006/main" xmlns:r="http://schemas.openxmlformats.org/officeDocument/2006/relationships" xmlns:p="http://schemas.openxmlformats.org/presentationml/2006/main">
   <p:cSld>
+    <p:bg>
+      <p:bgRef idx="1001">
+        <a:schemeClr val="bg1"/>
+      </p:bgRef>
+    </p:bg>
     <p:spTree>
       <p:nvGrpSpPr>
         <p:cNvPr id="1" name=""/>
@@ -1421,7 +1430,7 @@
         <a:spcBef>
           <a:spcPct val="20000"/>
         </a:spcBef>
-        <a:buFont typeface="Arial" pitchFamily="34" charset="0"/>
+        <a:buFont typeface="Arial" panose="020B0604020202020204" pitchFamily="34" charset="0"/>
         <a:buChar char="•"/>
         <a:defRPr sz="3200" kern="1200">
           <a:solidFill>
@@ -1436,7 +1445,7 @@
         <a:spcBef>
           <a:spcPct val="20000"/>
         </a:spcBef>
-        <a:buFont typeface="Arial" pitchFamily="34" charset="0"/>
+        <a:buFont typeface="Arial" panose="020B0604020202020204" pitchFamily="34" charset="0"/>
         <a:buChar char="–"/>
         <a:defRPr sz="2800" kern="1200">
           <a:solidFill>
@@ -1451,7 +1460,7 @@
         <a:spcBef>
           <a:spcPct val="20000"/>
         </a:spcBef>
-        <a:buFont typeface="Arial" pitchFamily="34" charset="0"/>
+        <a:buFont typeface="Arial" panose="020B0604020202020204" pitchFamily="34" charset="0"/>
         <a:buChar char="•"/>
         <a:defRPr sz="2400" kern="1200">
           <a:solidFill>
@@ -1466,7 +1475,7 @@
         <a:spcBef>
           <a:spcPct val="20000"/>
         </a:spcBef>
-        <a:buFont typeface="Arial" pitchFamily="34" charset="0"/>
+        <a:buFont typeface="Arial" panose="020B0604020202020204" pitchFamily="34" charset="0"/>
         <a:buChar char="–"/>
         <a:defRPr sz="2000" kern="1200">
           <a:solidFill>
@@ -1481,7 +1490,7 @@
         <a:spcBef>
           <a:spcPct val="20000"/>
         </a:spcBef>
-        <a:buFont typeface="Arial" pitchFamily="34" charset="0"/>
+        <a:buFont typeface="Arial" panose="020B0604020202020204" pitchFamily="34" charset="0"/>
         <a:buChar char="»"/>
         <a:defRPr sz="2000" kern="1200">
           <a:solidFill>
@@ -1496,7 +1505,7 @@
         <a:spcBef>
           <a:spcPct val="20000"/>
         </a:spcBef>
-        <a:buFont typeface="Arial" pitchFamily="34" charset="0"/>
+        <a:buFont typeface="Arial" panose="020B0604020202020204" pitchFamily="34" charset="0"/>
         <a:buChar char="•"/>
         <a:defRPr sz="2000" kern="1200">
           <a:solidFill>
@@ -1511,7 +1520,7 @@
         <a:spcBef>
           <a:spcPct val="20000"/>
         </a:spcBef>
-        <a:buFont typeface="Arial" pitchFamily="34" charset="0"/>
+        <a:buFont typeface="Arial" panose="020B0604020202020204" pitchFamily="34" charset="0"/>
         <a:buChar char="•"/>
         <a:defRPr sz="2000" kern="1200">
           <a:solidFill>
@@ -1526,7 +1535,7 @@
         <a:spcBef>
           <a:spcPct val="20000"/>
         </a:spcBef>
-        <a:buFont typeface="Arial" pitchFamily="34" charset="0"/>
+        <a:buFont typeface="Arial" panose="020B0604020202020204" pitchFamily="34" charset="0"/>
         <a:buChar char="•"/>
         <a:defRPr sz="2000" kern="1200">
           <a:solidFill>
@@ -1541,7 +1550,7 @@
         <a:spcBef>
           <a:spcPct val="20000"/>
         </a:spcBef>
-        <a:buFont typeface="Arial" pitchFamily="34" charset="0"/>
+        <a:buFont typeface="Arial" panose="020B0604020202020204" pitchFamily="34" charset="0"/>
         <a:buChar char="•"/>
         <a:defRPr sz="2000" kern="1200">
           <a:solidFill>
@@ -1654,12 +1663,13 @@
 
 <file path=ppt/slides/slide1.xml><?xml version="1.0" encoding="utf-8"?>
 <p:sld xmlns:a="http://schemas.openxmlformats.org/drawingml/2006/main" xmlns:r="http://schemas.openxmlformats.org/officeDocument/2006/relationships" xmlns:p="http://schemas.openxmlformats.org/presentationml/2006/main">
-  <p:cSld name="Slide 1">
+  <p:cSld>
     <p:bg>
       <p:bgPr>
         <a:solidFill>
-          <a:srgbClr val="1A7A45"/>
+          <a:srgbClr val="0F4D2B"/>
         </a:solidFill>
+        <a:effectLst/>
       </p:bgPr>
     </p:bg>
     <p:spTree>
@@ -1695,8 +1705,11 @@
               <a:alpha val="20000"/>
             </a:srgbClr>
           </a:solidFill>
-          <a:ln/>
-        </p:spPr>
+        </p:spPr>
+        <p:txBody>
+          <a:bodyPr wrap="square"/>
+          <a:p/>
+        </p:txBody>
       </p:sp>
       <p:sp>
         <p:nvSpPr>
@@ -1713,13 +1726,12 @@
             <a:avLst/>
           </a:prstGeom>
           <a:noFill/>
-          <a:ln/>
         </p:spPr>
         <p:txBody>
           <a:bodyPr wrap="square" rtlCol="0" anchor="ctr"/>
           <a:lstStyle/>
           <a:p>
-            <a:pPr indent="0" marL="0">
+            <a:pPr marL="0" indent="0">
               <a:buNone/>
             </a:pPr>
             <a:r>
@@ -1727,9 +1739,9 @@
                 <a:solidFill>
                   <a:srgbClr val="FFFFFF"/>
                 </a:solidFill>
-                <a:latin typeface="Georgia" pitchFamily="34" charset="0"/>
-                <a:ea typeface="Georgia" pitchFamily="34" charset="-122"/>
-                <a:cs typeface="Georgia" pitchFamily="34" charset="-120"/>
+                <a:latin typeface="Georgia" panose="02040502050405020303" pitchFamily="34" charset="0"/>
+                <a:ea typeface="Georgia" panose="02040502050405020303" pitchFamily="34" charset="-122"/>
+                <a:cs typeface="Georgia" panose="02040502050405020303" pitchFamily="34" charset="-120"/>
               </a:rPr>
               <a:t>OwnIt.</a:t>
             </a:r>
@@ -1752,23 +1764,22 @@
             <a:avLst/>
           </a:prstGeom>
           <a:noFill/>
-          <a:ln/>
         </p:spPr>
         <p:txBody>
           <a:bodyPr wrap="square" rtlCol="0" anchor="ctr"/>
           <a:lstStyle/>
           <a:p>
-            <a:pPr indent="0" marL="0">
-              <a:buNone/>
-            </a:pPr>
-            <a:r>
-              <a:rPr lang="en-US" sz="1800" dirty="0">
-                <a:solidFill>
-                  <a:srgbClr val="A8F0C0"/>
-                </a:solidFill>
-                <a:latin typeface="Arial" pitchFamily="34" charset="0"/>
-                <a:ea typeface="Arial" pitchFamily="34" charset="-122"/>
-                <a:cs typeface="Arial" pitchFamily="34" charset="-120"/>
+            <a:pPr marL="0" indent="0">
+              <a:buNone/>
+            </a:pPr>
+            <a:r>
+              <a:rPr lang="en-US" sz="1800" b="1" dirty="0">
+                <a:solidFill>
+                  <a:srgbClr val="FFFFFF"/>
+                </a:solidFill>
+                <a:latin typeface="Georgia" panose="02040502050405020303" pitchFamily="34" charset="0"/>
+                <a:ea typeface="Arial" panose="020B0604020202020204" pitchFamily="34" charset="-122"/>
+                <a:cs typeface="Arial" panose="020B0604020202020204" pitchFamily="34" charset="-120"/>
               </a:rPr>
               <a:t>Democratizing Real Asset Ownership in Uganda</a:t>
             </a:r>
@@ -1791,13 +1802,12 @@
             <a:avLst/>
           </a:prstGeom>
           <a:noFill/>
-          <a:ln/>
         </p:spPr>
         <p:txBody>
           <a:bodyPr wrap="square" rtlCol="0" anchor="ctr"/>
           <a:lstStyle/>
           <a:p>
-            <a:pPr indent="0" marL="0">
+            <a:pPr marL="0" indent="0">
               <a:lnSpc>
                 <a:spcPts val="1800"/>
               </a:lnSpc>
@@ -1806,11 +1816,11 @@
             <a:r>
               <a:rPr lang="en-US" sz="1300" dirty="0">
                 <a:solidFill>
-                  <a:srgbClr val="E3FCEF"/>
-                </a:solidFill>
-                <a:latin typeface="Arial" pitchFamily="34" charset="0"/>
-                <a:ea typeface="Arial" pitchFamily="34" charset="-122"/>
-                <a:cs typeface="Arial" pitchFamily="34" charset="-120"/>
+                  <a:srgbClr val="F4F9F5"/>
+                </a:solidFill>
+                <a:latin typeface="Arial" panose="020B0604020202020204" pitchFamily="34" charset="0"/>
+                <a:ea typeface="Arial" panose="020B0604020202020204" pitchFamily="34" charset="-122"/>
+                <a:cs typeface="Arial" panose="020B0604020202020204" pitchFamily="34" charset="-120"/>
               </a:rPr>
               <a:t>Co-own properties, commodities, minerals, and trade routes from as low as UGX 50,000 with direct Mobile Money returns.</a:t>
             </a:r>
@@ -1833,23 +1843,22 @@
             <a:avLst/>
           </a:prstGeom>
           <a:noFill/>
-          <a:ln/>
         </p:spPr>
         <p:txBody>
           <a:bodyPr wrap="square" rtlCol="0" anchor="ctr"/>
           <a:lstStyle/>
           <a:p>
-            <a:pPr indent="0" marL="0">
+            <a:pPr marL="0" indent="0">
               <a:buNone/>
             </a:pPr>
             <a:r>
               <a:rPr lang="en-US" sz="1000" b="1" dirty="0">
                 <a:solidFill>
-                  <a:srgbClr val="C17F00"/>
-                </a:solidFill>
-                <a:latin typeface="Arial" pitchFamily="34" charset="0"/>
-                <a:ea typeface="Arial" pitchFamily="34" charset="-122"/>
-                <a:cs typeface="Arial" pitchFamily="34" charset="-120"/>
+                  <a:srgbClr val="F4F9F5"/>
+                </a:solidFill>
+                <a:latin typeface="Arial" panose="020B0604020202020204" pitchFamily="34" charset="0"/>
+                <a:ea typeface="Arial" panose="020B0604020202020204" pitchFamily="34" charset="-122"/>
+                <a:cs typeface="Arial" panose="020B0604020202020204" pitchFamily="34" charset="-120"/>
               </a:rPr>
               <a:t>PITCH DECK · JUNE 2026</a:t>
             </a:r>
@@ -1867,12 +1876,13 @@
 
 <file path=ppt/slides/slide10.xml><?xml version="1.0" encoding="utf-8"?>
 <p:sld xmlns:a="http://schemas.openxmlformats.org/drawingml/2006/main" xmlns:r="http://schemas.openxmlformats.org/officeDocument/2006/relationships" xmlns:p="http://schemas.openxmlformats.org/presentationml/2006/main">
-  <p:cSld name="Slide 10">
+  <p:cSld>
     <p:bg>
       <p:bgPr>
         <a:solidFill>
-          <a:srgbClr val="1A7A45"/>
+          <a:srgbClr val="0F4D2B"/>
         </a:solidFill>
+        <a:effectLst/>
       </p:bgPr>
     </p:bg>
     <p:spTree>
@@ -1908,8 +1918,11 @@
               <a:alpha val="20000"/>
             </a:srgbClr>
           </a:solidFill>
-          <a:ln/>
-        </p:spPr>
+        </p:spPr>
+        <p:txBody>
+          <a:bodyPr wrap="square"/>
+          <a:p/>
+        </p:txBody>
       </p:sp>
       <p:sp>
         <p:nvSpPr>
@@ -1926,13 +1939,12 @@
             <a:avLst/>
           </a:prstGeom>
           <a:noFill/>
-          <a:ln/>
         </p:spPr>
         <p:txBody>
           <a:bodyPr wrap="square" rtlCol="0" anchor="ctr"/>
           <a:lstStyle/>
           <a:p>
-            <a:pPr indent="0" marL="0">
+            <a:pPr marL="0" indent="0">
               <a:buNone/>
             </a:pPr>
             <a:r>
@@ -1940,9 +1952,9 @@
                 <a:solidFill>
                   <a:srgbClr val="FFFFFF"/>
                 </a:solidFill>
-                <a:latin typeface="Georgia" pitchFamily="34" charset="0"/>
-                <a:ea typeface="Georgia" pitchFamily="34" charset="-122"/>
-                <a:cs typeface="Georgia" pitchFamily="34" charset="-120"/>
+                <a:latin typeface="Georgia" panose="02040502050405020303" pitchFamily="34" charset="0"/>
+                <a:ea typeface="Georgia" panose="02040502050405020303" pitchFamily="34" charset="-122"/>
+                <a:cs typeface="Georgia" panose="02040502050405020303" pitchFamily="34" charset="-120"/>
               </a:rPr>
               <a:t>OwnIt.</a:t>
             </a:r>
@@ -1965,23 +1977,22 @@
             <a:avLst/>
           </a:prstGeom>
           <a:noFill/>
-          <a:ln/>
         </p:spPr>
         <p:txBody>
           <a:bodyPr wrap="square" rtlCol="0" anchor="ctr"/>
           <a:lstStyle/>
           <a:p>
-            <a:pPr indent="0" marL="0">
-              <a:buNone/>
-            </a:pPr>
-            <a:r>
-              <a:rPr lang="en-US" sz="1800" dirty="0">
-                <a:solidFill>
-                  <a:srgbClr val="A8F0C0"/>
-                </a:solidFill>
-                <a:latin typeface="Arial" pitchFamily="34" charset="0"/>
-                <a:ea typeface="Arial" pitchFamily="34" charset="-122"/>
-                <a:cs typeface="Arial" pitchFamily="34" charset="-120"/>
+            <a:pPr marL="0" indent="0">
+              <a:buNone/>
+            </a:pPr>
+            <a:r>
+              <a:rPr lang="en-US" sz="1800" b="1" dirty="0">
+                <a:solidFill>
+                  <a:srgbClr val="FFFFFF"/>
+                </a:solidFill>
+                <a:latin typeface="Georgia" panose="02040502050405020303" pitchFamily="34" charset="0"/>
+                <a:ea typeface="Arial" panose="020B0604020202020204" pitchFamily="34" charset="-122"/>
+                <a:cs typeface="Arial" panose="020B0604020202020204" pitchFamily="34" charset="-120"/>
               </a:rPr>
               <a:t>Join the Crowd Funding Revolution</a:t>
             </a:r>
@@ -2004,86 +2015,85 @@
             <a:avLst/>
           </a:prstGeom>
           <a:noFill/>
-          <a:ln/>
         </p:spPr>
         <p:txBody>
           <a:bodyPr wrap="square" rtlCol="0" anchor="ctr"/>
           <a:lstStyle/>
           <a:p>
-            <a:pPr indent="0" marL="0">
+            <a:pPr marL="0" indent="0">
               <a:lnSpc>
                 <a:spcPts val="2200"/>
               </a:lnSpc>
               <a:buNone/>
             </a:pPr>
             <a:r>
-              <a:rPr lang="en-US" sz="1200" dirty="0">
-                <a:solidFill>
-                  <a:srgbClr val="E3FCEF"/>
-                </a:solidFill>
-                <a:latin typeface="Arial" pitchFamily="34" charset="0"/>
-                <a:ea typeface="Arial" pitchFamily="34" charset="-122"/>
-                <a:cs typeface="Arial" pitchFamily="34" charset="-120"/>
+              <a:rPr lang="en-US" sz="850" dirty="0">
+                <a:solidFill>
+                  <a:srgbClr val="5A7A68"/>
+                </a:solidFill>
+                <a:latin typeface="Arial" panose="020B0604020202020204" pitchFamily="34" charset="0"/>
+                <a:ea typeface="Arial" panose="020B0604020202020204" pitchFamily="34" charset="-122"/>
+                <a:cs typeface="Arial" panose="020B0604020202020204" pitchFamily="34" charset="-120"/>
               </a:rPr>
               <a:t>Email: contact@ownit.ug</a:t>
             </a:r>
             <a:endParaRPr lang="en-US" sz="1200" dirty="0"/>
           </a:p>
           <a:p>
-            <a:pPr indent="0" marL="0">
+            <a:pPr marL="0" indent="0">
               <a:lnSpc>
                 <a:spcPts val="2200"/>
               </a:lnSpc>
               <a:buNone/>
             </a:pPr>
             <a:r>
-              <a:rPr lang="en-US" sz="1200" dirty="0">
-                <a:solidFill>
-                  <a:srgbClr val="E3FCEF"/>
-                </a:solidFill>
-                <a:latin typeface="Arial" pitchFamily="34" charset="0"/>
-                <a:ea typeface="Arial" pitchFamily="34" charset="-122"/>
-                <a:cs typeface="Arial" pitchFamily="34" charset="-120"/>
+              <a:rPr lang="en-US" sz="850" dirty="0">
+                <a:solidFill>
+                  <a:srgbClr val="5A7A68"/>
+                </a:solidFill>
+                <a:latin typeface="Arial" panose="020B0604020202020204" pitchFamily="34" charset="0"/>
+                <a:ea typeface="Arial" panose="020B0604020202020204" pitchFamily="34" charset="-122"/>
+                <a:cs typeface="Arial" panose="020B0604020202020204" pitchFamily="34" charset="-120"/>
               </a:rPr>
               <a:t>Phone: +256 772 123 456</a:t>
             </a:r>
             <a:endParaRPr lang="en-US" sz="1200" dirty="0"/>
           </a:p>
           <a:p>
-            <a:pPr indent="0" marL="0">
+            <a:pPr marL="0" indent="0">
               <a:lnSpc>
                 <a:spcPts val="2200"/>
               </a:lnSpc>
               <a:buNone/>
             </a:pPr>
             <a:r>
-              <a:rPr lang="en-US" sz="1200" dirty="0">
-                <a:solidFill>
-                  <a:srgbClr val="E3FCEF"/>
-                </a:solidFill>
-                <a:latin typeface="Arial" pitchFamily="34" charset="0"/>
-                <a:ea typeface="Arial" pitchFamily="34" charset="-122"/>
-                <a:cs typeface="Arial" pitchFamily="34" charset="-120"/>
+              <a:rPr lang="en-US" sz="850" dirty="0">
+                <a:solidFill>
+                  <a:srgbClr val="5A7A68"/>
+                </a:solidFill>
+                <a:latin typeface="Arial" panose="020B0604020202020204" pitchFamily="34" charset="0"/>
+                <a:ea typeface="Arial" panose="020B0604020202020204" pitchFamily="34" charset="-122"/>
+                <a:cs typeface="Arial" panose="020B0604020202020204" pitchFamily="34" charset="-120"/>
               </a:rPr>
               <a:t>Website: www.ownit.ug</a:t>
             </a:r>
             <a:endParaRPr lang="en-US" sz="1200" dirty="0"/>
           </a:p>
           <a:p>
-            <a:pPr indent="0" marL="0">
+            <a:pPr marL="0" indent="0">
               <a:lnSpc>
                 <a:spcPts val="2200"/>
               </a:lnSpc>
               <a:buNone/>
             </a:pPr>
             <a:r>
-              <a:rPr lang="en-US" sz="1200" dirty="0">
-                <a:solidFill>
-                  <a:srgbClr val="E3FCEF"/>
-                </a:solidFill>
-                <a:latin typeface="Arial" pitchFamily="34" charset="0"/>
-                <a:ea typeface="Arial" pitchFamily="34" charset="-122"/>
-                <a:cs typeface="Arial" pitchFamily="34" charset="-120"/>
+              <a:rPr lang="en-US" sz="850" dirty="0">
+                <a:solidFill>
+                  <a:srgbClr val="5A7A68"/>
+                </a:solidFill>
+                <a:latin typeface="Arial" panose="020B0604020202020204" pitchFamily="34" charset="0"/>
+                <a:ea typeface="Arial" panose="020B0604020202020204" pitchFamily="34" charset="-122"/>
+                <a:cs typeface="Arial" panose="020B0604020202020204" pitchFamily="34" charset="-120"/>
               </a:rPr>
               <a:t>Address: Plot 4, Kampala Road, Kampala, Uganda</a:t>
             </a:r>
@@ -2106,27 +2116,1295 @@
             <a:avLst/>
           </a:prstGeom>
           <a:noFill/>
-          <a:ln/>
         </p:spPr>
         <p:txBody>
           <a:bodyPr wrap="square" rtlCol="0" anchor="ctr"/>
           <a:lstStyle/>
           <a:p>
-            <a:pPr indent="0" marL="0">
+            <a:pPr marL="0" indent="0">
               <a:buNone/>
             </a:pPr>
             <a:r>
               <a:rPr lang="en-US" sz="1100" b="1" dirty="0">
                 <a:solidFill>
-                  <a:srgbClr val="C17F00"/>
-                </a:solidFill>
-                <a:latin typeface="Arial" pitchFamily="34" charset="0"/>
-                <a:ea typeface="Arial" pitchFamily="34" charset="-122"/>
-                <a:cs typeface="Arial" pitchFamily="34" charset="-120"/>
+                  <a:srgbClr val="F4F9F5"/>
+                </a:solidFill>
+                <a:latin typeface="Arial" panose="020B0604020202020204" pitchFamily="34" charset="0"/>
+                <a:ea typeface="Arial" panose="020B0604020202020204" pitchFamily="34" charset="-122"/>
+                <a:cs typeface="Arial" panose="020B0604020202020204" pitchFamily="34" charset="-120"/>
               </a:rPr>
               <a:t>Co-Own Vetted Assets · Earn Real Profit Share</a:t>
             </a:r>
             <a:endParaRPr lang="en-US" sz="1100" dirty="0"/>
+          </a:p>
+        </p:txBody>
+      </p:sp>
+    </p:spTree>
+  </p:cSld>
+  <p:clrMapOvr>
+    <a:masterClrMapping/>
+  </p:clrMapOvr>
+</p:sld>
+</file>
+
+<file path=ppt/slides/slide11.xml><?xml version="1.0" encoding="utf-8"?>
+<p:sld xmlns:a="http://schemas.openxmlformats.org/drawingml/2006/main" xmlns:r="http://schemas.openxmlformats.org/officeDocument/2006/relationships" xmlns:p="http://schemas.openxmlformats.org/presentationml/2006/main">
+  <p:cSld>
+    <p:bg>
+      <p:bgPr>
+        <a:solidFill>
+          <a:srgbClr val="FFFFFF"/>
+        </a:solidFill>
+        <a:effectLst/>
+      </p:bgPr>
+    </p:bg>
+    <p:spTree>
+      <p:nvGrpSpPr>
+        <p:cNvPr id="1" name=""/>
+        <p:cNvGrpSpPr/>
+        <p:nvPr/>
+      </p:nvGrpSpPr>
+      <p:grpSpPr/>
+      <p:pic>
+        <p:nvPicPr>
+          <p:cNvPr id="2" name="Picture 1"/>
+          <p:cNvPicPr>
+            <a:picLocks noChangeAspect="1"/>
+          </p:cNvPicPr>
+          <p:nvPr/>
+        </p:nvPicPr>
+        <p:blipFill>
+          <a:blip r:embed="rId1"/>
+          <a:stretch>
+            <a:fillRect/>
+          </a:stretch>
+        </p:blipFill>
+        <p:spPr>
+          <a:xfrm>
+            <a:off x="1072990" y="1005840"/>
+            <a:ext cx="2426020" cy="3840480"/>
+          </a:xfrm>
+          <a:prstGeom prst="rect">
+            <a:avLst/>
+          </a:prstGeom>
+        </p:spPr>
+      </p:pic>
+      <p:pic>
+        <p:nvPicPr>
+          <p:cNvPr id="3" name="Picture 2"/>
+          <p:cNvPicPr>
+            <a:picLocks noChangeAspect="1"/>
+          </p:cNvPicPr>
+          <p:nvPr/>
+        </p:nvPicPr>
+        <p:blipFill>
+          <a:blip r:embed="rId2"/>
+          <a:stretch>
+            <a:fillRect/>
+          </a:stretch>
+        </p:blipFill>
+        <p:spPr>
+          <a:xfrm>
+            <a:off x="5633234" y="1005840"/>
+            <a:ext cx="2449532" cy="3840480"/>
+          </a:xfrm>
+          <a:prstGeom prst="rect">
+            <a:avLst/>
+          </a:prstGeom>
+        </p:spPr>
+      </p:pic>
+      <p:sp>
+        <p:nvSpPr>
+          <p:cNvPr id="4" name="TextBox 3"/>
+          <p:cNvSpPr txBox="1"/>
+          <p:nvPr/>
+        </p:nvSpPr>
+        <p:spPr>
+          <a:xfrm>
+            <a:off x="457200" y="182880"/>
+            <a:ext cx="8229600" cy="731520"/>
+          </a:xfrm>
+          <a:prstGeom prst="rect">
+            <a:avLst/>
+          </a:prstGeom>
+          <a:noFill/>
+        </p:spPr>
+        <p:txBody>
+          <a:bodyPr wrap="square" lIns="0" tIns="0" rIns="0" bIns="0">
+            <a:spAutoFit/>
+          </a:bodyPr>
+          <a:lstStyle/>
+          <a:p>
+            <a:pPr>
+              <a:spcAft>
+                <a:spcPts val="200"/>
+              </a:spcAft>
+            </a:pPr>
+            <a:r>
+              <a:rPr sz="1000" b="1">
+                <a:solidFill>
+                  <a:srgbClr val="0D1F15"/>
+                </a:solidFill>
+                <a:latin typeface="Arial" panose="020B0604020202020204"/>
+              </a:rPr>
+              <a:t>APP FLOW DEMO</a:t>
+            </a:r>
+            <a:endParaRPr sz="1000" b="1">
+              <a:solidFill>
+                <a:srgbClr val="0D1F15"/>
+              </a:solidFill>
+              <a:latin typeface="Arial" panose="020B0604020202020204"/>
+            </a:endParaRPr>
+          </a:p>
+          <a:p>
+            <a:pPr>
+              <a:spcAft>
+                <a:spcPts val="0"/>
+              </a:spcAft>
+            </a:pPr>
+            <a:r>
+              <a:rPr sz="2000" b="1">
+                <a:solidFill>
+                  <a:srgbClr val="0D1F15"/>
+                </a:solidFill>
+                <a:latin typeface="Arial" panose="020B0604020202020204"/>
+              </a:rPr>
+              <a:t>1. User Registration &amp; Compliance Onboarding</a:t>
+            </a:r>
+            <a:endParaRPr sz="2000" b="1">
+              <a:solidFill>
+                <a:srgbClr val="0D1F15"/>
+              </a:solidFill>
+              <a:latin typeface="Arial" panose="020B0604020202020204"/>
+            </a:endParaRPr>
+          </a:p>
+        </p:txBody>
+      </p:sp>
+    </p:spTree>
+  </p:cSld>
+  <p:clrMapOvr>
+    <a:masterClrMapping/>
+  </p:clrMapOvr>
+</p:sld>
+</file>
+
+<file path=ppt/slides/slide12.xml><?xml version="1.0" encoding="utf-8"?>
+<p:sld xmlns:a="http://schemas.openxmlformats.org/drawingml/2006/main" xmlns:r="http://schemas.openxmlformats.org/officeDocument/2006/relationships" xmlns:p="http://schemas.openxmlformats.org/presentationml/2006/main">
+  <p:cSld>
+    <p:bg>
+      <p:bgPr>
+        <a:solidFill>
+          <a:srgbClr val="F4F9F5"/>
+        </a:solidFill>
+        <a:effectLst/>
+      </p:bgPr>
+    </p:bg>
+    <p:spTree>
+      <p:nvGrpSpPr>
+        <p:cNvPr id="1" name=""/>
+        <p:cNvGrpSpPr/>
+        <p:nvPr/>
+      </p:nvGrpSpPr>
+      <p:grpSpPr/>
+      <p:pic>
+        <p:nvPicPr>
+          <p:cNvPr id="2" name="Picture 1"/>
+          <p:cNvPicPr>
+            <a:picLocks noChangeAspect="1"/>
+          </p:cNvPicPr>
+          <p:nvPr/>
+        </p:nvPicPr>
+        <p:blipFill>
+          <a:blip r:embed="rId1"/>
+          <a:stretch>
+            <a:fillRect/>
+          </a:stretch>
+        </p:blipFill>
+        <p:spPr>
+          <a:xfrm>
+            <a:off x="1063712" y="1005840"/>
+            <a:ext cx="2444576" cy="3840480"/>
+          </a:xfrm>
+          <a:prstGeom prst="rect">
+            <a:avLst/>
+          </a:prstGeom>
+        </p:spPr>
+      </p:pic>
+      <p:pic>
+        <p:nvPicPr>
+          <p:cNvPr id="3" name="Picture 2"/>
+          <p:cNvPicPr>
+            <a:picLocks noChangeAspect="1"/>
+          </p:cNvPicPr>
+          <p:nvPr/>
+        </p:nvPicPr>
+        <p:blipFill>
+          <a:blip r:embed="rId2"/>
+          <a:stretch>
+            <a:fillRect/>
+          </a:stretch>
+        </p:blipFill>
+        <p:spPr>
+          <a:xfrm>
+            <a:off x="5628265" y="1005840"/>
+            <a:ext cx="2459470" cy="3840480"/>
+          </a:xfrm>
+          <a:prstGeom prst="rect">
+            <a:avLst/>
+          </a:prstGeom>
+        </p:spPr>
+      </p:pic>
+      <p:sp>
+        <p:nvSpPr>
+          <p:cNvPr id="4" name="TextBox 3"/>
+          <p:cNvSpPr txBox="1"/>
+          <p:nvPr/>
+        </p:nvSpPr>
+        <p:spPr>
+          <a:xfrm>
+            <a:off x="457200" y="182880"/>
+            <a:ext cx="8229600" cy="731520"/>
+          </a:xfrm>
+          <a:prstGeom prst="rect">
+            <a:avLst/>
+          </a:prstGeom>
+          <a:noFill/>
+        </p:spPr>
+        <p:txBody>
+          <a:bodyPr wrap="square" lIns="0" tIns="0" rIns="0" bIns="0">
+            <a:spAutoFit/>
+          </a:bodyPr>
+          <a:lstStyle/>
+          <a:p>
+            <a:pPr>
+              <a:spcAft>
+                <a:spcPts val="200"/>
+              </a:spcAft>
+            </a:pPr>
+            <a:r>
+              <a:rPr sz="1000" b="1">
+                <a:solidFill>
+                  <a:srgbClr val="0D1F15"/>
+                </a:solidFill>
+                <a:latin typeface="Arial" panose="020B0604020202020204"/>
+              </a:rPr>
+              <a:t>APP FLOW DEMO</a:t>
+            </a:r>
+            <a:endParaRPr sz="1000" b="1">
+              <a:solidFill>
+                <a:srgbClr val="0D1F15"/>
+              </a:solidFill>
+              <a:latin typeface="Arial" panose="020B0604020202020204"/>
+            </a:endParaRPr>
+          </a:p>
+          <a:p>
+            <a:pPr>
+              <a:spcAft>
+                <a:spcPts val="0"/>
+              </a:spcAft>
+            </a:pPr>
+            <a:r>
+              <a:rPr sz="2000" b="1">
+                <a:solidFill>
+                  <a:srgbClr val="0D1F15"/>
+                </a:solidFill>
+                <a:latin typeface="Arial" panose="020B0604020202020204"/>
+              </a:rPr>
+              <a:t>2. Document Upload &amp; Automated OCR Verification</a:t>
+            </a:r>
+            <a:endParaRPr sz="2000" b="1">
+              <a:solidFill>
+                <a:srgbClr val="0D1F15"/>
+              </a:solidFill>
+              <a:latin typeface="Arial" panose="020B0604020202020204"/>
+            </a:endParaRPr>
+          </a:p>
+        </p:txBody>
+      </p:sp>
+    </p:spTree>
+  </p:cSld>
+  <p:clrMapOvr>
+    <a:masterClrMapping/>
+  </p:clrMapOvr>
+</p:sld>
+</file>
+
+<file path=ppt/slides/slide13.xml><?xml version="1.0" encoding="utf-8"?>
+<p:sld xmlns:a="http://schemas.openxmlformats.org/drawingml/2006/main" xmlns:r="http://schemas.openxmlformats.org/officeDocument/2006/relationships" xmlns:p="http://schemas.openxmlformats.org/presentationml/2006/main">
+  <p:cSld>
+    <p:bg>
+      <p:bgPr>
+        <a:solidFill>
+          <a:srgbClr val="FFFFFF"/>
+        </a:solidFill>
+        <a:effectLst/>
+      </p:bgPr>
+    </p:bg>
+    <p:spTree>
+      <p:nvGrpSpPr>
+        <p:cNvPr id="1" name=""/>
+        <p:cNvGrpSpPr/>
+        <p:nvPr/>
+      </p:nvGrpSpPr>
+      <p:grpSpPr/>
+      <p:pic>
+        <p:nvPicPr>
+          <p:cNvPr id="2" name="Picture 1"/>
+          <p:cNvPicPr>
+            <a:picLocks noChangeAspect="1"/>
+          </p:cNvPicPr>
+          <p:nvPr/>
+        </p:nvPicPr>
+        <p:blipFill>
+          <a:blip r:embed="rId1"/>
+          <a:stretch>
+            <a:fillRect/>
+          </a:stretch>
+        </p:blipFill>
+        <p:spPr>
+          <a:xfrm>
+            <a:off x="1052644" y="1005840"/>
+            <a:ext cx="2466711" cy="3840480"/>
+          </a:xfrm>
+          <a:prstGeom prst="rect">
+            <a:avLst/>
+          </a:prstGeom>
+        </p:spPr>
+      </p:pic>
+      <p:pic>
+        <p:nvPicPr>
+          <p:cNvPr id="3" name="Picture 2"/>
+          <p:cNvPicPr>
+            <a:picLocks noChangeAspect="1"/>
+          </p:cNvPicPr>
+          <p:nvPr/>
+        </p:nvPicPr>
+        <p:blipFill>
+          <a:blip r:embed="rId2"/>
+          <a:stretch>
+            <a:fillRect/>
+          </a:stretch>
+        </p:blipFill>
+        <p:spPr>
+          <a:xfrm>
+            <a:off x="5648044" y="1005840"/>
+            <a:ext cx="2419911" cy="3840480"/>
+          </a:xfrm>
+          <a:prstGeom prst="rect">
+            <a:avLst/>
+          </a:prstGeom>
+        </p:spPr>
+      </p:pic>
+      <p:sp>
+        <p:nvSpPr>
+          <p:cNvPr id="4" name="TextBox 3"/>
+          <p:cNvSpPr txBox="1"/>
+          <p:nvPr/>
+        </p:nvSpPr>
+        <p:spPr>
+          <a:xfrm>
+            <a:off x="457200" y="182880"/>
+            <a:ext cx="8229600" cy="731520"/>
+          </a:xfrm>
+          <a:prstGeom prst="rect">
+            <a:avLst/>
+          </a:prstGeom>
+          <a:noFill/>
+        </p:spPr>
+        <p:txBody>
+          <a:bodyPr wrap="square" lIns="0" tIns="0" rIns="0" bIns="0">
+            <a:spAutoFit/>
+          </a:bodyPr>
+          <a:lstStyle/>
+          <a:p>
+            <a:pPr>
+              <a:spcAft>
+                <a:spcPts val="200"/>
+              </a:spcAft>
+            </a:pPr>
+            <a:r>
+              <a:rPr sz="1000" b="1">
+                <a:solidFill>
+                  <a:srgbClr val="0D1F15"/>
+                </a:solidFill>
+                <a:latin typeface="Arial" panose="020B0604020202020204"/>
+              </a:rPr>
+              <a:t>APP FLOW DEMO</a:t>
+            </a:r>
+            <a:endParaRPr sz="1000" b="1">
+              <a:solidFill>
+                <a:srgbClr val="0D1F15"/>
+              </a:solidFill>
+              <a:latin typeface="Arial" panose="020B0604020202020204"/>
+            </a:endParaRPr>
+          </a:p>
+          <a:p>
+            <a:pPr>
+              <a:spcAft>
+                <a:spcPts val="0"/>
+              </a:spcAft>
+            </a:pPr>
+            <a:r>
+              <a:rPr sz="2000" b="1">
+                <a:solidFill>
+                  <a:srgbClr val="0D1F15"/>
+                </a:solidFill>
+                <a:latin typeface="Arial" panose="020B0604020202020204"/>
+              </a:rPr>
+              <a:t>3. NIRA NIN Database API &amp; NSSF Registry Sync</a:t>
+            </a:r>
+            <a:endParaRPr sz="2000" b="1">
+              <a:solidFill>
+                <a:srgbClr val="0D1F15"/>
+              </a:solidFill>
+              <a:latin typeface="Arial" panose="020B0604020202020204"/>
+            </a:endParaRPr>
+          </a:p>
+        </p:txBody>
+      </p:sp>
+    </p:spTree>
+  </p:cSld>
+  <p:clrMapOvr>
+    <a:masterClrMapping/>
+  </p:clrMapOvr>
+</p:sld>
+</file>
+
+<file path=ppt/slides/slide14.xml><?xml version="1.0" encoding="utf-8"?>
+<p:sld xmlns:a="http://schemas.openxmlformats.org/drawingml/2006/main" xmlns:r="http://schemas.openxmlformats.org/officeDocument/2006/relationships" xmlns:p="http://schemas.openxmlformats.org/presentationml/2006/main">
+  <p:cSld>
+    <p:bg>
+      <p:bgPr>
+        <a:solidFill>
+          <a:srgbClr val="F4F9F5"/>
+        </a:solidFill>
+        <a:effectLst/>
+      </p:bgPr>
+    </p:bg>
+    <p:spTree>
+      <p:nvGrpSpPr>
+        <p:cNvPr id="1" name=""/>
+        <p:cNvGrpSpPr/>
+        <p:nvPr/>
+      </p:nvGrpSpPr>
+      <p:grpSpPr/>
+      <p:pic>
+        <p:nvPicPr>
+          <p:cNvPr id="2" name="Picture 1"/>
+          <p:cNvPicPr>
+            <a:picLocks noChangeAspect="1"/>
+          </p:cNvPicPr>
+          <p:nvPr/>
+        </p:nvPicPr>
+        <p:blipFill>
+          <a:blip r:embed="rId1"/>
+          <a:stretch>
+            <a:fillRect/>
+          </a:stretch>
+        </p:blipFill>
+        <p:spPr>
+          <a:xfrm>
+            <a:off x="-382276" y="1005840"/>
+            <a:ext cx="5336552" cy="3840480"/>
+          </a:xfrm>
+          <a:prstGeom prst="rect">
+            <a:avLst/>
+          </a:prstGeom>
+        </p:spPr>
+      </p:pic>
+      <p:pic>
+        <p:nvPicPr>
+          <p:cNvPr id="3" name="Picture 2"/>
+          <p:cNvPicPr>
+            <a:picLocks noChangeAspect="1"/>
+          </p:cNvPicPr>
+          <p:nvPr/>
+        </p:nvPicPr>
+        <p:blipFill>
+          <a:blip r:embed="rId2"/>
+          <a:stretch>
+            <a:fillRect/>
+          </a:stretch>
+        </p:blipFill>
+        <p:spPr>
+          <a:xfrm>
+            <a:off x="5616042" y="1005840"/>
+            <a:ext cx="2483915" cy="3840480"/>
+          </a:xfrm>
+          <a:prstGeom prst="rect">
+            <a:avLst/>
+          </a:prstGeom>
+        </p:spPr>
+      </p:pic>
+      <p:sp>
+        <p:nvSpPr>
+          <p:cNvPr id="4" name="TextBox 3"/>
+          <p:cNvSpPr txBox="1"/>
+          <p:nvPr/>
+        </p:nvSpPr>
+        <p:spPr>
+          <a:xfrm>
+            <a:off x="457200" y="182880"/>
+            <a:ext cx="8229600" cy="731520"/>
+          </a:xfrm>
+          <a:prstGeom prst="rect">
+            <a:avLst/>
+          </a:prstGeom>
+          <a:noFill/>
+        </p:spPr>
+        <p:txBody>
+          <a:bodyPr wrap="square" lIns="0" tIns="0" rIns="0" bIns="0">
+            <a:spAutoFit/>
+          </a:bodyPr>
+          <a:lstStyle/>
+          <a:p>
+            <a:pPr>
+              <a:spcAft>
+                <a:spcPts val="200"/>
+              </a:spcAft>
+            </a:pPr>
+            <a:r>
+              <a:rPr sz="1000" b="1">
+                <a:solidFill>
+                  <a:srgbClr val="0D1F15"/>
+                </a:solidFill>
+                <a:latin typeface="Arial" panose="020B0604020202020204"/>
+              </a:rPr>
+              <a:t>APP FLOW DEMO</a:t>
+            </a:r>
+            <a:endParaRPr sz="1000" b="1">
+              <a:solidFill>
+                <a:srgbClr val="0D1F15"/>
+              </a:solidFill>
+              <a:latin typeface="Arial" panose="020B0604020202020204"/>
+            </a:endParaRPr>
+          </a:p>
+          <a:p>
+            <a:pPr>
+              <a:spcAft>
+                <a:spcPts val="0"/>
+              </a:spcAft>
+            </a:pPr>
+            <a:r>
+              <a:rPr sz="2000" b="1">
+                <a:solidFill>
+                  <a:srgbClr val="0D1F15"/>
+                </a:solidFill>
+                <a:latin typeface="Arial" panose="020B0604020202020204"/>
+              </a:rPr>
+              <a:t>4. Browse and Filter Diversified Asset Listings</a:t>
+            </a:r>
+            <a:endParaRPr sz="2000" b="1">
+              <a:solidFill>
+                <a:srgbClr val="0D1F15"/>
+              </a:solidFill>
+              <a:latin typeface="Arial" panose="020B0604020202020204"/>
+            </a:endParaRPr>
+          </a:p>
+        </p:txBody>
+      </p:sp>
+    </p:spTree>
+  </p:cSld>
+  <p:clrMapOvr>
+    <a:masterClrMapping/>
+  </p:clrMapOvr>
+</p:sld>
+</file>
+
+<file path=ppt/slides/slide15.xml><?xml version="1.0" encoding="utf-8"?>
+<p:sld xmlns:a="http://schemas.openxmlformats.org/drawingml/2006/main" xmlns:r="http://schemas.openxmlformats.org/officeDocument/2006/relationships" xmlns:p="http://schemas.openxmlformats.org/presentationml/2006/main">
+  <p:cSld>
+    <p:bg>
+      <p:bgPr>
+        <a:solidFill>
+          <a:srgbClr val="FFFFFF"/>
+        </a:solidFill>
+        <a:effectLst/>
+      </p:bgPr>
+    </p:bg>
+    <p:spTree>
+      <p:nvGrpSpPr>
+        <p:cNvPr id="1" name=""/>
+        <p:cNvGrpSpPr/>
+        <p:nvPr/>
+      </p:nvGrpSpPr>
+      <p:grpSpPr/>
+      <p:pic>
+        <p:nvPicPr>
+          <p:cNvPr id="2" name="Picture 1"/>
+          <p:cNvPicPr>
+            <a:picLocks noChangeAspect="1"/>
+          </p:cNvPicPr>
+          <p:nvPr/>
+        </p:nvPicPr>
+        <p:blipFill>
+          <a:blip r:embed="rId1"/>
+          <a:stretch>
+            <a:fillRect/>
+          </a:stretch>
+        </p:blipFill>
+        <p:spPr>
+          <a:xfrm>
+            <a:off x="1034753" y="1005840"/>
+            <a:ext cx="2502493" cy="3840480"/>
+          </a:xfrm>
+          <a:prstGeom prst="rect">
+            <a:avLst/>
+          </a:prstGeom>
+        </p:spPr>
+      </p:pic>
+      <p:pic>
+        <p:nvPicPr>
+          <p:cNvPr id="3" name="Picture 2"/>
+          <p:cNvPicPr>
+            <a:picLocks noChangeAspect="1"/>
+          </p:cNvPicPr>
+          <p:nvPr/>
+        </p:nvPicPr>
+        <p:blipFill>
+          <a:blip r:embed="rId2"/>
+          <a:stretch>
+            <a:fillRect/>
+          </a:stretch>
+        </p:blipFill>
+        <p:spPr>
+          <a:xfrm>
+            <a:off x="5635027" y="1005840"/>
+            <a:ext cx="2445946" cy="3840480"/>
+          </a:xfrm>
+          <a:prstGeom prst="rect">
+            <a:avLst/>
+          </a:prstGeom>
+        </p:spPr>
+      </p:pic>
+      <p:sp>
+        <p:nvSpPr>
+          <p:cNvPr id="4" name="TextBox 3"/>
+          <p:cNvSpPr txBox="1"/>
+          <p:nvPr/>
+        </p:nvSpPr>
+        <p:spPr>
+          <a:xfrm>
+            <a:off x="457200" y="182880"/>
+            <a:ext cx="8229600" cy="731520"/>
+          </a:xfrm>
+          <a:prstGeom prst="rect">
+            <a:avLst/>
+          </a:prstGeom>
+          <a:noFill/>
+        </p:spPr>
+        <p:txBody>
+          <a:bodyPr wrap="square" lIns="0" tIns="0" rIns="0" bIns="0">
+            <a:spAutoFit/>
+          </a:bodyPr>
+          <a:lstStyle/>
+          <a:p>
+            <a:pPr>
+              <a:spcAft>
+                <a:spcPts val="200"/>
+              </a:spcAft>
+            </a:pPr>
+            <a:r>
+              <a:rPr sz="1000" b="1">
+                <a:solidFill>
+                  <a:srgbClr val="0D1F15"/>
+                </a:solidFill>
+                <a:latin typeface="Arial" panose="020B0604020202020204"/>
+              </a:rPr>
+              <a:t>APP FLOW DEMO</a:t>
+            </a:r>
+            <a:endParaRPr sz="1000" b="1">
+              <a:solidFill>
+                <a:srgbClr val="0D1F15"/>
+              </a:solidFill>
+              <a:latin typeface="Arial" panose="020B0604020202020204"/>
+            </a:endParaRPr>
+          </a:p>
+          <a:p>
+            <a:pPr>
+              <a:spcAft>
+                <a:spcPts val="0"/>
+              </a:spcAft>
+            </a:pPr>
+            <a:r>
+              <a:rPr sz="2000" b="1">
+                <a:solidFill>
+                  <a:srgbClr val="0D1F15"/>
+                </a:solidFill>
+                <a:latin typeface="Arial" panose="020B0604020202020204"/>
+              </a:rPr>
+              <a:t>5. Fractional Hisa Selection &amp; Yield Calculator</a:t>
+            </a:r>
+            <a:endParaRPr sz="2000" b="1">
+              <a:solidFill>
+                <a:srgbClr val="0D1F15"/>
+              </a:solidFill>
+              <a:latin typeface="Arial" panose="020B0604020202020204"/>
+            </a:endParaRPr>
+          </a:p>
+        </p:txBody>
+      </p:sp>
+    </p:spTree>
+  </p:cSld>
+  <p:clrMapOvr>
+    <a:masterClrMapping/>
+  </p:clrMapOvr>
+</p:sld>
+</file>
+
+<file path=ppt/slides/slide16.xml><?xml version="1.0" encoding="utf-8"?>
+<p:sld xmlns:a="http://schemas.openxmlformats.org/drawingml/2006/main" xmlns:r="http://schemas.openxmlformats.org/officeDocument/2006/relationships" xmlns:p="http://schemas.openxmlformats.org/presentationml/2006/main">
+  <p:cSld>
+    <p:bg>
+      <p:bgPr>
+        <a:solidFill>
+          <a:srgbClr val="F4F9F5"/>
+        </a:solidFill>
+        <a:effectLst/>
+      </p:bgPr>
+    </p:bg>
+    <p:spTree>
+      <p:nvGrpSpPr>
+        <p:cNvPr id="1" name=""/>
+        <p:cNvGrpSpPr/>
+        <p:nvPr/>
+      </p:nvGrpSpPr>
+      <p:grpSpPr/>
+      <p:pic>
+        <p:nvPicPr>
+          <p:cNvPr id="2" name="Picture 1"/>
+          <p:cNvPicPr>
+            <a:picLocks noChangeAspect="1"/>
+          </p:cNvPicPr>
+          <p:nvPr/>
+        </p:nvPicPr>
+        <p:blipFill>
+          <a:blip r:embed="rId1"/>
+          <a:stretch>
+            <a:fillRect/>
+          </a:stretch>
+        </p:blipFill>
+        <p:spPr>
+          <a:xfrm>
+            <a:off x="1066579" y="1005840"/>
+            <a:ext cx="2438841" cy="3840480"/>
+          </a:xfrm>
+          <a:prstGeom prst="rect">
+            <a:avLst/>
+          </a:prstGeom>
+        </p:spPr>
+      </p:pic>
+      <p:pic>
+        <p:nvPicPr>
+          <p:cNvPr id="3" name="Picture 2"/>
+          <p:cNvPicPr>
+            <a:picLocks noChangeAspect="1"/>
+          </p:cNvPicPr>
+          <p:nvPr/>
+        </p:nvPicPr>
+        <p:blipFill>
+          <a:blip r:embed="rId2"/>
+          <a:stretch>
+            <a:fillRect/>
+          </a:stretch>
+        </p:blipFill>
+        <p:spPr>
+          <a:xfrm>
+            <a:off x="5625425" y="1005840"/>
+            <a:ext cx="2465149" cy="3840480"/>
+          </a:xfrm>
+          <a:prstGeom prst="rect">
+            <a:avLst/>
+          </a:prstGeom>
+        </p:spPr>
+      </p:pic>
+      <p:sp>
+        <p:nvSpPr>
+          <p:cNvPr id="4" name="TextBox 3"/>
+          <p:cNvSpPr txBox="1"/>
+          <p:nvPr/>
+        </p:nvSpPr>
+        <p:spPr>
+          <a:xfrm>
+            <a:off x="457200" y="182880"/>
+            <a:ext cx="8229600" cy="731520"/>
+          </a:xfrm>
+          <a:prstGeom prst="rect">
+            <a:avLst/>
+          </a:prstGeom>
+          <a:noFill/>
+        </p:spPr>
+        <p:txBody>
+          <a:bodyPr wrap="square" lIns="0" tIns="0" rIns="0" bIns="0">
+            <a:spAutoFit/>
+          </a:bodyPr>
+          <a:lstStyle/>
+          <a:p>
+            <a:pPr>
+              <a:spcAft>
+                <a:spcPts val="200"/>
+              </a:spcAft>
+            </a:pPr>
+            <a:r>
+              <a:rPr sz="1000" b="1">
+                <a:solidFill>
+                  <a:srgbClr val="0D1F15"/>
+                </a:solidFill>
+                <a:latin typeface="Arial" panose="020B0604020202020204"/>
+              </a:rPr>
+              <a:t>APP FLOW DEMO</a:t>
+            </a:r>
+            <a:endParaRPr sz="1000" b="1">
+              <a:solidFill>
+                <a:srgbClr val="0D1F15"/>
+              </a:solidFill>
+              <a:latin typeface="Arial" panose="020B0604020202020204"/>
+            </a:endParaRPr>
+          </a:p>
+          <a:p>
+            <a:pPr>
+              <a:spcAft>
+                <a:spcPts val="0"/>
+              </a:spcAft>
+            </a:pPr>
+            <a:r>
+              <a:rPr sz="2000" b="1">
+                <a:solidFill>
+                  <a:srgbClr val="0D1F15"/>
+                </a:solidFill>
+                <a:latin typeface="Arial" panose="020B0604020202020204"/>
+              </a:rPr>
+              <a:t>6. Mobile Money Payment &amp; Escrow Deposits</a:t>
+            </a:r>
+            <a:endParaRPr sz="2000" b="1">
+              <a:solidFill>
+                <a:srgbClr val="0D1F15"/>
+              </a:solidFill>
+              <a:latin typeface="Arial" panose="020B0604020202020204"/>
+            </a:endParaRPr>
+          </a:p>
+        </p:txBody>
+      </p:sp>
+    </p:spTree>
+  </p:cSld>
+  <p:clrMapOvr>
+    <a:masterClrMapping/>
+  </p:clrMapOvr>
+</p:sld>
+</file>
+
+<file path=ppt/slides/slide17.xml><?xml version="1.0" encoding="utf-8"?>
+<p:sld xmlns:a="http://schemas.openxmlformats.org/drawingml/2006/main" xmlns:r="http://schemas.openxmlformats.org/officeDocument/2006/relationships" xmlns:p="http://schemas.openxmlformats.org/presentationml/2006/main">
+  <p:cSld>
+    <p:bg>
+      <p:bgPr>
+        <a:solidFill>
+          <a:srgbClr val="FFFFFF"/>
+        </a:solidFill>
+        <a:effectLst/>
+      </p:bgPr>
+    </p:bg>
+    <p:spTree>
+      <p:nvGrpSpPr>
+        <p:cNvPr id="1" name=""/>
+        <p:cNvGrpSpPr/>
+        <p:nvPr/>
+      </p:nvGrpSpPr>
+      <p:grpSpPr/>
+      <p:pic>
+        <p:nvPicPr>
+          <p:cNvPr id="2" name="Picture 1"/>
+          <p:cNvPicPr>
+            <a:picLocks noChangeAspect="1"/>
+          </p:cNvPicPr>
+          <p:nvPr/>
+        </p:nvPicPr>
+        <p:blipFill>
+          <a:blip r:embed="rId1"/>
+          <a:stretch>
+            <a:fillRect/>
+          </a:stretch>
+        </p:blipFill>
+        <p:spPr>
+          <a:xfrm>
+            <a:off x="1068422" y="1005840"/>
+            <a:ext cx="2435156" cy="3840480"/>
+          </a:xfrm>
+          <a:prstGeom prst="rect">
+            <a:avLst/>
+          </a:prstGeom>
+        </p:spPr>
+      </p:pic>
+      <p:pic>
+        <p:nvPicPr>
+          <p:cNvPr id="3" name="Picture 2"/>
+          <p:cNvPicPr>
+            <a:picLocks noChangeAspect="1"/>
+          </p:cNvPicPr>
+          <p:nvPr/>
+        </p:nvPicPr>
+        <p:blipFill>
+          <a:blip r:embed="rId2"/>
+          <a:stretch>
+            <a:fillRect/>
+          </a:stretch>
+        </p:blipFill>
+        <p:spPr>
+          <a:xfrm>
+            <a:off x="5635892" y="1005840"/>
+            <a:ext cx="2444216" cy="3840480"/>
+          </a:xfrm>
+          <a:prstGeom prst="rect">
+            <a:avLst/>
+          </a:prstGeom>
+        </p:spPr>
+      </p:pic>
+      <p:sp>
+        <p:nvSpPr>
+          <p:cNvPr id="4" name="TextBox 3"/>
+          <p:cNvSpPr txBox="1"/>
+          <p:nvPr/>
+        </p:nvSpPr>
+        <p:spPr>
+          <a:xfrm>
+            <a:off x="457200" y="182880"/>
+            <a:ext cx="8229600" cy="731520"/>
+          </a:xfrm>
+          <a:prstGeom prst="rect">
+            <a:avLst/>
+          </a:prstGeom>
+          <a:noFill/>
+        </p:spPr>
+        <p:txBody>
+          <a:bodyPr wrap="square" lIns="0" tIns="0" rIns="0" bIns="0">
+            <a:spAutoFit/>
+          </a:bodyPr>
+          <a:lstStyle/>
+          <a:p>
+            <a:pPr>
+              <a:spcAft>
+                <a:spcPts val="200"/>
+              </a:spcAft>
+            </a:pPr>
+            <a:r>
+              <a:rPr sz="1000" b="1">
+                <a:solidFill>
+                  <a:srgbClr val="0D1F15"/>
+                </a:solidFill>
+                <a:latin typeface="Arial" panose="020B0604020202020204"/>
+              </a:rPr>
+              <a:t>APP FLOW DEMO</a:t>
+            </a:r>
+            <a:endParaRPr sz="1000" b="1">
+              <a:solidFill>
+                <a:srgbClr val="0D1F15"/>
+              </a:solidFill>
+              <a:latin typeface="Arial" panose="020B0604020202020204"/>
+            </a:endParaRPr>
+          </a:p>
+          <a:p>
+            <a:pPr>
+              <a:spcAft>
+                <a:spcPts val="0"/>
+              </a:spcAft>
+            </a:pPr>
+            <a:r>
+              <a:rPr sz="2000" b="1">
+                <a:solidFill>
+                  <a:srgbClr val="0D1F15"/>
+                </a:solidFill>
+                <a:latin typeface="Arial" panose="020B0604020202020204"/>
+              </a:rPr>
+              <a:t>7. Real-Time Portfolio Ledger &amp; Wallet Balance</a:t>
+            </a:r>
+            <a:endParaRPr sz="2000" b="1">
+              <a:solidFill>
+                <a:srgbClr val="0D1F15"/>
+              </a:solidFill>
+              <a:latin typeface="Arial" panose="020B0604020202020204"/>
+            </a:endParaRPr>
+          </a:p>
+        </p:txBody>
+      </p:sp>
+    </p:spTree>
+  </p:cSld>
+  <p:clrMapOvr>
+    <a:masterClrMapping/>
+  </p:clrMapOvr>
+</p:sld>
+</file>
+
+<file path=ppt/slides/slide18.xml><?xml version="1.0" encoding="utf-8"?>
+<p:sld xmlns:a="http://schemas.openxmlformats.org/drawingml/2006/main" xmlns:r="http://schemas.openxmlformats.org/officeDocument/2006/relationships" xmlns:p="http://schemas.openxmlformats.org/presentationml/2006/main">
+  <p:cSld>
+    <p:bg>
+      <p:bgPr>
+        <a:solidFill>
+          <a:srgbClr val="F4F9F5"/>
+        </a:solidFill>
+        <a:effectLst/>
+      </p:bgPr>
+    </p:bg>
+    <p:spTree>
+      <p:nvGrpSpPr>
+        <p:cNvPr id="1" name=""/>
+        <p:cNvGrpSpPr/>
+        <p:nvPr/>
+      </p:nvGrpSpPr>
+      <p:grpSpPr/>
+      <p:pic>
+        <p:nvPicPr>
+          <p:cNvPr id="2" name="Picture 1"/>
+          <p:cNvPicPr>
+            <a:picLocks noChangeAspect="1"/>
+          </p:cNvPicPr>
+          <p:nvPr/>
+        </p:nvPicPr>
+        <p:blipFill>
+          <a:blip r:embed="rId1"/>
+          <a:stretch>
+            <a:fillRect/>
+          </a:stretch>
+        </p:blipFill>
+        <p:spPr>
+          <a:xfrm>
+            <a:off x="1076868" y="1005840"/>
+            <a:ext cx="2418264" cy="3840480"/>
+          </a:xfrm>
+          <a:prstGeom prst="rect">
+            <a:avLst/>
+          </a:prstGeom>
+        </p:spPr>
+      </p:pic>
+      <p:pic>
+        <p:nvPicPr>
+          <p:cNvPr id="3" name="Picture 2"/>
+          <p:cNvPicPr>
+            <a:picLocks noChangeAspect="1"/>
+          </p:cNvPicPr>
+          <p:nvPr/>
+        </p:nvPicPr>
+        <p:blipFill>
+          <a:blip r:embed="rId2"/>
+          <a:stretch>
+            <a:fillRect/>
+          </a:stretch>
+        </p:blipFill>
+        <p:spPr>
+          <a:xfrm>
+            <a:off x="5619871" y="1005840"/>
+            <a:ext cx="2476257" cy="3840480"/>
+          </a:xfrm>
+          <a:prstGeom prst="rect">
+            <a:avLst/>
+          </a:prstGeom>
+        </p:spPr>
+      </p:pic>
+      <p:sp>
+        <p:nvSpPr>
+          <p:cNvPr id="4" name="TextBox 3"/>
+          <p:cNvSpPr txBox="1"/>
+          <p:nvPr/>
+        </p:nvSpPr>
+        <p:spPr>
+          <a:xfrm>
+            <a:off x="457200" y="182880"/>
+            <a:ext cx="8229600" cy="731520"/>
+          </a:xfrm>
+          <a:prstGeom prst="rect">
+            <a:avLst/>
+          </a:prstGeom>
+          <a:noFill/>
+        </p:spPr>
+        <p:txBody>
+          <a:bodyPr wrap="square" lIns="0" tIns="0" rIns="0" bIns="0">
+            <a:spAutoFit/>
+          </a:bodyPr>
+          <a:lstStyle/>
+          <a:p>
+            <a:pPr>
+              <a:spcAft>
+                <a:spcPts val="200"/>
+              </a:spcAft>
+            </a:pPr>
+            <a:r>
+              <a:rPr sz="1000" b="1">
+                <a:solidFill>
+                  <a:srgbClr val="0D1F15"/>
+                </a:solidFill>
+                <a:latin typeface="Arial" panose="020B0604020202020204"/>
+              </a:rPr>
+              <a:t>APP FLOW DEMO</a:t>
+            </a:r>
+            <a:endParaRPr sz="1000" b="1">
+              <a:solidFill>
+                <a:srgbClr val="0D1F15"/>
+              </a:solidFill>
+              <a:latin typeface="Arial" panose="020B0604020202020204"/>
+            </a:endParaRPr>
+          </a:p>
+          <a:p>
+            <a:pPr>
+              <a:spcAft>
+                <a:spcPts val="0"/>
+              </a:spcAft>
+            </a:pPr>
+            <a:r>
+              <a:rPr sz="2000" b="1">
+                <a:solidFill>
+                  <a:srgbClr val="0D1F15"/>
+                </a:solidFill>
+                <a:latin typeface="Arial" panose="020B0604020202020204"/>
+              </a:rPr>
+              <a:t>8. SmartLife Flexi NSSF Pension Auto-Sweeps</a:t>
+            </a:r>
+            <a:endParaRPr sz="2000" b="1">
+              <a:solidFill>
+                <a:srgbClr val="0D1F15"/>
+              </a:solidFill>
+              <a:latin typeface="Arial" panose="020B0604020202020204"/>
+            </a:endParaRPr>
+          </a:p>
+        </p:txBody>
+      </p:sp>
+    </p:spTree>
+  </p:cSld>
+  <p:clrMapOvr>
+    <a:masterClrMapping/>
+  </p:clrMapOvr>
+</p:sld>
+</file>
+
+<file path=ppt/slides/slide19.xml><?xml version="1.0" encoding="utf-8"?>
+<p:sld xmlns:a="http://schemas.openxmlformats.org/drawingml/2006/main" xmlns:r="http://schemas.openxmlformats.org/officeDocument/2006/relationships" xmlns:p="http://schemas.openxmlformats.org/presentationml/2006/main">
+  <p:cSld>
+    <p:bg>
+      <p:bgPr>
+        <a:solidFill>
+          <a:srgbClr val="FFFFFF"/>
+        </a:solidFill>
+        <a:effectLst/>
+      </p:bgPr>
+    </p:bg>
+    <p:spTree>
+      <p:nvGrpSpPr>
+        <p:cNvPr id="1" name=""/>
+        <p:cNvGrpSpPr/>
+        <p:nvPr/>
+      </p:nvGrpSpPr>
+      <p:grpSpPr/>
+      <p:pic>
+        <p:nvPicPr>
+          <p:cNvPr id="2" name="Picture 1"/>
+          <p:cNvPicPr>
+            <a:picLocks noChangeAspect="1"/>
+          </p:cNvPicPr>
+          <p:nvPr/>
+        </p:nvPicPr>
+        <p:blipFill>
+          <a:blip r:embed="rId1"/>
+          <a:stretch>
+            <a:fillRect/>
+          </a:stretch>
+        </p:blipFill>
+        <p:spPr>
+          <a:xfrm>
+            <a:off x="1060373" y="1005840"/>
+            <a:ext cx="2451254" cy="3840480"/>
+          </a:xfrm>
+          <a:prstGeom prst="rect">
+            <a:avLst/>
+          </a:prstGeom>
+        </p:spPr>
+      </p:pic>
+      <p:pic>
+        <p:nvPicPr>
+          <p:cNvPr id="3" name="Picture 2"/>
+          <p:cNvPicPr>
+            <a:picLocks noChangeAspect="1"/>
+          </p:cNvPicPr>
+          <p:nvPr/>
+        </p:nvPicPr>
+        <p:blipFill>
+          <a:blip r:embed="rId2"/>
+          <a:stretch>
+            <a:fillRect/>
+          </a:stretch>
+        </p:blipFill>
+        <p:spPr>
+          <a:xfrm>
+            <a:off x="5630736" y="1005840"/>
+            <a:ext cx="2454527" cy="3840480"/>
+          </a:xfrm>
+          <a:prstGeom prst="rect">
+            <a:avLst/>
+          </a:prstGeom>
+        </p:spPr>
+      </p:pic>
+      <p:sp>
+        <p:nvSpPr>
+          <p:cNvPr id="4" name="TextBox 3"/>
+          <p:cNvSpPr txBox="1"/>
+          <p:nvPr/>
+        </p:nvSpPr>
+        <p:spPr>
+          <a:xfrm>
+            <a:off x="457200" y="182880"/>
+            <a:ext cx="8229600" cy="731520"/>
+          </a:xfrm>
+          <a:prstGeom prst="rect">
+            <a:avLst/>
+          </a:prstGeom>
+          <a:noFill/>
+        </p:spPr>
+        <p:txBody>
+          <a:bodyPr wrap="square" lIns="0" tIns="0" rIns="0" bIns="0">
+            <a:spAutoFit/>
+          </a:bodyPr>
+          <a:lstStyle/>
+          <a:p>
+            <a:pPr>
+              <a:spcAft>
+                <a:spcPts val="200"/>
+              </a:spcAft>
+            </a:pPr>
+            <a:r>
+              <a:rPr sz="1000" b="1">
+                <a:solidFill>
+                  <a:srgbClr val="0D1F15"/>
+                </a:solidFill>
+                <a:latin typeface="Arial" panose="020B0604020202020204"/>
+              </a:rPr>
+              <a:t>APP FLOW DEMO</a:t>
+            </a:r>
+            <a:endParaRPr sz="1000" b="1">
+              <a:solidFill>
+                <a:srgbClr val="0D1F15"/>
+              </a:solidFill>
+              <a:latin typeface="Arial" panose="020B0604020202020204"/>
+            </a:endParaRPr>
+          </a:p>
+          <a:p>
+            <a:pPr>
+              <a:spcAft>
+                <a:spcPts val="0"/>
+              </a:spcAft>
+            </a:pPr>
+            <a:r>
+              <a:rPr sz="2000" b="1">
+                <a:solidFill>
+                  <a:srgbClr val="0D1F15"/>
+                </a:solidFill>
+                <a:latin typeface="Arial" panose="020B0604020202020204"/>
+              </a:rPr>
+              <a:t>9. Lister Dashboard &amp; Real Property Performance</a:t>
+            </a:r>
+            <a:endParaRPr sz="2000" b="1">
+              <a:solidFill>
+                <a:srgbClr val="0D1F15"/>
+              </a:solidFill>
+              <a:latin typeface="Arial" panose="020B0604020202020204"/>
+            </a:endParaRPr>
           </a:p>
         </p:txBody>
       </p:sp>
@@ -2140,12 +3418,13 @@
 
 <file path=ppt/slides/slide2.xml><?xml version="1.0" encoding="utf-8"?>
 <p:sld xmlns:a="http://schemas.openxmlformats.org/drawingml/2006/main" xmlns:r="http://schemas.openxmlformats.org/officeDocument/2006/relationships" xmlns:p="http://schemas.openxmlformats.org/presentationml/2006/main">
-  <p:cSld name="Slide 2">
+  <p:cSld>
     <p:bg>
       <p:bgPr>
         <a:solidFill>
-          <a:srgbClr val="F4F9F5"/>
+          <a:srgbClr val="FFFFFF"/>
         </a:solidFill>
+        <a:effectLst/>
       </p:bgPr>
     </p:bg>
     <p:spTree>
@@ -2177,13 +3456,12 @@
             <a:avLst/>
           </a:prstGeom>
           <a:noFill/>
-          <a:ln/>
         </p:spPr>
         <p:txBody>
           <a:bodyPr wrap="square" rtlCol="0" anchor="ctr"/>
           <a:lstStyle/>
           <a:p>
-            <a:pPr indent="0" marL="0">
+            <a:pPr marL="0" indent="0">
               <a:buNone/>
             </a:pPr>
             <a:r>
@@ -2191,9 +3469,9 @@
                 <a:solidFill>
                   <a:srgbClr val="C17F00"/>
                 </a:solidFill>
-                <a:latin typeface="Arial" pitchFamily="34" charset="0"/>
-                <a:ea typeface="Arial" pitchFamily="34" charset="-122"/>
-                <a:cs typeface="Arial" pitchFamily="34" charset="-120"/>
+                <a:latin typeface="Arial" panose="020B0604020202020204" pitchFamily="34" charset="0"/>
+                <a:ea typeface="Arial" panose="020B0604020202020204" pitchFamily="34" charset="-122"/>
+                <a:cs typeface="Arial" panose="020B0604020202020204" pitchFamily="34" charset="-120"/>
               </a:rPr>
               <a:t>THE PROBLEM</a:t>
             </a:r>
@@ -2216,23 +3494,22 @@
             <a:avLst/>
           </a:prstGeom>
           <a:noFill/>
-          <a:ln/>
         </p:spPr>
         <p:txBody>
           <a:bodyPr wrap="square" rtlCol="0" anchor="ctr"/>
           <a:lstStyle/>
           <a:p>
-            <a:pPr indent="0" marL="0">
+            <a:pPr marL="0" indent="0">
               <a:buNone/>
             </a:pPr>
             <a:r>
               <a:rPr lang="en-US" sz="2200" b="1" dirty="0">
                 <a:solidFill>
-                  <a:srgbClr val="1A7A45"/>
-                </a:solidFill>
-                <a:latin typeface="Georgia" pitchFamily="34" charset="0"/>
-                <a:ea typeface="Georgia" pitchFamily="34" charset="-122"/>
-                <a:cs typeface="Georgia" pitchFamily="34" charset="-120"/>
+                  <a:srgbClr val="0D1F15"/>
+                </a:solidFill>
+                <a:latin typeface="Georgia" panose="02040502050405020303" pitchFamily="34" charset="0"/>
+                <a:ea typeface="Georgia" panose="02040502050405020303" pitchFamily="34" charset="-122"/>
+                <a:cs typeface="Georgia" panose="02040502050405020303" pitchFamily="34" charset="-120"/>
               </a:rPr>
               <a:t>The Investment Barrier for Everyday Ugandans</a:t>
             </a:r>
@@ -2255,23 +3532,22 @@
             <a:avLst/>
           </a:prstGeom>
           <a:noFill/>
-          <a:ln/>
         </p:spPr>
         <p:txBody>
           <a:bodyPr wrap="square" rtlCol="0" anchor="ctr"/>
           <a:lstStyle/>
           <a:p>
-            <a:pPr indent="0" marL="0">
-              <a:buNone/>
-            </a:pPr>
-            <a:r>
-              <a:rPr lang="en-US" sz="900" dirty="0">
-                <a:solidFill>
-                  <a:srgbClr val="5D6B60"/>
-                </a:solidFill>
-                <a:latin typeface="Arial" pitchFamily="34" charset="0"/>
-                <a:ea typeface="Arial" pitchFamily="34" charset="-122"/>
-                <a:cs typeface="Arial" pitchFamily="34" charset="-120"/>
+            <a:pPr marL="0" indent="0">
+              <a:buNone/>
+            </a:pPr>
+            <a:r>
+              <a:rPr lang="en-US" sz="850" dirty="0">
+                <a:solidFill>
+                  <a:srgbClr val="5A7A68"/>
+                </a:solidFill>
+                <a:latin typeface="Arial" panose="020B0604020202020204" pitchFamily="34" charset="0"/>
+                <a:ea typeface="Arial" panose="020B0604020202020204" pitchFamily="34" charset="-122"/>
+                <a:cs typeface="Arial" panose="020B0604020202020204" pitchFamily="34" charset="-120"/>
               </a:rPr>
               <a:t>OwnIt Uganda Pitch Deck · www.ownit.ug</a:t>
             </a:r>
@@ -2294,13 +3570,12 @@
             <a:avLst/>
           </a:prstGeom>
           <a:noFill/>
-          <a:ln/>
         </p:spPr>
         <p:txBody>
           <a:bodyPr wrap="square" rtlCol="0" anchor="ctr"/>
           <a:lstStyle/>
           <a:p>
-            <a:pPr indent="0" marL="0">
+            <a:pPr marL="0" indent="0">
               <a:buNone/>
             </a:pPr>
             <a:r>
@@ -2308,9 +3583,9 @@
                 <a:solidFill>
                   <a:srgbClr val="0D1F15"/>
                 </a:solidFill>
-                <a:latin typeface="Georgia" pitchFamily="34" charset="0"/>
-                <a:ea typeface="Georgia" pitchFamily="34" charset="-122"/>
-                <a:cs typeface="Georgia" pitchFamily="34" charset="-120"/>
+                <a:latin typeface="Georgia" panose="02040502050405020303" pitchFamily="34" charset="0"/>
+                <a:ea typeface="Georgia" panose="02040502050405020303" pitchFamily="34" charset="-122"/>
+                <a:cs typeface="Georgia" panose="02040502050405020303" pitchFamily="34" charset="-120"/>
               </a:rPr>
               <a:t>High Barriers, Low Incomes, Few Options</a:t>
             </a:r>
@@ -2333,13 +3608,12 @@
             <a:avLst/>
           </a:prstGeom>
           <a:noFill/>
-          <a:ln/>
         </p:spPr>
         <p:txBody>
           <a:bodyPr wrap="square" rtlCol="0" anchor="ctr"/>
           <a:lstStyle/>
           <a:p>
-            <a:pPr indent="0" marL="0">
+            <a:pPr marL="0" indent="0">
               <a:lnSpc>
                 <a:spcPts val="2200"/>
               </a:lnSpc>
@@ -2350,16 +3624,16 @@
                 <a:solidFill>
                   <a:srgbClr val="0D1F15"/>
                 </a:solidFill>
-                <a:latin typeface="Arial" pitchFamily="34" charset="0"/>
-                <a:ea typeface="Arial" pitchFamily="34" charset="-122"/>
-                <a:cs typeface="Arial" pitchFamily="34" charset="-120"/>
+                <a:latin typeface="Arial" panose="020B0604020202020204" pitchFamily="34" charset="0"/>
+                <a:ea typeface="Arial" panose="020B0604020202020204" pitchFamily="34" charset="-122"/>
+                <a:cs typeface="Arial" panose="020B0604020202020204" pitchFamily="34" charset="-120"/>
               </a:rPr>
               <a:t>• High Entry Costs: Traditional real estate, agricultural exports, and infrastructure projects require hundreds of millions of UGX.</a:t>
             </a:r>
             <a:endParaRPr lang="en-US" sz="1200" dirty="0"/>
           </a:p>
           <a:p>
-            <a:pPr indent="0" marL="0">
+            <a:pPr marL="0" indent="0">
               <a:lnSpc>
                 <a:spcPts val="2200"/>
               </a:lnSpc>
@@ -2370,16 +3644,16 @@
                 <a:solidFill>
                   <a:srgbClr val="0D1F15"/>
                 </a:solidFill>
-                <a:latin typeface="Arial" pitchFamily="34" charset="0"/>
-                <a:ea typeface="Arial" pitchFamily="34" charset="-122"/>
-                <a:cs typeface="Arial" pitchFamily="34" charset="-120"/>
+                <a:latin typeface="Arial" panose="020B0604020202020204" pitchFamily="34" charset="0"/>
+                <a:ea typeface="Arial" panose="020B0604020202020204" pitchFamily="34" charset="-122"/>
+                <a:cs typeface="Arial" panose="020B0604020202020204" pitchFamily="34" charset="-120"/>
               </a:rPr>
               <a:t>• Inflation &amp; Currency Risk: Local savings are eaten away by inflation. Everyday Ugandans lack access to high-yielding, inflation-hedging real assets.</a:t>
             </a:r>
             <a:endParaRPr lang="en-US" sz="1200" dirty="0"/>
           </a:p>
           <a:p>
-            <a:pPr indent="0" marL="0">
+            <a:pPr marL="0" indent="0">
               <a:lnSpc>
                 <a:spcPts val="2200"/>
               </a:lnSpc>
@@ -2390,9 +3664,9 @@
                 <a:solidFill>
                   <a:srgbClr val="0D1F15"/>
                 </a:solidFill>
-                <a:latin typeface="Arial" pitchFamily="34" charset="0"/>
-                <a:ea typeface="Arial" pitchFamily="34" charset="-122"/>
-                <a:cs typeface="Arial" pitchFamily="34" charset="-120"/>
+                <a:latin typeface="Arial" panose="020B0604020202020204" pitchFamily="34" charset="0"/>
+                <a:ea typeface="Arial" panose="020B0604020202020204" pitchFamily="34" charset="-122"/>
+                <a:cs typeface="Arial" panose="020B0604020202020204" pitchFamily="34" charset="-120"/>
               </a:rPr>
               <a:t>• Lack of Liquidity &amp; Transparency: Fragmented markets, complex legal procedures, and lack of trust in operators lock out retail investors.</a:t>
             </a:r>
@@ -2426,6 +3700,10 @@
             <a:prstDash val="solid"/>
           </a:ln>
         </p:spPr>
+        <p:txBody>
+          <a:bodyPr wrap="square"/>
+          <a:p/>
+        </p:txBody>
       </p:sp>
       <p:sp>
         <p:nvSpPr>
@@ -2442,23 +3720,22 @@
             <a:avLst/>
           </a:prstGeom>
           <a:noFill/>
-          <a:ln/>
         </p:spPr>
         <p:txBody>
           <a:bodyPr wrap="square" rtlCol="0" anchor="ctr"/>
           <a:lstStyle/>
           <a:p>
-            <a:pPr algn="ctr" indent="0" marL="0">
+            <a:pPr marL="0" indent="0" algn="ctr">
               <a:buNone/>
             </a:pPr>
             <a:r>
               <a:rPr lang="en-US" sz="4400" b="1" dirty="0">
                 <a:solidFill>
-                  <a:srgbClr val="C1272D"/>
-                </a:solidFill>
-                <a:latin typeface="Georgia" pitchFamily="34" charset="0"/>
-                <a:ea typeface="Georgia" pitchFamily="34" charset="-122"/>
-                <a:cs typeface="Georgia" pitchFamily="34" charset="-120"/>
+                  <a:srgbClr val="0D1F15"/>
+                </a:solidFill>
+                <a:latin typeface="Georgia" panose="02040502050405020303" pitchFamily="34" charset="0"/>
+                <a:ea typeface="Georgia" panose="02040502050405020303" pitchFamily="34" charset="-122"/>
+                <a:cs typeface="Georgia" panose="02040502050405020303" pitchFamily="34" charset="-120"/>
               </a:rPr>
               <a:t>95%</a:t>
             </a:r>
@@ -2481,13 +3758,12 @@
             <a:avLst/>
           </a:prstGeom>
           <a:noFill/>
-          <a:ln/>
         </p:spPr>
         <p:txBody>
           <a:bodyPr wrap="square" rtlCol="0" anchor="ctr"/>
           <a:lstStyle/>
           <a:p>
-            <a:pPr algn="ctr" indent="0" marL="0">
+            <a:pPr marL="0" indent="0" algn="ctr">
               <a:lnSpc>
                 <a:spcPts val="1800"/>
               </a:lnSpc>
@@ -2496,15 +3772,156 @@
             <a:r>
               <a:rPr lang="en-US" sz="1200" dirty="0">
                 <a:solidFill>
-                  <a:srgbClr val="5A1F21"/>
-                </a:solidFill>
-                <a:latin typeface="Arial" pitchFamily="34" charset="0"/>
-                <a:ea typeface="Arial" pitchFamily="34" charset="-122"/>
-                <a:cs typeface="Arial" pitchFamily="34" charset="-120"/>
+                  <a:srgbClr val="0D1F15"/>
+                </a:solidFill>
+                <a:latin typeface="Arial" panose="020B0604020202020204" pitchFamily="34" charset="0"/>
+                <a:ea typeface="Arial" panose="020B0604020202020204" pitchFamily="34" charset="-122"/>
+                <a:cs typeface="Arial" panose="020B0604020202020204" pitchFamily="34" charset="-120"/>
               </a:rPr>
               <a:t>of Ugandans are locked out of institutional-grade investments due to capital constraints.</a:t>
             </a:r>
             <a:endParaRPr lang="en-US" sz="1200" dirty="0"/>
+          </a:p>
+        </p:txBody>
+      </p:sp>
+    </p:spTree>
+  </p:cSld>
+  <p:clrMapOvr>
+    <a:masterClrMapping/>
+  </p:clrMapOvr>
+</p:sld>
+</file>
+
+<file path=ppt/slides/slide20.xml><?xml version="1.0" encoding="utf-8"?>
+<p:sld xmlns:a="http://schemas.openxmlformats.org/drawingml/2006/main" xmlns:r="http://schemas.openxmlformats.org/officeDocument/2006/relationships" xmlns:p="http://schemas.openxmlformats.org/presentationml/2006/main">
+  <p:cSld>
+    <p:bg>
+      <p:bgPr>
+        <a:solidFill>
+          <a:srgbClr val="F4F9F5"/>
+        </a:solidFill>
+        <a:effectLst/>
+      </p:bgPr>
+    </p:bg>
+    <p:spTree>
+      <p:nvGrpSpPr>
+        <p:cNvPr id="1" name=""/>
+        <p:cNvGrpSpPr/>
+        <p:nvPr/>
+      </p:nvGrpSpPr>
+      <p:grpSpPr/>
+      <p:pic>
+        <p:nvPicPr>
+          <p:cNvPr id="2" name="Picture 1"/>
+          <p:cNvPicPr>
+            <a:picLocks noChangeAspect="1"/>
+          </p:cNvPicPr>
+          <p:nvPr/>
+        </p:nvPicPr>
+        <p:blipFill>
+          <a:blip r:embed="rId1"/>
+          <a:stretch>
+            <a:fillRect/>
+          </a:stretch>
+        </p:blipFill>
+        <p:spPr>
+          <a:xfrm>
+            <a:off x="1063663" y="1005840"/>
+            <a:ext cx="2444673" cy="3840480"/>
+          </a:xfrm>
+          <a:prstGeom prst="rect">
+            <a:avLst/>
+          </a:prstGeom>
+        </p:spPr>
+      </p:pic>
+      <p:pic>
+        <p:nvPicPr>
+          <p:cNvPr id="3" name="Picture 2"/>
+          <p:cNvPicPr>
+            <a:picLocks noChangeAspect="1"/>
+          </p:cNvPicPr>
+          <p:nvPr/>
+        </p:nvPicPr>
+        <p:blipFill>
+          <a:blip r:embed="rId2"/>
+          <a:stretch>
+            <a:fillRect/>
+          </a:stretch>
+        </p:blipFill>
+        <p:spPr>
+          <a:xfrm>
+            <a:off x="5644895" y="1005840"/>
+            <a:ext cx="2426209" cy="3840480"/>
+          </a:xfrm>
+          <a:prstGeom prst="rect">
+            <a:avLst/>
+          </a:prstGeom>
+        </p:spPr>
+      </p:pic>
+      <p:sp>
+        <p:nvSpPr>
+          <p:cNvPr id="4" name="TextBox 3"/>
+          <p:cNvSpPr txBox="1"/>
+          <p:nvPr/>
+        </p:nvSpPr>
+        <p:spPr>
+          <a:xfrm>
+            <a:off x="457200" y="182880"/>
+            <a:ext cx="8229600" cy="731520"/>
+          </a:xfrm>
+          <a:prstGeom prst="rect">
+            <a:avLst/>
+          </a:prstGeom>
+          <a:noFill/>
+        </p:spPr>
+        <p:txBody>
+          <a:bodyPr wrap="square" lIns="0" tIns="0" rIns="0" bIns="0">
+            <a:spAutoFit/>
+          </a:bodyPr>
+          <a:lstStyle/>
+          <a:p>
+            <a:pPr>
+              <a:spcAft>
+                <a:spcPts val="200"/>
+              </a:spcAft>
+            </a:pPr>
+            <a:r>
+              <a:rPr sz="1000" b="1">
+                <a:solidFill>
+                  <a:srgbClr val="0D1F15"/>
+                </a:solidFill>
+                <a:latin typeface="Arial" panose="020B0604020202020204"/>
+              </a:rPr>
+              <a:t>APP FLOW DEMO</a:t>
+            </a:r>
+            <a:endParaRPr sz="1000" b="1">
+              <a:solidFill>
+                <a:srgbClr val="0D1F15"/>
+              </a:solidFill>
+              <a:latin typeface="Arial" panose="020B0604020202020204"/>
+            </a:endParaRPr>
+          </a:p>
+          <a:p>
+            <a:pPr>
+              <a:spcAft>
+                <a:spcPts val="0"/>
+              </a:spcAft>
+            </a:pPr>
+            <a:r>
+              <a:rPr sz="2000" b="1">
+                <a:solidFill>
+                  <a:srgbClr val="0D1F15"/>
+                </a:solidFill>
+                <a:latin typeface="Arial" panose="020B0604020202020204"/>
+              </a:rPr>
+              <a:t>10. Asset Admission Submission &amp; Vetting Flow</a:t>
+            </a:r>
+            <a:endParaRPr sz="2000" b="1">
+              <a:solidFill>
+                <a:srgbClr val="0D1F15"/>
+              </a:solidFill>
+              <a:latin typeface="Arial" panose="020B0604020202020204"/>
+            </a:endParaRPr>
           </a:p>
         </p:txBody>
       </p:sp>
@@ -2518,12 +3935,13 @@
 
 <file path=ppt/slides/slide3.xml><?xml version="1.0" encoding="utf-8"?>
 <p:sld xmlns:a="http://schemas.openxmlformats.org/drawingml/2006/main" xmlns:r="http://schemas.openxmlformats.org/officeDocument/2006/relationships" xmlns:p="http://schemas.openxmlformats.org/presentationml/2006/main">
-  <p:cSld name="Slide 3">
+  <p:cSld>
     <p:bg>
       <p:bgPr>
         <a:solidFill>
-          <a:srgbClr val="F4F9F5"/>
+          <a:srgbClr val="1A7A45"/>
         </a:solidFill>
+        <a:effectLst/>
       </p:bgPr>
     </p:bg>
     <p:spTree>
@@ -2555,23 +3973,22 @@
             <a:avLst/>
           </a:prstGeom>
           <a:noFill/>
-          <a:ln/>
         </p:spPr>
         <p:txBody>
           <a:bodyPr wrap="square" rtlCol="0" anchor="ctr"/>
           <a:lstStyle/>
           <a:p>
-            <a:pPr indent="0" marL="0">
+            <a:pPr marL="0" indent="0">
               <a:buNone/>
             </a:pPr>
             <a:r>
               <a:rPr lang="en-US" sz="1000" b="1" dirty="0">
                 <a:solidFill>
-                  <a:srgbClr val="C17F00"/>
-                </a:solidFill>
-                <a:latin typeface="Arial" pitchFamily="34" charset="0"/>
-                <a:ea typeface="Arial" pitchFamily="34" charset="-122"/>
-                <a:cs typeface="Arial" pitchFamily="34" charset="-120"/>
+                  <a:srgbClr val="F4F9F5"/>
+                </a:solidFill>
+                <a:latin typeface="Arial" panose="020B0604020202020204" pitchFamily="34" charset="0"/>
+                <a:ea typeface="Arial" panose="020B0604020202020204" pitchFamily="34" charset="-122"/>
+                <a:cs typeface="Arial" panose="020B0604020202020204" pitchFamily="34" charset="-120"/>
               </a:rPr>
               <a:t>THE SOLUTION</a:t>
             </a:r>
@@ -2594,23 +4011,22 @@
             <a:avLst/>
           </a:prstGeom>
           <a:noFill/>
-          <a:ln/>
         </p:spPr>
         <p:txBody>
           <a:bodyPr wrap="square" rtlCol="0" anchor="ctr"/>
           <a:lstStyle/>
           <a:p>
-            <a:pPr indent="0" marL="0">
+            <a:pPr marL="0" indent="0">
               <a:buNone/>
             </a:pPr>
             <a:r>
               <a:rPr lang="en-US" sz="2200" b="1" dirty="0">
                 <a:solidFill>
-                  <a:srgbClr val="1A7A45"/>
-                </a:solidFill>
-                <a:latin typeface="Georgia" pitchFamily="34" charset="0"/>
-                <a:ea typeface="Georgia" pitchFamily="34" charset="-122"/>
-                <a:cs typeface="Georgia" pitchFamily="34" charset="-120"/>
+                  <a:srgbClr val="FFFFFF"/>
+                </a:solidFill>
+                <a:latin typeface="Georgia" panose="02040502050405020303" pitchFamily="34" charset="0"/>
+                <a:ea typeface="Georgia" panose="02040502050405020303" pitchFamily="34" charset="-122"/>
+                <a:cs typeface="Georgia" panose="02040502050405020303" pitchFamily="34" charset="-120"/>
               </a:rPr>
               <a:t>OwnIt Uganda: Fractional Crowd Funding Platform</a:t>
             </a:r>
@@ -2633,23 +4049,22 @@
             <a:avLst/>
           </a:prstGeom>
           <a:noFill/>
-          <a:ln/>
         </p:spPr>
         <p:txBody>
           <a:bodyPr wrap="square" rtlCol="0" anchor="ctr"/>
           <a:lstStyle/>
           <a:p>
-            <a:pPr indent="0" marL="0">
-              <a:buNone/>
-            </a:pPr>
-            <a:r>
-              <a:rPr lang="en-US" sz="900" dirty="0">
-                <a:solidFill>
-                  <a:srgbClr val="5D6B60"/>
-                </a:solidFill>
-                <a:latin typeface="Arial" pitchFamily="34" charset="0"/>
-                <a:ea typeface="Arial" pitchFamily="34" charset="-122"/>
-                <a:cs typeface="Arial" pitchFamily="34" charset="-120"/>
+            <a:pPr marL="0" indent="0">
+              <a:buNone/>
+            </a:pPr>
+            <a:r>
+              <a:rPr lang="en-US" sz="850" dirty="0">
+                <a:solidFill>
+                  <a:srgbClr val="5A7A68"/>
+                </a:solidFill>
+                <a:latin typeface="Arial" panose="020B0604020202020204" pitchFamily="34" charset="0"/>
+                <a:ea typeface="Arial" panose="020B0604020202020204" pitchFamily="34" charset="-122"/>
+                <a:cs typeface="Arial" panose="020B0604020202020204" pitchFamily="34" charset="-120"/>
               </a:rPr>
               <a:t>OwnIt Uganda Pitch Deck · www.ownit.ug</a:t>
             </a:r>
@@ -2672,23 +4087,22 @@
             <a:avLst/>
           </a:prstGeom>
           <a:noFill/>
-          <a:ln/>
         </p:spPr>
         <p:txBody>
           <a:bodyPr wrap="square" rtlCol="0" anchor="ctr"/>
           <a:lstStyle/>
           <a:p>
-            <a:pPr indent="0" marL="0">
+            <a:pPr marL="0" indent="0">
               <a:buNone/>
             </a:pPr>
             <a:r>
               <a:rPr lang="en-US" sz="1600" b="1" dirty="0">
                 <a:solidFill>
-                  <a:srgbClr val="0D1F15"/>
-                </a:solidFill>
-                <a:latin typeface="Georgia" pitchFamily="34" charset="0"/>
-                <a:ea typeface="Georgia" pitchFamily="34" charset="-122"/>
-                <a:cs typeface="Georgia" pitchFamily="34" charset="-120"/>
+                  <a:srgbClr val="FFFFFF"/>
+                </a:solidFill>
+                <a:latin typeface="Georgia" panose="02040502050405020303" pitchFamily="34" charset="0"/>
+                <a:ea typeface="Georgia" panose="02040502050405020303" pitchFamily="34" charset="-122"/>
+                <a:cs typeface="Georgia" panose="02040502050405020303" pitchFamily="34" charset="-120"/>
               </a:rPr>
               <a:t>Fractional, Direct, and Secure</a:t>
             </a:r>
@@ -2711,13 +4125,12 @@
             <a:avLst/>
           </a:prstGeom>
           <a:noFill/>
-          <a:ln/>
         </p:spPr>
         <p:txBody>
           <a:bodyPr wrap="square" rtlCol="0" anchor="ctr"/>
           <a:lstStyle/>
           <a:p>
-            <a:pPr indent="0" marL="0">
+            <a:pPr marL="0" indent="0">
               <a:lnSpc>
                 <a:spcPts val="2200"/>
               </a:lnSpc>
@@ -2726,18 +4139,18 @@
             <a:r>
               <a:rPr lang="en-US" sz="1200" dirty="0">
                 <a:solidFill>
-                  <a:srgbClr val="0D1F15"/>
-                </a:solidFill>
-                <a:latin typeface="Arial" pitchFamily="34" charset="0"/>
-                <a:ea typeface="Arial" pitchFamily="34" charset="-122"/>
-                <a:cs typeface="Arial" pitchFamily="34" charset="-120"/>
-              </a:rPr>
-              <a:t>• Fractional Ownership: Co-own high-value real assets (apartments, exports, toll booths) with low-ticket sizes starting at UGX 50,000.</a:t>
+                  <a:srgbClr val="F4F9F5"/>
+                </a:solidFill>
+                <a:latin typeface="Arial" panose="020B0604020202020204" pitchFamily="34" charset="0"/>
+                <a:ea typeface="Arial" panose="020B0604020202020204" pitchFamily="34" charset="-122"/>
+                <a:cs typeface="Arial" panose="020B0604020202020204" pitchFamily="34" charset="-120"/>
+              </a:rPr>
+              <a:t>• Fractional Ownership: Co-own high-value real assets (apartments, exports, factories) with low-ticket sizes starting at UGX 50,000.</a:t>
             </a:r>
             <a:endParaRPr lang="en-US" sz="1200" dirty="0"/>
           </a:p>
           <a:p>
-            <a:pPr indent="0" marL="0">
+            <a:pPr marL="0" indent="0">
               <a:lnSpc>
                 <a:spcPts val="2200"/>
               </a:lnSpc>
@@ -2746,18 +4159,18 @@
             <a:r>
               <a:rPr lang="en-US" sz="1200" dirty="0">
                 <a:solidFill>
-                  <a:srgbClr val="0D1F15"/>
-                </a:solidFill>
-                <a:latin typeface="Arial" pitchFamily="34" charset="0"/>
-                <a:ea typeface="Arial" pitchFamily="34" charset="-122"/>
-                <a:cs typeface="Arial" pitchFamily="34" charset="-120"/>
+                  <a:srgbClr val="F4F9F5"/>
+                </a:solidFill>
+                <a:latin typeface="Arial" panose="020B0604020202020204" pitchFamily="34" charset="0"/>
+                <a:ea typeface="Arial" panose="020B0604020202020204" pitchFamily="34" charset="-122"/>
+                <a:cs typeface="Arial" panose="020B0604020202020204" pitchFamily="34" charset="-120"/>
               </a:rPr>
               <a:t>• Passive Income Stream: Profit shares from rental income, agricultural sales, or trade yields are disbursed automatically to MTN/Airtel Mobile Money.</a:t>
             </a:r>
             <a:endParaRPr lang="en-US" sz="1200" dirty="0"/>
           </a:p>
           <a:p>
-            <a:pPr indent="0" marL="0">
+            <a:pPr marL="0" indent="0">
               <a:lnSpc>
                 <a:spcPts val="2200"/>
               </a:lnSpc>
@@ -2766,11 +4179,11 @@
             <a:r>
               <a:rPr lang="en-US" sz="1200" dirty="0">
                 <a:solidFill>
-                  <a:srgbClr val="0D1F15"/>
-                </a:solidFill>
-                <a:latin typeface="Arial" pitchFamily="34" charset="0"/>
-                <a:ea typeface="Arial" pitchFamily="34" charset="-122"/>
-                <a:cs typeface="Arial" pitchFamily="34" charset="-120"/>
+                  <a:srgbClr val="F4F9F5"/>
+                </a:solidFill>
+                <a:latin typeface="Arial" panose="020B0604020202020204" pitchFamily="34" charset="0"/>
+                <a:ea typeface="Arial" panose="020B0604020202020204" pitchFamily="34" charset="-122"/>
+                <a:cs typeface="Arial" panose="020B0604020202020204" pitchFamily="34" charset="-120"/>
               </a:rPr>
               <a:t>• Escrow &amp; Legal Verification: KCCA title deeds and assets are fully vetted by licensed valuers, secured in legal escrow accounts for co-owners.</a:t>
             </a:r>
@@ -2804,6 +4217,10 @@
             <a:prstDash val="solid"/>
           </a:ln>
         </p:spPr>
+        <p:txBody>
+          <a:bodyPr wrap="square"/>
+          <a:p/>
+        </p:txBody>
       </p:sp>
       <p:sp>
         <p:nvSpPr>
@@ -2820,27 +4237,33 @@
             <a:avLst/>
           </a:prstGeom>
           <a:noFill/>
-          <a:ln/>
         </p:spPr>
         <p:txBody>
           <a:bodyPr wrap="square" rtlCol="0" anchor="ctr"/>
           <a:lstStyle/>
           <a:p>
-            <a:pPr algn="ctr" indent="0" marL="0">
+            <a:pPr marL="0" indent="0" algn="ctr">
               <a:buNone/>
             </a:pPr>
             <a:r>
               <a:rPr lang="en-US" sz="3600" b="1" dirty="0">
                 <a:solidFill>
-                  <a:srgbClr val="1A7A45"/>
-                </a:solidFill>
-                <a:latin typeface="Georgia" pitchFamily="34" charset="0"/>
-                <a:ea typeface="Georgia" pitchFamily="34" charset="-122"/>
-                <a:cs typeface="Georgia" pitchFamily="34" charset="-120"/>
+                  <a:schemeClr val="tx1"/>
+                </a:solidFill>
+                <a:latin typeface="Georgia" panose="02040502050405020303" pitchFamily="34" charset="0"/>
+                <a:ea typeface="Georgia" panose="02040502050405020303" pitchFamily="34" charset="-122"/>
+                <a:cs typeface="Georgia" panose="02040502050405020303" pitchFamily="34" charset="-120"/>
               </a:rPr>
               <a:t>UGX 50K</a:t>
             </a:r>
-            <a:endParaRPr lang="en-US" sz="3600" dirty="0"/>
+            <a:endParaRPr lang="en-US" sz="3600" b="1" dirty="0">
+              <a:solidFill>
+                <a:schemeClr val="tx1"/>
+              </a:solidFill>
+              <a:latin typeface="Georgia" panose="02040502050405020303" pitchFamily="34" charset="0"/>
+              <a:ea typeface="Georgia" panose="02040502050405020303" pitchFamily="34" charset="-122"/>
+              <a:cs typeface="Georgia" panose="02040502050405020303" pitchFamily="34" charset="-120"/>
+            </a:endParaRPr>
           </a:p>
         </p:txBody>
       </p:sp>
@@ -2859,13 +4282,12 @@
             <a:avLst/>
           </a:prstGeom>
           <a:noFill/>
-          <a:ln/>
         </p:spPr>
         <p:txBody>
           <a:bodyPr wrap="square" rtlCol="0" anchor="ctr"/>
           <a:lstStyle/>
           <a:p>
-            <a:pPr algn="ctr" indent="0" marL="0">
+            <a:pPr marL="0" indent="0" algn="ctr">
               <a:lnSpc>
                 <a:spcPts val="1800"/>
               </a:lnSpc>
@@ -2874,15 +4296,22 @@
             <a:r>
               <a:rPr lang="en-US" sz="1200" dirty="0">
                 <a:solidFill>
-                  <a:srgbClr val="133E23"/>
-                </a:solidFill>
-                <a:latin typeface="Arial" pitchFamily="34" charset="0"/>
-                <a:ea typeface="Arial" pitchFamily="34" charset="-122"/>
-                <a:cs typeface="Arial" pitchFamily="34" charset="-120"/>
+                  <a:schemeClr val="tx1"/>
+                </a:solidFill>
+                <a:latin typeface="Arial" panose="020B0604020202020204" pitchFamily="34" charset="0"/>
+                <a:ea typeface="Arial" panose="020B0604020202020204" pitchFamily="34" charset="-122"/>
+                <a:cs typeface="Arial" panose="020B0604020202020204" pitchFamily="34" charset="-120"/>
               </a:rPr>
               <a:t>Minimum investment ticket, democratizing access to institutional real estate and agriculture yields.</a:t>
             </a:r>
-            <a:endParaRPr lang="en-US" sz="1200" dirty="0"/>
+            <a:endParaRPr lang="en-US" sz="1200" dirty="0">
+              <a:solidFill>
+                <a:schemeClr val="tx1"/>
+              </a:solidFill>
+              <a:latin typeface="Arial" panose="020B0604020202020204" pitchFamily="34" charset="0"/>
+              <a:ea typeface="Arial" panose="020B0604020202020204" pitchFamily="34" charset="-122"/>
+              <a:cs typeface="Arial" panose="020B0604020202020204" pitchFamily="34" charset="-120"/>
+            </a:endParaRPr>
           </a:p>
         </p:txBody>
       </p:sp>
@@ -2896,12 +4325,13 @@
 
 <file path=ppt/slides/slide4.xml><?xml version="1.0" encoding="utf-8"?>
 <p:sld xmlns:a="http://schemas.openxmlformats.org/drawingml/2006/main" xmlns:r="http://schemas.openxmlformats.org/officeDocument/2006/relationships" xmlns:p="http://schemas.openxmlformats.org/presentationml/2006/main">
-  <p:cSld name="Slide 4">
+  <p:cSld>
     <p:bg>
       <p:bgPr>
         <a:solidFill>
-          <a:srgbClr val="F4F9F5"/>
+          <a:srgbClr val="FFFFFF"/>
         </a:solidFill>
+        <a:effectLst/>
       </p:bgPr>
     </p:bg>
     <p:spTree>
@@ -2933,13 +4363,12 @@
             <a:avLst/>
           </a:prstGeom>
           <a:noFill/>
-          <a:ln/>
         </p:spPr>
         <p:txBody>
           <a:bodyPr wrap="square" rtlCol="0" anchor="ctr"/>
           <a:lstStyle/>
           <a:p>
-            <a:pPr indent="0" marL="0">
+            <a:pPr marL="0" indent="0">
               <a:buNone/>
             </a:pPr>
             <a:r>
@@ -2947,9 +4376,9 @@
                 <a:solidFill>
                   <a:srgbClr val="C17F00"/>
                 </a:solidFill>
-                <a:latin typeface="Arial" pitchFamily="34" charset="0"/>
-                <a:ea typeface="Arial" pitchFamily="34" charset="-122"/>
-                <a:cs typeface="Arial" pitchFamily="34" charset="-120"/>
+                <a:latin typeface="Arial" panose="020B0604020202020204" pitchFamily="34" charset="0"/>
+                <a:ea typeface="Arial" panose="020B0604020202020204" pitchFamily="34" charset="-122"/>
+                <a:cs typeface="Arial" panose="020B0604020202020204" pitchFamily="34" charset="-120"/>
               </a:rPr>
               <a:t>PRODUCT DEMO</a:t>
             </a:r>
@@ -2972,23 +4401,22 @@
             <a:avLst/>
           </a:prstGeom>
           <a:noFill/>
-          <a:ln/>
         </p:spPr>
         <p:txBody>
           <a:bodyPr wrap="square" rtlCol="0" anchor="ctr"/>
           <a:lstStyle/>
           <a:p>
-            <a:pPr indent="0" marL="0">
+            <a:pPr marL="0" indent="0">
               <a:buNone/>
             </a:pPr>
             <a:r>
               <a:rPr lang="en-US" sz="2200" b="1" dirty="0">
                 <a:solidFill>
-                  <a:srgbClr val="1A7A45"/>
-                </a:solidFill>
-                <a:latin typeface="Georgia" pitchFamily="34" charset="0"/>
-                <a:ea typeface="Georgia" pitchFamily="34" charset="-122"/>
-                <a:cs typeface="Georgia" pitchFamily="34" charset="-120"/>
+                  <a:srgbClr val="0D1F15"/>
+                </a:solidFill>
+                <a:latin typeface="Georgia" panose="02040502050405020303" pitchFamily="34" charset="0"/>
+                <a:ea typeface="Georgia" panose="02040502050405020303" pitchFamily="34" charset="-122"/>
+                <a:cs typeface="Georgia" panose="02040502050405020303" pitchFamily="34" charset="-120"/>
               </a:rPr>
               <a:t>Frictionless and Compliant Onboarding</a:t>
             </a:r>
@@ -3011,23 +4439,22 @@
             <a:avLst/>
           </a:prstGeom>
           <a:noFill/>
-          <a:ln/>
         </p:spPr>
         <p:txBody>
           <a:bodyPr wrap="square" rtlCol="0" anchor="ctr"/>
           <a:lstStyle/>
           <a:p>
-            <a:pPr indent="0" marL="0">
-              <a:buNone/>
-            </a:pPr>
-            <a:r>
-              <a:rPr lang="en-US" sz="900" dirty="0">
-                <a:solidFill>
-                  <a:srgbClr val="5D6B60"/>
-                </a:solidFill>
-                <a:latin typeface="Arial" pitchFamily="34" charset="0"/>
-                <a:ea typeface="Arial" pitchFamily="34" charset="-122"/>
-                <a:cs typeface="Arial" pitchFamily="34" charset="-120"/>
+            <a:pPr marL="0" indent="0">
+              <a:buNone/>
+            </a:pPr>
+            <a:r>
+              <a:rPr lang="en-US" sz="850" dirty="0">
+                <a:solidFill>
+                  <a:srgbClr val="5A7A68"/>
+                </a:solidFill>
+                <a:latin typeface="Arial" panose="020B0604020202020204" pitchFamily="34" charset="0"/>
+                <a:ea typeface="Arial" panose="020B0604020202020204" pitchFamily="34" charset="-122"/>
+                <a:cs typeface="Arial" panose="020B0604020202020204" pitchFamily="34" charset="-120"/>
               </a:rPr>
               <a:t>OwnIt Uganda Pitch Deck · www.ownit.ug</a:t>
             </a:r>
@@ -3050,23 +4477,22 @@
             <a:avLst/>
           </a:prstGeom>
           <a:noFill/>
-          <a:ln/>
         </p:spPr>
         <p:txBody>
           <a:bodyPr wrap="square" rtlCol="0" anchor="ctr"/>
           <a:lstStyle/>
           <a:p>
-            <a:pPr indent="0" marL="0">
+            <a:pPr marL="0" indent="0">
               <a:buNone/>
             </a:pPr>
             <a:r>
               <a:rPr lang="en-US" sz="1300" b="1" dirty="0">
                 <a:solidFill>
-                  <a:srgbClr val="5D6B60"/>
-                </a:solidFill>
-                <a:latin typeface="Arial" pitchFamily="34" charset="0"/>
-                <a:ea typeface="Arial" pitchFamily="34" charset="-122"/>
-                <a:cs typeface="Arial" pitchFamily="34" charset="-120"/>
+                  <a:srgbClr val="0D1F15"/>
+                </a:solidFill>
+                <a:latin typeface="Arial" panose="020B0604020202020204" pitchFamily="34" charset="0"/>
+                <a:ea typeface="Arial" panose="020B0604020202020204" pitchFamily="34" charset="-122"/>
+                <a:cs typeface="Arial" panose="020B0604020202020204" pitchFamily="34" charset="-120"/>
               </a:rPr>
               <a:t>Simple Registration &amp; 3-Step Identity Verification</a:t>
             </a:r>
@@ -3076,7 +4502,7 @@
       </p:sp>
       <p:pic>
         <p:nvPicPr>
-          <p:cNvPr id="6" name="Image 0" descr="c:\Users\HP\Downloads\Firebase\OwnItapp\screenshots\01_welcome.png">    </p:cNvPr>
+          <p:cNvPr id="6" name="Image 0" descr="c:\Users\HP\Downloads\Firebase\OwnItapp\screenshots\01_welcome.png"/>
           <p:cNvPicPr>
             <a:picLocks noChangeAspect="1"/>
           </p:cNvPicPr>
@@ -3113,13 +4539,12 @@
             <a:avLst/>
           </a:prstGeom>
           <a:noFill/>
-          <a:ln/>
         </p:spPr>
         <p:txBody>
           <a:bodyPr wrap="square" rtlCol="0" anchor="ctr"/>
           <a:lstStyle/>
           <a:p>
-            <a:pPr algn="ctr" indent="0" marL="0">
+            <a:pPr marL="0" indent="0" algn="ctr">
               <a:buNone/>
             </a:pPr>
             <a:r>
@@ -3127,9 +4552,9 @@
                 <a:solidFill>
                   <a:srgbClr val="0D1F15"/>
                 </a:solidFill>
-                <a:latin typeface="Arial" pitchFamily="34" charset="0"/>
-                <a:ea typeface="Arial" pitchFamily="34" charset="-122"/>
-                <a:cs typeface="Arial" pitchFamily="34" charset="-120"/>
+                <a:latin typeface="Arial" panose="020B0604020202020204" pitchFamily="34" charset="0"/>
+                <a:ea typeface="Arial" panose="020B0604020202020204" pitchFamily="34" charset="-122"/>
+                <a:cs typeface="Arial" panose="020B0604020202020204" pitchFamily="34" charset="-120"/>
               </a:rPr>
               <a:t>1. Welcome Slide</a:t>
             </a:r>
@@ -3139,7 +4564,7 @@
       </p:sp>
       <p:pic>
         <p:nvPicPr>
-          <p:cNvPr id="8" name="Image 1" descr="c:\Users\HP\Downloads\Firebase\OwnItapp\screenshots\03_login.png">    </p:cNvPr>
+          <p:cNvPr id="8" name="Image 1" descr="c:\Users\HP\Downloads\Firebase\OwnItapp\screenshots\03_login.png"/>
           <p:cNvPicPr>
             <a:picLocks noChangeAspect="1"/>
           </p:cNvPicPr>
@@ -3176,13 +4601,12 @@
             <a:avLst/>
           </a:prstGeom>
           <a:noFill/>
-          <a:ln/>
         </p:spPr>
         <p:txBody>
           <a:bodyPr wrap="square" rtlCol="0" anchor="ctr"/>
           <a:lstStyle/>
           <a:p>
-            <a:pPr algn="ctr" indent="0" marL="0">
+            <a:pPr marL="0" indent="0" algn="ctr">
               <a:buNone/>
             </a:pPr>
             <a:r>
@@ -3190,9 +4614,9 @@
                 <a:solidFill>
                   <a:srgbClr val="0D1F15"/>
                 </a:solidFill>
-                <a:latin typeface="Arial" pitchFamily="34" charset="0"/>
-                <a:ea typeface="Arial" pitchFamily="34" charset="-122"/>
-                <a:cs typeface="Arial" pitchFamily="34" charset="-120"/>
+                <a:latin typeface="Arial" panose="020B0604020202020204" pitchFamily="34" charset="0"/>
+                <a:ea typeface="Arial" panose="020B0604020202020204" pitchFamily="34" charset="-122"/>
+                <a:cs typeface="Arial" panose="020B0604020202020204" pitchFamily="34" charset="-120"/>
               </a:rPr>
               <a:t>2. Simple Login</a:t>
             </a:r>
@@ -3202,7 +4626,7 @@
       </p:sp>
       <p:pic>
         <p:nvPicPr>
-          <p:cNvPr id="10" name="Image 2" descr="c:\Users\HP\Downloads\Firebase\OwnItapp\screenshots\06_kyc_step1.png">    </p:cNvPr>
+          <p:cNvPr id="10" name="Image 2" descr="c:\Users\HP\Downloads\Firebase\OwnItapp\screenshots\06_kyc_step1.png"/>
           <p:cNvPicPr>
             <a:picLocks noChangeAspect="1"/>
           </p:cNvPicPr>
@@ -3239,13 +4663,12 @@
             <a:avLst/>
           </a:prstGeom>
           <a:noFill/>
-          <a:ln/>
         </p:spPr>
         <p:txBody>
           <a:bodyPr wrap="square" rtlCol="0" anchor="ctr"/>
           <a:lstStyle/>
           <a:p>
-            <a:pPr algn="ctr" indent="0" marL="0">
+            <a:pPr marL="0" indent="0" algn="ctr">
               <a:buNone/>
             </a:pPr>
             <a:r>
@@ -3253,9 +4676,9 @@
                 <a:solidFill>
                   <a:srgbClr val="0D1F15"/>
                 </a:solidFill>
-                <a:latin typeface="Arial" pitchFamily="34" charset="0"/>
-                <a:ea typeface="Arial" pitchFamily="34" charset="-122"/>
-                <a:cs typeface="Arial" pitchFamily="34" charset="-120"/>
+                <a:latin typeface="Arial" panose="020B0604020202020204" pitchFamily="34" charset="0"/>
+                <a:ea typeface="Arial" panose="020B0604020202020204" pitchFamily="34" charset="-122"/>
+                <a:cs typeface="Arial" panose="020B0604020202020204" pitchFamily="34" charset="-120"/>
               </a:rPr>
               <a:t>3. KYC Step 1</a:t>
             </a:r>
@@ -3278,13 +4701,12 @@
             <a:avLst/>
           </a:prstGeom>
           <a:noFill/>
-          <a:ln/>
         </p:spPr>
         <p:txBody>
           <a:bodyPr wrap="square" rtlCol="0" anchor="ctr"/>
           <a:lstStyle/>
           <a:p>
-            <a:pPr indent="0" marL="0">
+            <a:pPr marL="0" indent="0">
               <a:lnSpc>
                 <a:spcPts val="1700"/>
               </a:lnSpc>
@@ -3295,16 +4717,16 @@
                 <a:solidFill>
                   <a:srgbClr val="0D1F15"/>
                 </a:solidFill>
-                <a:latin typeface="Arial" pitchFamily="34" charset="0"/>
-                <a:ea typeface="Arial" pitchFamily="34" charset="-122"/>
-                <a:cs typeface="Arial" pitchFamily="34" charset="-120"/>
+                <a:latin typeface="Arial" panose="020B0604020202020204" pitchFamily="34" charset="0"/>
+                <a:ea typeface="Arial" panose="020B0604020202020204" pitchFamily="34" charset="-122"/>
+                <a:cs typeface="Arial" panose="020B0604020202020204" pitchFamily="34" charset="-120"/>
               </a:rPr>
               <a:t>• Brand Identity:</a:t>
             </a:r>
             <a:endParaRPr lang="en-US" sz="1100" dirty="0"/>
           </a:p>
           <a:p>
-            <a:pPr indent="0" marL="0">
+            <a:pPr marL="0" indent="0">
               <a:lnSpc>
                 <a:spcPts val="1700"/>
               </a:lnSpc>
@@ -3315,16 +4737,16 @@
                 <a:solidFill>
                   <a:srgbClr val="0D1F15"/>
                 </a:solidFill>
-                <a:latin typeface="Arial" pitchFamily="34" charset="0"/>
-                <a:ea typeface="Arial" pitchFamily="34" charset="-122"/>
-                <a:cs typeface="Arial" pitchFamily="34" charset="-120"/>
+                <a:latin typeface="Arial" panose="020B0604020202020204" pitchFamily="34" charset="0"/>
+                <a:ea typeface="Arial" panose="020B0604020202020204" pitchFamily="34" charset="-122"/>
+                <a:cs typeface="Arial" panose="020B0604020202020204" pitchFamily="34" charset="-120"/>
               </a:rPr>
               <a:t>Modern interface that is mobile-responsive and high contrast green theme.</a:t>
             </a:r>
             <a:endParaRPr lang="en-US" sz="1100" dirty="0"/>
           </a:p>
           <a:p>
-            <a:pPr indent="0" marL="0">
+            <a:pPr marL="0" indent="0">
               <a:lnSpc>
                 <a:spcPts val="1700"/>
               </a:lnSpc>
@@ -3333,7 +4755,7 @@
             <a:endParaRPr lang="en-US" sz="1100" dirty="0"/>
           </a:p>
           <a:p>
-            <a:pPr indent="0" marL="0">
+            <a:pPr marL="0" indent="0">
               <a:lnSpc>
                 <a:spcPts val="1700"/>
               </a:lnSpc>
@@ -3344,16 +4766,16 @@
                 <a:solidFill>
                   <a:srgbClr val="0D1F15"/>
                 </a:solidFill>
-                <a:latin typeface="Arial" pitchFamily="34" charset="0"/>
-                <a:ea typeface="Arial" pitchFamily="34" charset="-122"/>
-                <a:cs typeface="Arial" pitchFamily="34" charset="-120"/>
+                <a:latin typeface="Arial" panose="020B0604020202020204" pitchFamily="34" charset="0"/>
+                <a:ea typeface="Arial" panose="020B0604020202020204" pitchFamily="34" charset="-122"/>
+                <a:cs typeface="Arial" panose="020B0604020202020204" pitchFamily="34" charset="-120"/>
               </a:rPr>
               <a:t>• KYC Compliance:</a:t>
             </a:r>
             <a:endParaRPr lang="en-US" sz="1100" dirty="0"/>
           </a:p>
           <a:p>
-            <a:pPr indent="0" marL="0">
+            <a:pPr marL="0" indent="0">
               <a:lnSpc>
                 <a:spcPts val="1700"/>
               </a:lnSpc>
@@ -3364,16 +4786,16 @@
                 <a:solidFill>
                   <a:srgbClr val="0D1F15"/>
                 </a:solidFill>
-                <a:latin typeface="Arial" pitchFamily="34" charset="0"/>
-                <a:ea typeface="Arial" pitchFamily="34" charset="-122"/>
-                <a:cs typeface="Arial" pitchFamily="34" charset="-120"/>
+                <a:latin typeface="Arial" panose="020B0604020202020204" pitchFamily="34" charset="0"/>
+                <a:ea typeface="Arial" panose="020B0604020202020204" pitchFamily="34" charset="-122"/>
+                <a:cs typeface="Arial" panose="020B0604020202020204" pitchFamily="34" charset="-120"/>
               </a:rPr>
               <a:t>Fully digital KYC including Date of Birth, ID type/number, ID file upload, and consent selfie verification.</a:t>
             </a:r>
             <a:endParaRPr lang="en-US" sz="1100" dirty="0"/>
           </a:p>
           <a:p>
-            <a:pPr indent="0" marL="0">
+            <a:pPr marL="0" indent="0">
               <a:lnSpc>
                 <a:spcPts val="1700"/>
               </a:lnSpc>
@@ -3382,7 +4804,7 @@
             <a:endParaRPr lang="en-US" sz="1100" dirty="0"/>
           </a:p>
           <a:p>
-            <a:pPr indent="0" marL="0">
+            <a:pPr marL="0" indent="0">
               <a:lnSpc>
                 <a:spcPts val="1700"/>
               </a:lnSpc>
@@ -3393,16 +4815,16 @@
                 <a:solidFill>
                   <a:srgbClr val="0D1F15"/>
                 </a:solidFill>
-                <a:latin typeface="Arial" pitchFamily="34" charset="0"/>
-                <a:ea typeface="Arial" pitchFamily="34" charset="-122"/>
-                <a:cs typeface="Arial" pitchFamily="34" charset="-120"/>
+                <a:latin typeface="Arial" panose="020B0604020202020204" pitchFamily="34" charset="0"/>
+                <a:ea typeface="Arial" panose="020B0604020202020204" pitchFamily="34" charset="-122"/>
+                <a:cs typeface="Arial" panose="020B0604020202020204" pitchFamily="34" charset="-120"/>
               </a:rPr>
               <a:t>• Flexibilty:</a:t>
             </a:r>
             <a:endParaRPr lang="en-US" sz="1100" dirty="0"/>
           </a:p>
           <a:p>
-            <a:pPr indent="0" marL="0">
+            <a:pPr marL="0" indent="0">
               <a:lnSpc>
                 <a:spcPts val="1700"/>
               </a:lnSpc>
@@ -3413,9 +4835,9 @@
                 <a:solidFill>
                   <a:srgbClr val="0D1F15"/>
                 </a:solidFill>
-                <a:latin typeface="Arial" pitchFamily="34" charset="0"/>
-                <a:ea typeface="Arial" pitchFamily="34" charset="-122"/>
-                <a:cs typeface="Arial" pitchFamily="34" charset="-120"/>
+                <a:latin typeface="Arial" panose="020B0604020202020204" pitchFamily="34" charset="0"/>
+                <a:ea typeface="Arial" panose="020B0604020202020204" pitchFamily="34" charset="-122"/>
+                <a:cs typeface="Arial" panose="020B0604020202020204" pitchFamily="34" charset="-120"/>
               </a:rPr>
               <a:t>Option to "Skip for Now" lets users explore the market before uploading files.</a:t>
             </a:r>
@@ -3433,12 +4855,13 @@
 
 <file path=ppt/slides/slide5.xml><?xml version="1.0" encoding="utf-8"?>
 <p:sld xmlns:a="http://schemas.openxmlformats.org/drawingml/2006/main" xmlns:r="http://schemas.openxmlformats.org/officeDocument/2006/relationships" xmlns:p="http://schemas.openxmlformats.org/presentationml/2006/main">
-  <p:cSld name="Slide 5">
+  <p:cSld>
     <p:bg>
       <p:bgPr>
         <a:solidFill>
           <a:srgbClr val="F4F9F5"/>
         </a:solidFill>
+        <a:effectLst/>
       </p:bgPr>
     </p:bg>
     <p:spTree>
@@ -3470,13 +4893,12 @@
             <a:avLst/>
           </a:prstGeom>
           <a:noFill/>
-          <a:ln/>
         </p:spPr>
         <p:txBody>
           <a:bodyPr wrap="square" rtlCol="0" anchor="ctr"/>
           <a:lstStyle/>
           <a:p>
-            <a:pPr indent="0" marL="0">
+            <a:pPr marL="0" indent="0">
               <a:buNone/>
             </a:pPr>
             <a:r>
@@ -3484,9 +4906,9 @@
                 <a:solidFill>
                   <a:srgbClr val="C17F00"/>
                 </a:solidFill>
-                <a:latin typeface="Arial" pitchFamily="34" charset="0"/>
-                <a:ea typeface="Arial" pitchFamily="34" charset="-122"/>
-                <a:cs typeface="Arial" pitchFamily="34" charset="-120"/>
+                <a:latin typeface="Arial" panose="020B0604020202020204" pitchFamily="34" charset="0"/>
+                <a:ea typeface="Arial" panose="020B0604020202020204" pitchFamily="34" charset="-122"/>
+                <a:cs typeface="Arial" panose="020B0604020202020204" pitchFamily="34" charset="-120"/>
               </a:rPr>
               <a:t>PRODUCT DEMO</a:t>
             </a:r>
@@ -3509,23 +4931,22 @@
             <a:avLst/>
           </a:prstGeom>
           <a:noFill/>
-          <a:ln/>
         </p:spPr>
         <p:txBody>
           <a:bodyPr wrap="square" rtlCol="0" anchor="ctr"/>
           <a:lstStyle/>
           <a:p>
-            <a:pPr indent="0" marL="0">
+            <a:pPr marL="0" indent="0">
               <a:buNone/>
             </a:pPr>
             <a:r>
               <a:rPr lang="en-US" sz="2200" b="1" dirty="0">
                 <a:solidFill>
-                  <a:srgbClr val="1A7A45"/>
-                </a:solidFill>
-                <a:latin typeface="Georgia" pitchFamily="34" charset="0"/>
-                <a:ea typeface="Georgia" pitchFamily="34" charset="-122"/>
-                <a:cs typeface="Georgia" pitchFamily="34" charset="-120"/>
+                  <a:srgbClr val="0D1F15"/>
+                </a:solidFill>
+                <a:latin typeface="Georgia" panose="02040502050405020303" pitchFamily="34" charset="0"/>
+                <a:ea typeface="Georgia" panose="02040502050405020303" pitchFamily="34" charset="-122"/>
+                <a:cs typeface="Georgia" panose="02040502050405020303" pitchFamily="34" charset="-120"/>
               </a:rPr>
               <a:t>Browse and Filter Diversified Real Assets</a:t>
             </a:r>
@@ -3548,23 +4969,22 @@
             <a:avLst/>
           </a:prstGeom>
           <a:noFill/>
-          <a:ln/>
         </p:spPr>
         <p:txBody>
           <a:bodyPr wrap="square" rtlCol="0" anchor="ctr"/>
           <a:lstStyle/>
           <a:p>
-            <a:pPr indent="0" marL="0">
-              <a:buNone/>
-            </a:pPr>
-            <a:r>
-              <a:rPr lang="en-US" sz="900" dirty="0">
-                <a:solidFill>
-                  <a:srgbClr val="5D6B60"/>
-                </a:solidFill>
-                <a:latin typeface="Arial" pitchFamily="34" charset="0"/>
-                <a:ea typeface="Arial" pitchFamily="34" charset="-122"/>
-                <a:cs typeface="Arial" pitchFamily="34" charset="-120"/>
+            <a:pPr marL="0" indent="0">
+              <a:buNone/>
+            </a:pPr>
+            <a:r>
+              <a:rPr lang="en-US" sz="850" dirty="0">
+                <a:solidFill>
+                  <a:srgbClr val="5A7A68"/>
+                </a:solidFill>
+                <a:latin typeface="Arial" panose="020B0604020202020204" pitchFamily="34" charset="0"/>
+                <a:ea typeface="Arial" panose="020B0604020202020204" pitchFamily="34" charset="-122"/>
+                <a:cs typeface="Arial" panose="020B0604020202020204" pitchFamily="34" charset="-120"/>
               </a:rPr>
               <a:t>OwnIt Uganda Pitch Deck · www.ownit.ug</a:t>
             </a:r>
@@ -3587,13 +5007,12 @@
             <a:avLst/>
           </a:prstGeom>
           <a:noFill/>
-          <a:ln/>
         </p:spPr>
         <p:txBody>
           <a:bodyPr wrap="square" rtlCol="0" anchor="ctr"/>
           <a:lstStyle/>
           <a:p>
-            <a:pPr indent="0" marL="0">
+            <a:pPr marL="0" indent="0">
               <a:buNone/>
             </a:pPr>
             <a:r>
@@ -3601,9 +5020,9 @@
                 <a:solidFill>
                   <a:srgbClr val="0D1F15"/>
                 </a:solidFill>
-                <a:latin typeface="Georgia" pitchFamily="34" charset="0"/>
-                <a:ea typeface="Georgia" pitchFamily="34" charset="-122"/>
-                <a:cs typeface="Georgia" pitchFamily="34" charset="-120"/>
+                <a:latin typeface="Georgia" panose="02040502050405020303" pitchFamily="34" charset="0"/>
+                <a:ea typeface="Georgia" panose="02040502050405020303" pitchFamily="34" charset="-122"/>
+                <a:cs typeface="Georgia" panose="02040502050405020303" pitchFamily="34" charset="-120"/>
               </a:rPr>
               <a:t>Diverse Asset Classes &amp; Direct Discovery</a:t>
             </a:r>
@@ -3626,13 +5045,12 @@
             <a:avLst/>
           </a:prstGeom>
           <a:noFill/>
-          <a:ln/>
         </p:spPr>
         <p:txBody>
           <a:bodyPr wrap="square" rtlCol="0" anchor="ctr"/>
           <a:lstStyle/>
           <a:p>
-            <a:pPr indent="0" marL="0">
+            <a:pPr marL="0" indent="0">
               <a:lnSpc>
                 <a:spcPts val="1800"/>
               </a:lnSpc>
@@ -3643,16 +5061,16 @@
                 <a:solidFill>
                   <a:srgbClr val="0D1F15"/>
                 </a:solidFill>
-                <a:latin typeface="Arial" pitchFamily="34" charset="0"/>
-                <a:ea typeface="Arial" pitchFamily="34" charset="-122"/>
-                <a:cs typeface="Arial" pitchFamily="34" charset="-120"/>
+                <a:latin typeface="Arial" panose="020B0604020202020204" pitchFamily="34" charset="0"/>
+                <a:ea typeface="Arial" panose="020B0604020202020204" pitchFamily="34" charset="-122"/>
+                <a:cs typeface="Arial" panose="020B0604020202020204" pitchFamily="34" charset="-120"/>
               </a:rPr>
               <a:t>• Discover Tab:</a:t>
             </a:r>
             <a:endParaRPr lang="en-US" sz="1100" dirty="0"/>
           </a:p>
           <a:p>
-            <a:pPr indent="0" marL="0">
+            <a:pPr marL="0" indent="0">
               <a:lnSpc>
                 <a:spcPts val="1800"/>
               </a:lnSpc>
@@ -3663,16 +5081,16 @@
                 <a:solidFill>
                   <a:srgbClr val="0D1F15"/>
                 </a:solidFill>
-                <a:latin typeface="Arial" pitchFamily="34" charset="0"/>
-                <a:ea typeface="Arial" pitchFamily="34" charset="-122"/>
-                <a:cs typeface="Arial" pitchFamily="34" charset="-120"/>
+                <a:latin typeface="Arial" panose="020B0604020202020204" pitchFamily="34" charset="0"/>
+                <a:ea typeface="Arial" panose="020B0604020202020204" pitchFamily="34" charset="-122"/>
+                <a:cs typeface="Arial" panose="020B0604020202020204" pitchFamily="34" charset="-120"/>
               </a:rPr>
               <a:t>Browse a vetted selection of real-world assets. Funding progress bar showing co-ownership status in real-time.</a:t>
             </a:r>
             <a:endParaRPr lang="en-US" sz="1100" dirty="0"/>
           </a:p>
           <a:p>
-            <a:pPr indent="0" marL="0">
+            <a:pPr marL="0" indent="0">
               <a:lnSpc>
                 <a:spcPts val="1800"/>
               </a:lnSpc>
@@ -3681,7 +5099,7 @@
             <a:endParaRPr lang="en-US" sz="1100" dirty="0"/>
           </a:p>
           <a:p>
-            <a:pPr indent="0" marL="0">
+            <a:pPr marL="0" indent="0">
               <a:lnSpc>
                 <a:spcPts val="1800"/>
               </a:lnSpc>
@@ -3692,16 +5110,16 @@
                 <a:solidFill>
                   <a:srgbClr val="0D1F15"/>
                 </a:solidFill>
-                <a:latin typeface="Arial" pitchFamily="34" charset="0"/>
-                <a:ea typeface="Arial" pitchFamily="34" charset="-122"/>
-                <a:cs typeface="Arial" pitchFamily="34" charset="-120"/>
+                <a:latin typeface="Arial" panose="020B0604020202020204" pitchFamily="34" charset="0"/>
+                <a:ea typeface="Arial" panose="020B0604020202020204" pitchFamily="34" charset="-122"/>
+                <a:cs typeface="Arial" panose="020B0604020202020204" pitchFamily="34" charset="-120"/>
               </a:rPr>
               <a:t>• Asset Diversity:</a:t>
             </a:r>
             <a:endParaRPr lang="en-US" sz="1100" dirty="0"/>
           </a:p>
           <a:p>
-            <a:pPr indent="0" marL="0">
+            <a:pPr marL="0" indent="0">
               <a:lnSpc>
                 <a:spcPts val="1800"/>
               </a:lnSpc>
@@ -3712,16 +5130,16 @@
                 <a:solidFill>
                   <a:srgbClr val="0D1F15"/>
                 </a:solidFill>
-                <a:latin typeface="Arial" pitchFamily="34" charset="0"/>
-                <a:ea typeface="Arial" pitchFamily="34" charset="-122"/>
-                <a:cs typeface="Arial" pitchFamily="34" charset="-120"/>
+                <a:latin typeface="Arial" panose="020B0604020202020204" pitchFamily="34" charset="0"/>
+                <a:ea typeface="Arial" panose="020B0604020202020204" pitchFamily="34" charset="-122"/>
+                <a:cs typeface="Arial" panose="020B0604020202020204" pitchFamily="34" charset="-120"/>
               </a:rPr>
               <a:t>Properties, agricultural commodities, export trade finance, infrastructure toll-kiosks, solar mini-grids, and mineral sales.</a:t>
             </a:r>
             <a:endParaRPr lang="en-US" sz="1100" dirty="0"/>
           </a:p>
           <a:p>
-            <a:pPr indent="0" marL="0">
+            <a:pPr marL="0" indent="0">
               <a:lnSpc>
                 <a:spcPts val="1800"/>
               </a:lnSpc>
@@ -3730,7 +5148,7 @@
             <a:endParaRPr lang="en-US" sz="1100" dirty="0"/>
           </a:p>
           <a:p>
-            <a:pPr indent="0" marL="0">
+            <a:pPr marL="0" indent="0">
               <a:lnSpc>
                 <a:spcPts val="1800"/>
               </a:lnSpc>
@@ -3741,16 +5159,16 @@
                 <a:solidFill>
                   <a:srgbClr val="0D1F15"/>
                 </a:solidFill>
-                <a:latin typeface="Arial" pitchFamily="34" charset="0"/>
-                <a:ea typeface="Arial" pitchFamily="34" charset="-122"/>
-                <a:cs typeface="Arial" pitchFamily="34" charset="-120"/>
+                <a:latin typeface="Arial" panose="020B0604020202020204" pitchFamily="34" charset="0"/>
+                <a:ea typeface="Arial" panose="020B0604020202020204" pitchFamily="34" charset="-122"/>
+                <a:cs typeface="Arial" panose="020B0604020202020204" pitchFamily="34" charset="-120"/>
               </a:rPr>
               <a:t>• Filtering:</a:t>
             </a:r>
             <a:endParaRPr lang="en-US" sz="1100" dirty="0"/>
           </a:p>
           <a:p>
-            <a:pPr indent="0" marL="0">
+            <a:pPr marL="0" indent="0">
               <a:lnSpc>
                 <a:spcPts val="1800"/>
               </a:lnSpc>
@@ -3761,9 +5179,9 @@
                 <a:solidFill>
                   <a:srgbClr val="0D1F15"/>
                 </a:solidFill>
-                <a:latin typeface="Arial" pitchFamily="34" charset="0"/>
-                <a:ea typeface="Arial" pitchFamily="34" charset="-122"/>
-                <a:cs typeface="Arial" pitchFamily="34" charset="-120"/>
+                <a:latin typeface="Arial" panose="020B0604020202020204" pitchFamily="34" charset="0"/>
+                <a:ea typeface="Arial" panose="020B0604020202020204" pitchFamily="34" charset="-122"/>
+                <a:cs typeface="Arial" panose="020B0604020202020204" pitchFamily="34" charset="-120"/>
               </a:rPr>
               <a:t>Easy filtering options (All, Apartment, Land, Commercial) for custom portfolios.</a:t>
             </a:r>
@@ -3773,7 +5191,7 @@
       </p:sp>
       <p:pic>
         <p:nvPicPr>
-          <p:cNvPr id="7" name="Image 0" descr="c:\Users\HP\Downloads\Firebase\OwnItapp\screenshots\07_investor_home.png">    </p:cNvPr>
+          <p:cNvPr id="7" name="Image 0" descr="c:\Users\HP\Downloads\Firebase\OwnItapp\screenshots\07_investor_home.png"/>
           <p:cNvPicPr>
             <a:picLocks noChangeAspect="1"/>
           </p:cNvPicPr>
@@ -3810,13 +5228,12 @@
             <a:avLst/>
           </a:prstGeom>
           <a:noFill/>
-          <a:ln/>
         </p:spPr>
         <p:txBody>
           <a:bodyPr wrap="square" rtlCol="0" anchor="ctr"/>
           <a:lstStyle/>
           <a:p>
-            <a:pPr algn="ctr" indent="0" marL="0">
+            <a:pPr marL="0" indent="0" algn="ctr">
               <a:buNone/>
             </a:pPr>
             <a:r>
@@ -3824,9 +5241,9 @@
                 <a:solidFill>
                   <a:srgbClr val="0D1F15"/>
                 </a:solidFill>
-                <a:latin typeface="Arial" pitchFamily="34" charset="0"/>
-                <a:ea typeface="Arial" pitchFamily="34" charset="-122"/>
-                <a:cs typeface="Arial" pitchFamily="34" charset="-120"/>
+                <a:latin typeface="Arial" panose="020B0604020202020204" pitchFamily="34" charset="0"/>
+                <a:ea typeface="Arial" panose="020B0604020202020204" pitchFamily="34" charset="-122"/>
+                <a:cs typeface="Arial" panose="020B0604020202020204" pitchFamily="34" charset="-120"/>
               </a:rPr>
               <a:t>Investor Discover Screen</a:t>
             </a:r>
@@ -3836,7 +5253,7 @@
       </p:sp>
       <p:pic>
         <p:nvPicPr>
-          <p:cNvPr id="9" name="Image 1" descr="c:\Users\HP\Downloads\Firebase\OwnItapp\screenshots\08_property_details.png">    </p:cNvPr>
+          <p:cNvPr id="9" name="Image 1" descr="c:\Users\HP\Downloads\Firebase\OwnItapp\screenshots\08_property_details.png"/>
           <p:cNvPicPr>
             <a:picLocks noChangeAspect="1"/>
           </p:cNvPicPr>
@@ -3873,13 +5290,12 @@
             <a:avLst/>
           </a:prstGeom>
           <a:noFill/>
-          <a:ln/>
         </p:spPr>
         <p:txBody>
           <a:bodyPr wrap="square" rtlCol="0" anchor="ctr"/>
           <a:lstStyle/>
           <a:p>
-            <a:pPr algn="ctr" indent="0" marL="0">
+            <a:pPr marL="0" indent="0" algn="ctr">
               <a:buNone/>
             </a:pPr>
             <a:r>
@@ -3887,9 +5303,9 @@
                 <a:solidFill>
                   <a:srgbClr val="0D1F15"/>
                 </a:solidFill>
-                <a:latin typeface="Arial" pitchFamily="34" charset="0"/>
-                <a:ea typeface="Arial" pitchFamily="34" charset="-122"/>
-                <a:cs typeface="Arial" pitchFamily="34" charset="-120"/>
+                <a:latin typeface="Arial" panose="020B0604020202020204" pitchFamily="34" charset="0"/>
+                <a:ea typeface="Arial" panose="020B0604020202020204" pitchFamily="34" charset="-122"/>
+                <a:cs typeface="Arial" panose="020B0604020202020204" pitchFamily="34" charset="-120"/>
               </a:rPr>
               <a:t>Vetted Asset Details</a:t>
             </a:r>
@@ -3907,12 +5323,13 @@
 
 <file path=ppt/slides/slide6.xml><?xml version="1.0" encoding="utf-8"?>
 <p:sld xmlns:a="http://schemas.openxmlformats.org/drawingml/2006/main" xmlns:r="http://schemas.openxmlformats.org/officeDocument/2006/relationships" xmlns:p="http://schemas.openxmlformats.org/presentationml/2006/main">
-  <p:cSld name="Slide 6">
+  <p:cSld>
     <p:bg>
       <p:bgPr>
         <a:solidFill>
-          <a:srgbClr val="F4F9F5"/>
+          <a:srgbClr val="FFFFFF"/>
         </a:solidFill>
+        <a:effectLst/>
       </p:bgPr>
     </p:bg>
     <p:spTree>
@@ -3944,13 +5361,12 @@
             <a:avLst/>
           </a:prstGeom>
           <a:noFill/>
-          <a:ln/>
         </p:spPr>
         <p:txBody>
           <a:bodyPr wrap="square" rtlCol="0" anchor="ctr"/>
           <a:lstStyle/>
           <a:p>
-            <a:pPr indent="0" marL="0">
+            <a:pPr marL="0" indent="0">
               <a:buNone/>
             </a:pPr>
             <a:r>
@@ -3958,9 +5374,9 @@
                 <a:solidFill>
                   <a:srgbClr val="C17F00"/>
                 </a:solidFill>
-                <a:latin typeface="Arial" pitchFamily="34" charset="0"/>
-                <a:ea typeface="Arial" pitchFamily="34" charset="-122"/>
-                <a:cs typeface="Arial" pitchFamily="34" charset="-120"/>
+                <a:latin typeface="Arial" panose="020B0604020202020204" pitchFamily="34" charset="0"/>
+                <a:ea typeface="Arial" panose="020B0604020202020204" pitchFamily="34" charset="-122"/>
+                <a:cs typeface="Arial" panose="020B0604020202020204" pitchFamily="34" charset="-120"/>
               </a:rPr>
               <a:t>PRODUCT DEMO</a:t>
             </a:r>
@@ -3983,23 +5399,22 @@
             <a:avLst/>
           </a:prstGeom>
           <a:noFill/>
-          <a:ln/>
         </p:spPr>
         <p:txBody>
           <a:bodyPr wrap="square" rtlCol="0" anchor="ctr"/>
           <a:lstStyle/>
           <a:p>
-            <a:pPr indent="0" marL="0">
+            <a:pPr marL="0" indent="0">
               <a:buNone/>
             </a:pPr>
             <a:r>
               <a:rPr lang="en-US" sz="2200" b="1" dirty="0">
                 <a:solidFill>
-                  <a:srgbClr val="1A7A45"/>
-                </a:solidFill>
-                <a:latin typeface="Georgia" pitchFamily="34" charset="0"/>
-                <a:ea typeface="Georgia" pitchFamily="34" charset="-122"/>
-                <a:cs typeface="Georgia" pitchFamily="34" charset="-120"/>
+                  <a:srgbClr val="0D1F15"/>
+                </a:solidFill>
+                <a:latin typeface="Georgia" panose="02040502050405020303" pitchFamily="34" charset="0"/>
+                <a:ea typeface="Georgia" panose="02040502050405020303" pitchFamily="34" charset="-122"/>
+                <a:cs typeface="Georgia" panose="02040502050405020303" pitchFamily="34" charset="-120"/>
               </a:rPr>
               <a:t>Seamless Co-Ownership Flow in 4 Steps</a:t>
             </a:r>
@@ -4022,23 +5437,22 @@
             <a:avLst/>
           </a:prstGeom>
           <a:noFill/>
-          <a:ln/>
         </p:spPr>
         <p:txBody>
           <a:bodyPr wrap="square" rtlCol="0" anchor="ctr"/>
           <a:lstStyle/>
           <a:p>
-            <a:pPr indent="0" marL="0">
-              <a:buNone/>
-            </a:pPr>
-            <a:r>
-              <a:rPr lang="en-US" sz="900" dirty="0">
-                <a:solidFill>
-                  <a:srgbClr val="5D6B60"/>
-                </a:solidFill>
-                <a:latin typeface="Arial" pitchFamily="34" charset="0"/>
-                <a:ea typeface="Arial" pitchFamily="34" charset="-122"/>
-                <a:cs typeface="Arial" pitchFamily="34" charset="-120"/>
+            <a:pPr marL="0" indent="0">
+              <a:buNone/>
+            </a:pPr>
+            <a:r>
+              <a:rPr lang="en-US" sz="850" dirty="0">
+                <a:solidFill>
+                  <a:srgbClr val="5A7A68"/>
+                </a:solidFill>
+                <a:latin typeface="Arial" panose="020B0604020202020204" pitchFamily="34" charset="0"/>
+                <a:ea typeface="Arial" panose="020B0604020202020204" pitchFamily="34" charset="-122"/>
+                <a:cs typeface="Arial" panose="020B0604020202020204" pitchFamily="34" charset="-120"/>
               </a:rPr>
               <a:t>OwnIt Uganda Pitch Deck · www.ownit.ug</a:t>
             </a:r>
@@ -4048,7 +5462,7 @@
       </p:sp>
       <p:pic>
         <p:nvPicPr>
-          <p:cNvPr id="5" name="Image 0" descr="c:\Users\HP\Downloads\Firebase\OwnItapp\screenshots\09_investment_step1_amount.png">    </p:cNvPr>
+          <p:cNvPr id="5" name="Image 0" descr="c:\Users\HP\Downloads\Firebase\OwnItapp\screenshots\09_investment_step1_amount.png"/>
           <p:cNvPicPr>
             <a:picLocks noChangeAspect="1"/>
           </p:cNvPicPr>
@@ -4085,13 +5499,12 @@
             <a:avLst/>
           </a:prstGeom>
           <a:noFill/>
-          <a:ln/>
         </p:spPr>
         <p:txBody>
           <a:bodyPr wrap="square" rtlCol="0" anchor="ctr"/>
           <a:lstStyle/>
           <a:p>
-            <a:pPr algn="ctr" indent="0" marL="0">
+            <a:pPr marL="0" indent="0" algn="ctr">
               <a:buNone/>
             </a:pPr>
             <a:r>
@@ -4099,9 +5512,9 @@
                 <a:solidFill>
                   <a:srgbClr val="0D1F15"/>
                 </a:solidFill>
-                <a:latin typeface="Arial" pitchFamily="34" charset="0"/>
-                <a:ea typeface="Arial" pitchFamily="34" charset="-122"/>
-                <a:cs typeface="Arial" pitchFamily="34" charset="-120"/>
+                <a:latin typeface="Arial" panose="020B0604020202020204" pitchFamily="34" charset="0"/>
+                <a:ea typeface="Arial" panose="020B0604020202020204" pitchFamily="34" charset="-122"/>
+                <a:cs typeface="Arial" panose="020B0604020202020204" pitchFamily="34" charset="-120"/>
               </a:rPr>
               <a:t>1. Choose Amount</a:t>
             </a:r>
@@ -4111,7 +5524,7 @@
       </p:sp>
       <p:pic>
         <p:nvPicPr>
-          <p:cNvPr id="7" name="Image 1" descr="c:\Users\HP\Downloads\Firebase\OwnItapp\screenshots\10_investment_step2_review.png">    </p:cNvPr>
+          <p:cNvPr id="7" name="Image 1" descr="c:\Users\HP\Downloads\Firebase\OwnItapp\screenshots\10_investment_step2_review.png"/>
           <p:cNvPicPr>
             <a:picLocks noChangeAspect="1"/>
           </p:cNvPicPr>
@@ -4148,13 +5561,12 @@
             <a:avLst/>
           </a:prstGeom>
           <a:noFill/>
-          <a:ln/>
         </p:spPr>
         <p:txBody>
           <a:bodyPr wrap="square" rtlCol="0" anchor="ctr"/>
           <a:lstStyle/>
           <a:p>
-            <a:pPr algn="ctr" indent="0" marL="0">
+            <a:pPr marL="0" indent="0" algn="ctr">
               <a:buNone/>
             </a:pPr>
             <a:r>
@@ -4162,9 +5574,9 @@
                 <a:solidFill>
                   <a:srgbClr val="0D1F15"/>
                 </a:solidFill>
-                <a:latin typeface="Arial" pitchFamily="34" charset="0"/>
-                <a:ea typeface="Arial" pitchFamily="34" charset="-122"/>
-                <a:cs typeface="Arial" pitchFamily="34" charset="-120"/>
+                <a:latin typeface="Arial" panose="020B0604020202020204" pitchFamily="34" charset="0"/>
+                <a:ea typeface="Arial" panose="020B0604020202020204" pitchFamily="34" charset="-122"/>
+                <a:cs typeface="Arial" panose="020B0604020202020204" pitchFamily="34" charset="-120"/>
               </a:rPr>
               <a:t>2. Review Return</a:t>
             </a:r>
@@ -4174,7 +5586,7 @@
       </p:sp>
       <p:pic>
         <p:nvPicPr>
-          <p:cNvPr id="9" name="Image 2" descr="c:\Users\HP\Downloads\Firebase\OwnItapp\screenshots\11_investment_step3_payment.png">    </p:cNvPr>
+          <p:cNvPr id="9" name="Image 2" descr="c:\Users\HP\Downloads\Firebase\OwnItapp\screenshots\11_investment_step3_payment.png"/>
           <p:cNvPicPr>
             <a:picLocks noChangeAspect="1"/>
           </p:cNvPicPr>
@@ -4211,13 +5623,12 @@
             <a:avLst/>
           </a:prstGeom>
           <a:noFill/>
-          <a:ln/>
         </p:spPr>
         <p:txBody>
           <a:bodyPr wrap="square" rtlCol="0" anchor="ctr"/>
           <a:lstStyle/>
           <a:p>
-            <a:pPr algn="ctr" indent="0" marL="0">
+            <a:pPr marL="0" indent="0" algn="ctr">
               <a:buNone/>
             </a:pPr>
             <a:r>
@@ -4225,9 +5636,9 @@
                 <a:solidFill>
                   <a:srgbClr val="0D1F15"/>
                 </a:solidFill>
-                <a:latin typeface="Arial" pitchFamily="34" charset="0"/>
-                <a:ea typeface="Arial" pitchFamily="34" charset="-122"/>
-                <a:cs typeface="Arial" pitchFamily="34" charset="-120"/>
+                <a:latin typeface="Arial" panose="020B0604020202020204" pitchFamily="34" charset="0"/>
+                <a:ea typeface="Arial" panose="020B0604020202020204" pitchFamily="34" charset="-122"/>
+                <a:cs typeface="Arial" panose="020B0604020202020204" pitchFamily="34" charset="-120"/>
               </a:rPr>
               <a:t>3. Select Payment</a:t>
             </a:r>
@@ -4237,7 +5648,7 @@
       </p:sp>
       <p:pic>
         <p:nvPicPr>
-          <p:cNvPr id="11" name="Image 3" descr="c:\Users\HP\Downloads\Firebase\OwnItapp\screenshots\13_investment_success.png">    </p:cNvPr>
+          <p:cNvPr id="11" name="Image 3" descr="c:\Users\HP\Downloads\Firebase\OwnItapp\screenshots\13_investment_success.png"/>
           <p:cNvPicPr>
             <a:picLocks noChangeAspect="1"/>
           </p:cNvPicPr>
@@ -4274,13 +5685,12 @@
             <a:avLst/>
           </a:prstGeom>
           <a:noFill/>
-          <a:ln/>
         </p:spPr>
         <p:txBody>
           <a:bodyPr wrap="square" rtlCol="0" anchor="ctr"/>
           <a:lstStyle/>
           <a:p>
-            <a:pPr algn="ctr" indent="0" marL="0">
+            <a:pPr marL="0" indent="0" algn="ctr">
               <a:buNone/>
             </a:pPr>
             <a:r>
@@ -4288,9 +5698,9 @@
                 <a:solidFill>
                   <a:srgbClr val="0D1F15"/>
                 </a:solidFill>
-                <a:latin typeface="Arial" pitchFamily="34" charset="0"/>
-                <a:ea typeface="Arial" pitchFamily="34" charset="-122"/>
-                <a:cs typeface="Arial" pitchFamily="34" charset="-120"/>
+                <a:latin typeface="Arial" panose="020B0604020202020204" pitchFamily="34" charset="0"/>
+                <a:ea typeface="Arial" panose="020B0604020202020204" pitchFamily="34" charset="-122"/>
+                <a:cs typeface="Arial" panose="020B0604020202020204" pitchFamily="34" charset="-120"/>
               </a:rPr>
               <a:t>4. Co-owner Confirmed</a:t>
             </a:r>
@@ -4313,13 +5723,12 @@
             <a:avLst/>
           </a:prstGeom>
           <a:noFill/>
-          <a:ln/>
         </p:spPr>
         <p:txBody>
           <a:bodyPr wrap="square" rtlCol="0" anchor="ctr"/>
           <a:lstStyle/>
           <a:p>
-            <a:pPr indent="0" marL="0">
+            <a:pPr marL="0" indent="0">
               <a:lnSpc>
                 <a:spcPts val="1400"/>
               </a:lnSpc>
@@ -4330,16 +5739,16 @@
                 <a:solidFill>
                   <a:srgbClr val="0D1F15"/>
                 </a:solidFill>
-                <a:latin typeface="Arial" pitchFamily="34" charset="0"/>
-                <a:ea typeface="Arial" pitchFamily="34" charset="-122"/>
-                <a:cs typeface="Arial" pitchFamily="34" charset="-120"/>
+                <a:latin typeface="Arial" panose="020B0604020202020204" pitchFamily="34" charset="0"/>
+                <a:ea typeface="Arial" panose="020B0604020202020204" pitchFamily="34" charset="-122"/>
+                <a:cs typeface="Arial" panose="020B0604020202020204" pitchFamily="34" charset="-120"/>
               </a:rPr>
               <a:t>• Interactive Yield Slider:</a:t>
             </a:r>
             <a:endParaRPr lang="en-US" sz="900" dirty="0"/>
           </a:p>
           <a:p>
-            <a:pPr indent="0" marL="0">
+            <a:pPr marL="0" indent="0">
               <a:lnSpc>
                 <a:spcPts val="1400"/>
               </a:lnSpc>
@@ -4350,16 +5759,16 @@
                 <a:solidFill>
                   <a:srgbClr val="0D1F15"/>
                 </a:solidFill>
-                <a:latin typeface="Arial" pitchFamily="34" charset="0"/>
-                <a:ea typeface="Arial" pitchFamily="34" charset="-122"/>
-                <a:cs typeface="Arial" pitchFamily="34" charset="-120"/>
+                <a:latin typeface="Arial" panose="020B0604020202020204" pitchFamily="34" charset="0"/>
+                <a:ea typeface="Arial" panose="020B0604020202020204" pitchFamily="34" charset="-122"/>
+                <a:cs typeface="Arial" panose="020B0604020202020204" pitchFamily="34" charset="-120"/>
               </a:rPr>
               <a:t>Select amount and view real-time monthly return and ownership projection.</a:t>
             </a:r>
             <a:endParaRPr lang="en-US" sz="900" dirty="0"/>
           </a:p>
           <a:p>
-            <a:pPr indent="0" marL="0">
+            <a:pPr marL="0" indent="0">
               <a:lnSpc>
                 <a:spcPts val="1400"/>
               </a:lnSpc>
@@ -4368,7 +5777,7 @@
             <a:endParaRPr lang="en-US" sz="900" dirty="0"/>
           </a:p>
           <a:p>
-            <a:pPr indent="0" marL="0">
+            <a:pPr marL="0" indent="0">
               <a:lnSpc>
                 <a:spcPts val="1400"/>
               </a:lnSpc>
@@ -4379,16 +5788,16 @@
                 <a:solidFill>
                   <a:srgbClr val="0D1F15"/>
                 </a:solidFill>
-                <a:latin typeface="Arial" pitchFamily="34" charset="0"/>
-                <a:ea typeface="Arial" pitchFamily="34" charset="-122"/>
-                <a:cs typeface="Arial" pitchFamily="34" charset="-120"/>
+                <a:latin typeface="Arial" panose="020B0604020202020204" pitchFamily="34" charset="0"/>
+                <a:ea typeface="Arial" panose="020B0604020202020204" pitchFamily="34" charset="-122"/>
+                <a:cs typeface="Arial" panose="020B0604020202020204" pitchFamily="34" charset="-120"/>
               </a:rPr>
               <a:t>• Mobile Money Integration:</a:t>
             </a:r>
             <a:endParaRPr lang="en-US" sz="900" dirty="0"/>
           </a:p>
           <a:p>
-            <a:pPr indent="0" marL="0">
+            <a:pPr marL="0" indent="0">
               <a:lnSpc>
                 <a:spcPts val="1400"/>
               </a:lnSpc>
@@ -4399,9 +5808,9 @@
                 <a:solidFill>
                   <a:srgbClr val="0D1F15"/>
                 </a:solidFill>
-                <a:latin typeface="Arial" pitchFamily="34" charset="0"/>
-                <a:ea typeface="Arial" pitchFamily="34" charset="-122"/>
-                <a:cs typeface="Arial" pitchFamily="34" charset="-120"/>
+                <a:latin typeface="Arial" panose="020B0604020202020204" pitchFamily="34" charset="0"/>
+                <a:ea typeface="Arial" panose="020B0604020202020204" pitchFamily="34" charset="-122"/>
+                <a:cs typeface="Arial" panose="020B0604020202020204" pitchFamily="34" charset="-120"/>
               </a:rPr>
               <a:t>Supports MTN Mobile Money and Airtel Money for instant local payments.</a:t>
             </a:r>
@@ -4419,12 +5828,13 @@
 
 <file path=ppt/slides/slide7.xml><?xml version="1.0" encoding="utf-8"?>
 <p:sld xmlns:a="http://schemas.openxmlformats.org/drawingml/2006/main" xmlns:r="http://schemas.openxmlformats.org/officeDocument/2006/relationships" xmlns:p="http://schemas.openxmlformats.org/presentationml/2006/main">
-  <p:cSld name="Slide 7">
+  <p:cSld>
     <p:bg>
       <p:bgPr>
         <a:solidFill>
           <a:srgbClr val="F4F9F5"/>
         </a:solidFill>
+        <a:effectLst/>
       </p:bgPr>
     </p:bg>
     <p:spTree>
@@ -4456,13 +5866,12 @@
             <a:avLst/>
           </a:prstGeom>
           <a:noFill/>
-          <a:ln/>
         </p:spPr>
         <p:txBody>
           <a:bodyPr wrap="square" rtlCol="0" anchor="ctr"/>
           <a:lstStyle/>
           <a:p>
-            <a:pPr indent="0" marL="0">
+            <a:pPr marL="0" indent="0">
               <a:buNone/>
             </a:pPr>
             <a:r>
@@ -4470,9 +5879,9 @@
                 <a:solidFill>
                   <a:srgbClr val="C17F00"/>
                 </a:solidFill>
-                <a:latin typeface="Arial" pitchFamily="34" charset="0"/>
-                <a:ea typeface="Arial" pitchFamily="34" charset="-122"/>
-                <a:cs typeface="Arial" pitchFamily="34" charset="-120"/>
+                <a:latin typeface="Arial" panose="020B0604020202020204" pitchFamily="34" charset="0"/>
+                <a:ea typeface="Arial" panose="020B0604020202020204" pitchFamily="34" charset="-122"/>
+                <a:cs typeface="Arial" panose="020B0604020202020204" pitchFamily="34" charset="-120"/>
               </a:rPr>
               <a:t>PRODUCT DEMO</a:t>
             </a:r>
@@ -4495,23 +5904,22 @@
             <a:avLst/>
           </a:prstGeom>
           <a:noFill/>
-          <a:ln/>
         </p:spPr>
         <p:txBody>
           <a:bodyPr wrap="square" rtlCol="0" anchor="ctr"/>
           <a:lstStyle/>
           <a:p>
-            <a:pPr indent="0" marL="0">
+            <a:pPr marL="0" indent="0">
               <a:buNone/>
             </a:pPr>
             <a:r>
               <a:rPr lang="en-US" sz="2200" b="1" dirty="0">
                 <a:solidFill>
-                  <a:srgbClr val="1A7A45"/>
-                </a:solidFill>
-                <a:latin typeface="Georgia" pitchFamily="34" charset="0"/>
-                <a:ea typeface="Georgia" pitchFamily="34" charset="-122"/>
-                <a:cs typeface="Georgia" pitchFamily="34" charset="-120"/>
+                  <a:srgbClr val="0D1F15"/>
+                </a:solidFill>
+                <a:latin typeface="Georgia" panose="02040502050405020303" pitchFamily="34" charset="0"/>
+                <a:ea typeface="Georgia" panose="02040502050405020303" pitchFamily="34" charset="-122"/>
+                <a:cs typeface="Georgia" panose="02040502050405020303" pitchFamily="34" charset="-120"/>
               </a:rPr>
               <a:t>Track Portfolio Growth and Passive Yields</a:t>
             </a:r>
@@ -4534,23 +5942,22 @@
             <a:avLst/>
           </a:prstGeom>
           <a:noFill/>
-          <a:ln/>
         </p:spPr>
         <p:txBody>
           <a:bodyPr wrap="square" rtlCol="0" anchor="ctr"/>
           <a:lstStyle/>
           <a:p>
-            <a:pPr indent="0" marL="0">
-              <a:buNone/>
-            </a:pPr>
-            <a:r>
-              <a:rPr lang="en-US" sz="900" dirty="0">
-                <a:solidFill>
-                  <a:srgbClr val="5D6B60"/>
-                </a:solidFill>
-                <a:latin typeface="Arial" pitchFamily="34" charset="0"/>
-                <a:ea typeface="Arial" pitchFamily="34" charset="-122"/>
-                <a:cs typeface="Arial" pitchFamily="34" charset="-120"/>
+            <a:pPr marL="0" indent="0">
+              <a:buNone/>
+            </a:pPr>
+            <a:r>
+              <a:rPr lang="en-US" sz="850" dirty="0">
+                <a:solidFill>
+                  <a:srgbClr val="5A7A68"/>
+                </a:solidFill>
+                <a:latin typeface="Arial" panose="020B0604020202020204" pitchFamily="34" charset="0"/>
+                <a:ea typeface="Arial" panose="020B0604020202020204" pitchFamily="34" charset="-122"/>
+                <a:cs typeface="Arial" panose="020B0604020202020204" pitchFamily="34" charset="-120"/>
               </a:rPr>
               <a:t>OwnIt Uganda Pitch Deck · www.ownit.ug</a:t>
             </a:r>
@@ -4573,13 +5980,12 @@
             <a:avLst/>
           </a:prstGeom>
           <a:noFill/>
-          <a:ln/>
         </p:spPr>
         <p:txBody>
           <a:bodyPr wrap="square" rtlCol="0" anchor="ctr"/>
           <a:lstStyle/>
           <a:p>
-            <a:pPr indent="0" marL="0">
+            <a:pPr marL="0" indent="0">
               <a:buNone/>
             </a:pPr>
             <a:r>
@@ -4587,9 +5993,9 @@
                 <a:solidFill>
                   <a:srgbClr val="0D1F15"/>
                 </a:solidFill>
-                <a:latin typeface="Georgia" pitchFamily="34" charset="0"/>
-                <a:ea typeface="Georgia" pitchFamily="34" charset="-122"/>
-                <a:cs typeface="Georgia" pitchFamily="34" charset="-120"/>
+                <a:latin typeface="Arial" panose="020B0604020202020204" pitchFamily="34" charset="0"/>
+                <a:ea typeface="Georgia" panose="02040502050405020303" pitchFamily="34" charset="-122"/>
+                <a:cs typeface="Georgia" panose="02040502050405020303" pitchFamily="34" charset="-120"/>
               </a:rPr>
               <a:t>Real-time Portfolio Ledger &amp; Digital Wallet</a:t>
             </a:r>
@@ -4612,13 +6018,12 @@
             <a:avLst/>
           </a:prstGeom>
           <a:noFill/>
-          <a:ln/>
         </p:spPr>
         <p:txBody>
           <a:bodyPr wrap="square" rtlCol="0" anchor="ctr"/>
           <a:lstStyle/>
           <a:p>
-            <a:pPr indent="0" marL="0">
+            <a:pPr marL="0" indent="0">
               <a:lnSpc>
                 <a:spcPts val="1800"/>
               </a:lnSpc>
@@ -4629,16 +6034,16 @@
                 <a:solidFill>
                   <a:srgbClr val="0D1F15"/>
                 </a:solidFill>
-                <a:latin typeface="Arial" pitchFamily="34" charset="0"/>
-                <a:ea typeface="Arial" pitchFamily="34" charset="-122"/>
-                <a:cs typeface="Arial" pitchFamily="34" charset="-120"/>
+                <a:latin typeface="Arial" panose="020B0604020202020204" pitchFamily="34" charset="0"/>
+                <a:ea typeface="Arial" panose="020B0604020202020204" pitchFamily="34" charset="-122"/>
+                <a:cs typeface="Arial" panose="020B0604020202020204" pitchFamily="34" charset="-120"/>
               </a:rPr>
               <a:t>• Portfolio Tab:</a:t>
             </a:r>
             <a:endParaRPr lang="en-US" sz="1100" dirty="0"/>
           </a:p>
           <a:p>
-            <a:pPr indent="0" marL="0">
+            <a:pPr marL="0" indent="0">
               <a:lnSpc>
                 <a:spcPts val="1800"/>
               </a:lnSpc>
@@ -4649,16 +6054,16 @@
                 <a:solidFill>
                   <a:srgbClr val="0D1F15"/>
                 </a:solidFill>
-                <a:latin typeface="Arial" pitchFamily="34" charset="0"/>
-                <a:ea typeface="Arial" pitchFamily="34" charset="-122"/>
-                <a:cs typeface="Arial" pitchFamily="34" charset="-120"/>
+                <a:latin typeface="Arial" panose="020B0604020202020204" pitchFamily="34" charset="0"/>
+                <a:ea typeface="Arial" panose="020B0604020202020204" pitchFamily="34" charset="-122"/>
+                <a:cs typeface="Arial" panose="020B0604020202020204" pitchFamily="34" charset="-120"/>
               </a:rPr>
               <a:t>Tracks your exact co-owned share across multiple properties and commodities, showing combined passive income and average yield.</a:t>
             </a:r>
             <a:endParaRPr lang="en-US" sz="1100" dirty="0"/>
           </a:p>
           <a:p>
-            <a:pPr indent="0" marL="0">
+            <a:pPr marL="0" indent="0">
               <a:lnSpc>
                 <a:spcPts val="1800"/>
               </a:lnSpc>
@@ -4667,7 +6072,7 @@
             <a:endParaRPr lang="en-US" sz="1100" dirty="0"/>
           </a:p>
           <a:p>
-            <a:pPr indent="0" marL="0">
+            <a:pPr marL="0" indent="0">
               <a:lnSpc>
                 <a:spcPts val="1800"/>
               </a:lnSpc>
@@ -4678,16 +6083,16 @@
                 <a:solidFill>
                   <a:srgbClr val="0D1F15"/>
                 </a:solidFill>
-                <a:latin typeface="Arial" pitchFamily="34" charset="0"/>
-                <a:ea typeface="Arial" pitchFamily="34" charset="-122"/>
-                <a:cs typeface="Arial" pitchFamily="34" charset="-120"/>
+                <a:latin typeface="Arial" panose="020B0604020202020204" pitchFamily="34" charset="0"/>
+                <a:ea typeface="Arial" panose="020B0604020202020204" pitchFamily="34" charset="-122"/>
+                <a:cs typeface="Arial" panose="020B0604020202020204" pitchFamily="34" charset="-120"/>
               </a:rPr>
               <a:t>• Smart Wallet:</a:t>
             </a:r>
             <a:endParaRPr lang="en-US" sz="1100" dirty="0"/>
           </a:p>
           <a:p>
-            <a:pPr indent="0" marL="0">
+            <a:pPr marL="0" indent="0">
               <a:lnSpc>
                 <a:spcPts val="1800"/>
               </a:lnSpc>
@@ -4698,16 +6103,16 @@
                 <a:solidFill>
                   <a:srgbClr val="0D1F15"/>
                 </a:solidFill>
-                <a:latin typeface="Arial" pitchFamily="34" charset="0"/>
-                <a:ea typeface="Arial" pitchFamily="34" charset="-122"/>
-                <a:cs typeface="Arial" pitchFamily="34" charset="-120"/>
+                <a:latin typeface="Arial" panose="020B0604020202020204" pitchFamily="34" charset="0"/>
+                <a:ea typeface="Arial" panose="020B0604020202020204" pitchFamily="34" charset="-122"/>
+                <a:cs typeface="Arial" panose="020B0604020202020204" pitchFamily="34" charset="-120"/>
               </a:rPr>
               <a:t>Deposit or withdraw funds securely. Supports scheduled monthly disbursements directly to your active Mobile Money number.</a:t>
             </a:r>
             <a:endParaRPr lang="en-US" sz="1100" dirty="0"/>
           </a:p>
           <a:p>
-            <a:pPr indent="0" marL="0">
+            <a:pPr marL="0" indent="0">
               <a:lnSpc>
                 <a:spcPts val="1800"/>
               </a:lnSpc>
@@ -4716,7 +6121,7 @@
             <a:endParaRPr lang="en-US" sz="1100" dirty="0"/>
           </a:p>
           <a:p>
-            <a:pPr indent="0" marL="0">
+            <a:pPr marL="0" indent="0">
               <a:lnSpc>
                 <a:spcPts val="1800"/>
               </a:lnSpc>
@@ -4727,16 +6132,16 @@
                 <a:solidFill>
                   <a:srgbClr val="0D1F15"/>
                 </a:solidFill>
-                <a:latin typeface="Arial" pitchFamily="34" charset="0"/>
-                <a:ea typeface="Arial" pitchFamily="34" charset="-122"/>
-                <a:cs typeface="Arial" pitchFamily="34" charset="-120"/>
+                <a:latin typeface="Arial" panose="020B0604020202020204" pitchFamily="34" charset="0"/>
+                <a:ea typeface="Arial" panose="020B0604020202020204" pitchFamily="34" charset="-122"/>
+                <a:cs typeface="Arial" panose="020B0604020202020204" pitchFamily="34" charset="-120"/>
               </a:rPr>
               <a:t>• Transaction Ledger:</a:t>
             </a:r>
             <a:endParaRPr lang="en-US" sz="1100" dirty="0"/>
           </a:p>
           <a:p>
-            <a:pPr indent="0" marL="0">
+            <a:pPr marL="0" indent="0">
               <a:lnSpc>
                 <a:spcPts val="1800"/>
               </a:lnSpc>
@@ -4747,9 +6152,9 @@
                 <a:solidFill>
                   <a:srgbClr val="0D1F15"/>
                 </a:solidFill>
-                <a:latin typeface="Arial" pitchFamily="34" charset="0"/>
-                <a:ea typeface="Arial" pitchFamily="34" charset="-122"/>
-                <a:cs typeface="Arial" pitchFamily="34" charset="-120"/>
+                <a:latin typeface="Arial" panose="020B0604020202020204" pitchFamily="34" charset="0"/>
+                <a:ea typeface="Arial" panose="020B0604020202020204" pitchFamily="34" charset="-122"/>
+                <a:cs typeface="Arial" panose="020B0604020202020204" pitchFamily="34" charset="-120"/>
               </a:rPr>
               <a:t>Fully transparent ledger logs all investments, deposits, withdrawals, and payouts.</a:t>
             </a:r>
@@ -4759,7 +6164,7 @@
       </p:sp>
       <p:pic>
         <p:nvPicPr>
-          <p:cNvPr id="7" name="Image 0" descr="c:\Users\HP\Downloads\Firebase\OwnItapp\screenshots\15_portfolio_tab.png">    </p:cNvPr>
+          <p:cNvPr id="7" name="Image 0" descr="c:\Users\HP\Downloads\Firebase\OwnItapp\screenshots\15_portfolio_tab.png"/>
           <p:cNvPicPr>
             <a:picLocks noChangeAspect="1"/>
           </p:cNvPicPr>
@@ -4796,13 +6201,12 @@
             <a:avLst/>
           </a:prstGeom>
           <a:noFill/>
-          <a:ln/>
         </p:spPr>
         <p:txBody>
           <a:bodyPr wrap="square" rtlCol="0" anchor="ctr"/>
           <a:lstStyle/>
           <a:p>
-            <a:pPr algn="ctr" indent="0" marL="0">
+            <a:pPr marL="0" indent="0" algn="ctr">
               <a:buNone/>
             </a:pPr>
             <a:r>
@@ -4810,9 +6214,9 @@
                 <a:solidFill>
                   <a:srgbClr val="0D1F15"/>
                 </a:solidFill>
-                <a:latin typeface="Arial" pitchFamily="34" charset="0"/>
-                <a:ea typeface="Arial" pitchFamily="34" charset="-122"/>
-                <a:cs typeface="Arial" pitchFamily="34" charset="-120"/>
+                <a:latin typeface="Arial" panose="020B0604020202020204" pitchFamily="34" charset="0"/>
+                <a:ea typeface="Arial" panose="020B0604020202020204" pitchFamily="34" charset="-122"/>
+                <a:cs typeface="Arial" panose="020B0604020202020204" pitchFamily="34" charset="-120"/>
               </a:rPr>
               <a:t>Co-ownership Portfolio</a:t>
             </a:r>
@@ -4822,7 +6226,7 @@
       </p:sp>
       <p:pic>
         <p:nvPicPr>
-          <p:cNvPr id="9" name="Image 1" descr="c:\Users\HP\Downloads\Firebase\OwnItapp\screenshots\16_wallet_tab.png">    </p:cNvPr>
+          <p:cNvPr id="9" name="Image 1" descr="c:\Users\HP\Downloads\Firebase\OwnItapp\screenshots\16_wallet_tab.png"/>
           <p:cNvPicPr>
             <a:picLocks noChangeAspect="1"/>
           </p:cNvPicPr>
@@ -4859,13 +6263,12 @@
             <a:avLst/>
           </a:prstGeom>
           <a:noFill/>
-          <a:ln/>
         </p:spPr>
         <p:txBody>
           <a:bodyPr wrap="square" rtlCol="0" anchor="ctr"/>
           <a:lstStyle/>
           <a:p>
-            <a:pPr algn="ctr" indent="0" marL="0">
+            <a:pPr marL="0" indent="0" algn="ctr">
               <a:buNone/>
             </a:pPr>
             <a:r>
@@ -4873,9 +6276,9 @@
                 <a:solidFill>
                   <a:srgbClr val="0D1F15"/>
                 </a:solidFill>
-                <a:latin typeface="Arial" pitchFamily="34" charset="0"/>
-                <a:ea typeface="Arial" pitchFamily="34" charset="-122"/>
-                <a:cs typeface="Arial" pitchFamily="34" charset="-120"/>
+                <a:latin typeface="Arial" panose="020B0604020202020204" pitchFamily="34" charset="0"/>
+                <a:ea typeface="Arial" panose="020B0604020202020204" pitchFamily="34" charset="-122"/>
+                <a:cs typeface="Arial" panose="020B0604020202020204" pitchFamily="34" charset="-120"/>
               </a:rPr>
               <a:t>Integrated Local Wallet</a:t>
             </a:r>
@@ -4893,12 +6296,13 @@
 
 <file path=ppt/slides/slide8.xml><?xml version="1.0" encoding="utf-8"?>
 <p:sld xmlns:a="http://schemas.openxmlformats.org/drawingml/2006/main" xmlns:r="http://schemas.openxmlformats.org/officeDocument/2006/relationships" xmlns:p="http://schemas.openxmlformats.org/presentationml/2006/main">
-  <p:cSld name="Slide 8">
+  <p:cSld>
     <p:bg>
       <p:bgPr>
         <a:solidFill>
-          <a:srgbClr val="F4F9F5"/>
+          <a:srgbClr val="FFFFFF"/>
         </a:solidFill>
+        <a:effectLst/>
       </p:bgPr>
     </p:bg>
     <p:spTree>
@@ -4930,13 +6334,12 @@
             <a:avLst/>
           </a:prstGeom>
           <a:noFill/>
-          <a:ln/>
         </p:spPr>
         <p:txBody>
           <a:bodyPr wrap="square" rtlCol="0" anchor="ctr"/>
           <a:lstStyle/>
           <a:p>
-            <a:pPr indent="0" marL="0">
+            <a:pPr marL="0" indent="0">
               <a:buNone/>
             </a:pPr>
             <a:r>
@@ -4944,9 +6347,9 @@
                 <a:solidFill>
                   <a:srgbClr val="C17F00"/>
                 </a:solidFill>
-                <a:latin typeface="Arial" pitchFamily="34" charset="0"/>
-                <a:ea typeface="Arial" pitchFamily="34" charset="-122"/>
-                <a:cs typeface="Arial" pitchFamily="34" charset="-120"/>
+                <a:latin typeface="Arial" panose="020B0604020202020204" pitchFamily="34" charset="0"/>
+                <a:ea typeface="Arial" panose="020B0604020202020204" pitchFamily="34" charset="-122"/>
+                <a:cs typeface="Arial" panose="020B0604020202020204" pitchFamily="34" charset="-120"/>
               </a:rPr>
               <a:t>PRODUCT DEMO</a:t>
             </a:r>
@@ -4969,23 +6372,22 @@
             <a:avLst/>
           </a:prstGeom>
           <a:noFill/>
-          <a:ln/>
         </p:spPr>
         <p:txBody>
           <a:bodyPr wrap="square" rtlCol="0" anchor="ctr"/>
           <a:lstStyle/>
           <a:p>
-            <a:pPr indent="0" marL="0">
+            <a:pPr marL="0" indent="0">
               <a:buNone/>
             </a:pPr>
             <a:r>
               <a:rPr lang="en-US" sz="2200" b="1" dirty="0">
                 <a:solidFill>
-                  <a:srgbClr val="1A7A45"/>
-                </a:solidFill>
-                <a:latin typeface="Georgia" pitchFamily="34" charset="0"/>
-                <a:ea typeface="Georgia" pitchFamily="34" charset="-122"/>
-                <a:cs typeface="Georgia" pitchFamily="34" charset="-120"/>
+                  <a:srgbClr val="0D1F15"/>
+                </a:solidFill>
+                <a:latin typeface="Georgia" panose="02040502050405020303" pitchFamily="34" charset="0"/>
+                <a:ea typeface="Georgia" panose="02040502050405020303" pitchFamily="34" charset="-122"/>
+                <a:cs typeface="Georgia" panose="02040502050405020303" pitchFamily="34" charset="-120"/>
               </a:rPr>
               <a:t>Lister Dashboard: Manage Assets &amp; Payouts</a:t>
             </a:r>
@@ -5008,23 +6410,22 @@
             <a:avLst/>
           </a:prstGeom>
           <a:noFill/>
-          <a:ln/>
         </p:spPr>
         <p:txBody>
           <a:bodyPr wrap="square" rtlCol="0" anchor="ctr"/>
           <a:lstStyle/>
           <a:p>
-            <a:pPr indent="0" marL="0">
-              <a:buNone/>
-            </a:pPr>
-            <a:r>
-              <a:rPr lang="en-US" sz="900" dirty="0">
-                <a:solidFill>
-                  <a:srgbClr val="5D6B60"/>
-                </a:solidFill>
-                <a:latin typeface="Arial" pitchFamily="34" charset="0"/>
-                <a:ea typeface="Arial" pitchFamily="34" charset="-122"/>
-                <a:cs typeface="Arial" pitchFamily="34" charset="-120"/>
+            <a:pPr marL="0" indent="0">
+              <a:buNone/>
+            </a:pPr>
+            <a:r>
+              <a:rPr lang="en-US" sz="850" dirty="0">
+                <a:solidFill>
+                  <a:srgbClr val="5A7A68"/>
+                </a:solidFill>
+                <a:latin typeface="Arial" panose="020B0604020202020204" pitchFamily="34" charset="0"/>
+                <a:ea typeface="Arial" panose="020B0604020202020204" pitchFamily="34" charset="-122"/>
+                <a:cs typeface="Arial" panose="020B0604020202020204" pitchFamily="34" charset="-120"/>
               </a:rPr>
               <a:t>OwnIt Uganda Pitch Deck · www.ownit.ug</a:t>
             </a:r>
@@ -5047,13 +6448,12 @@
             <a:avLst/>
           </a:prstGeom>
           <a:noFill/>
-          <a:ln/>
         </p:spPr>
         <p:txBody>
           <a:bodyPr wrap="square" rtlCol="0" anchor="ctr"/>
           <a:lstStyle/>
           <a:p>
-            <a:pPr indent="0" marL="0">
+            <a:pPr marL="0" indent="0">
               <a:buNone/>
             </a:pPr>
             <a:r>
@@ -5061,9 +6461,9 @@
                 <a:solidFill>
                   <a:srgbClr val="0D1F15"/>
                 </a:solidFill>
-                <a:latin typeface="Georgia" pitchFamily="34" charset="0"/>
-                <a:ea typeface="Georgia" pitchFamily="34" charset="-122"/>
-                <a:cs typeface="Georgia" pitchFamily="34" charset="-120"/>
+                <a:latin typeface="Arial" panose="020B0604020202020204" pitchFamily="34" charset="0"/>
+                <a:ea typeface="Georgia" panose="02040502050405020303" pitchFamily="34" charset="-122"/>
+                <a:cs typeface="Georgia" panose="02040502050405020303" pitchFamily="34" charset="-120"/>
               </a:rPr>
               <a:t>A Specialized Interface for Asset Listers</a:t>
             </a:r>
@@ -5086,13 +6486,12 @@
             <a:avLst/>
           </a:prstGeom>
           <a:noFill/>
-          <a:ln/>
         </p:spPr>
         <p:txBody>
           <a:bodyPr wrap="square" rtlCol="0" anchor="ctr"/>
           <a:lstStyle/>
           <a:p>
-            <a:pPr indent="0" marL="0">
+            <a:pPr marL="0" indent="0">
               <a:lnSpc>
                 <a:spcPts val="1800"/>
               </a:lnSpc>
@@ -5103,16 +6502,16 @@
                 <a:solidFill>
                   <a:srgbClr val="0D1F15"/>
                 </a:solidFill>
-                <a:latin typeface="Arial" pitchFamily="34" charset="0"/>
-                <a:ea typeface="Arial" pitchFamily="34" charset="-122"/>
-                <a:cs typeface="Arial" pitchFamily="34" charset="-120"/>
+                <a:latin typeface="Arial" panose="020B0604020202020204" pitchFamily="34" charset="0"/>
+                <a:ea typeface="Arial" panose="020B0604020202020204" pitchFamily="34" charset="-122"/>
+                <a:cs typeface="Arial" panose="020B0604020202020204" pitchFamily="34" charset="-120"/>
               </a:rPr>
               <a:t>• Lister Portal Overview:</a:t>
             </a:r>
             <a:endParaRPr lang="en-US" sz="1100" dirty="0"/>
           </a:p>
           <a:p>
-            <a:pPr indent="0" marL="0">
+            <a:pPr marL="0" indent="0">
               <a:lnSpc>
                 <a:spcPts val="1800"/>
               </a:lnSpc>
@@ -5123,16 +6522,16 @@
                 <a:solidFill>
                   <a:srgbClr val="0D1F15"/>
                 </a:solidFill>
-                <a:latin typeface="Arial" pitchFamily="34" charset="0"/>
-                <a:ea typeface="Arial" pitchFamily="34" charset="-122"/>
-                <a:cs typeface="Arial" pitchFamily="34" charset="-120"/>
+                <a:latin typeface="Arial" panose="020B0604020202020204" pitchFamily="34" charset="0"/>
+                <a:ea typeface="Arial" panose="020B0604020202020204" pitchFamily="34" charset="-122"/>
+                <a:cs typeface="Arial" panose="020B0604020202020204" pitchFamily="34" charset="-120"/>
               </a:rPr>
               <a:t>Asset listers get a custom dashboard showing total asset value listed, funded status, co-investor count, and pending payouts.</a:t>
             </a:r>
             <a:endParaRPr lang="en-US" sz="1100" dirty="0"/>
           </a:p>
           <a:p>
-            <a:pPr indent="0" marL="0">
+            <a:pPr marL="0" indent="0">
               <a:lnSpc>
                 <a:spcPts val="1800"/>
               </a:lnSpc>
@@ -5141,7 +6540,7 @@
             <a:endParaRPr lang="en-US" sz="1100" dirty="0"/>
           </a:p>
           <a:p>
-            <a:pPr indent="0" marL="0">
+            <a:pPr marL="0" indent="0">
               <a:lnSpc>
                 <a:spcPts val="1800"/>
               </a:lnSpc>
@@ -5152,16 +6551,16 @@
                 <a:solidFill>
                   <a:srgbClr val="0D1F15"/>
                 </a:solidFill>
-                <a:latin typeface="Arial" pitchFamily="34" charset="0"/>
-                <a:ea typeface="Arial" pitchFamily="34" charset="-122"/>
-                <a:cs typeface="Arial" pitchFamily="34" charset="-120"/>
+                <a:latin typeface="Arial" panose="020B0604020202020204" pitchFamily="34" charset="0"/>
+                <a:ea typeface="Arial" panose="020B0604020202020204" pitchFamily="34" charset="-122"/>
+                <a:cs typeface="Arial" panose="020B0604020202020204" pitchFamily="34" charset="-120"/>
               </a:rPr>
               <a:t>• Co-owners Management:</a:t>
             </a:r>
             <a:endParaRPr lang="en-US" sz="1100" dirty="0"/>
           </a:p>
           <a:p>
-            <a:pPr indent="0" marL="0">
+            <a:pPr marL="0" indent="0">
               <a:lnSpc>
                 <a:spcPts val="1800"/>
               </a:lnSpc>
@@ -5172,16 +6571,16 @@
                 <a:solidFill>
                   <a:srgbClr val="0D1F15"/>
                 </a:solidFill>
-                <a:latin typeface="Arial" pitchFamily="34" charset="0"/>
-                <a:ea typeface="Arial" pitchFamily="34" charset="-122"/>
-                <a:cs typeface="Arial" pitchFamily="34" charset="-120"/>
+                <a:latin typeface="Arial" panose="020B0604020202020204" pitchFamily="34" charset="0"/>
+                <a:ea typeface="Arial" panose="020B0604020202020204" pitchFamily="34" charset="-122"/>
+                <a:cs typeface="Arial" panose="020B0604020202020204" pitchFamily="34" charset="-120"/>
               </a:rPr>
               <a:t>Check details of all fractional co-owners holding equity in your projects.</a:t>
             </a:r>
             <a:endParaRPr lang="en-US" sz="1100" dirty="0"/>
           </a:p>
           <a:p>
-            <a:pPr indent="0" marL="0">
+            <a:pPr marL="0" indent="0">
               <a:lnSpc>
                 <a:spcPts val="1800"/>
               </a:lnSpc>
@@ -5190,7 +6589,7 @@
             <a:endParaRPr lang="en-US" sz="1100" dirty="0"/>
           </a:p>
           <a:p>
-            <a:pPr indent="0" marL="0">
+            <a:pPr marL="0" indent="0">
               <a:lnSpc>
                 <a:spcPts val="1800"/>
               </a:lnSpc>
@@ -5201,16 +6600,16 @@
                 <a:solidFill>
                   <a:srgbClr val="0D1F15"/>
                 </a:solidFill>
-                <a:latin typeface="Arial" pitchFamily="34" charset="0"/>
-                <a:ea typeface="Arial" pitchFamily="34" charset="-122"/>
-                <a:cs typeface="Arial" pitchFamily="34" charset="-120"/>
+                <a:latin typeface="Arial" panose="020B0604020202020204" pitchFamily="34" charset="0"/>
+                <a:ea typeface="Arial" panose="020B0604020202020204" pitchFamily="34" charset="-122"/>
+                <a:cs typeface="Arial" panose="020B0604020202020204" pitchFamily="34" charset="-120"/>
               </a:rPr>
               <a:t>• Scheduled Disbursements:</a:t>
             </a:r>
             <a:endParaRPr lang="en-US" sz="1100" dirty="0"/>
           </a:p>
           <a:p>
-            <a:pPr indent="0" marL="0">
+            <a:pPr marL="0" indent="0">
               <a:lnSpc>
                 <a:spcPts val="1800"/>
               </a:lnSpc>
@@ -5221,9 +6620,9 @@
                 <a:solidFill>
                   <a:srgbClr val="0D1F15"/>
                 </a:solidFill>
-                <a:latin typeface="Arial" pitchFamily="34" charset="0"/>
-                <a:ea typeface="Arial" pitchFamily="34" charset="-122"/>
-                <a:cs typeface="Arial" pitchFamily="34" charset="-120"/>
+                <a:latin typeface="Arial" panose="020B0604020202020204" pitchFamily="34" charset="0"/>
+                <a:ea typeface="Arial" panose="020B0604020202020204" pitchFamily="34" charset="-122"/>
+                <a:cs typeface="Arial" panose="020B0604020202020204" pitchFamily="34" charset="-120"/>
               </a:rPr>
               <a:t>Set up and trigger payouts directly to co-owners in a single step.</a:t>
             </a:r>
@@ -5233,7 +6632,7 @@
       </p:sp>
       <p:pic>
         <p:nvPicPr>
-          <p:cNvPr id="7" name="Image 0" descr="c:\Users\HP\Downloads\Firebase\OwnItapp\screenshots\21_lister_overview.png">    </p:cNvPr>
+          <p:cNvPr id="7" name="Image 0" descr="c:\Users\HP\Downloads\Firebase\OwnItapp\screenshots\21_lister_overview.png"/>
           <p:cNvPicPr>
             <a:picLocks noChangeAspect="1"/>
           </p:cNvPicPr>
@@ -5270,13 +6669,12 @@
             <a:avLst/>
           </a:prstGeom>
           <a:noFill/>
-          <a:ln/>
         </p:spPr>
         <p:txBody>
           <a:bodyPr wrap="square" rtlCol="0" anchor="ctr"/>
           <a:lstStyle/>
           <a:p>
-            <a:pPr algn="ctr" indent="0" marL="0">
+            <a:pPr marL="0" indent="0" algn="ctr">
               <a:buNone/>
             </a:pPr>
             <a:r>
@@ -5284,9 +6682,9 @@
                 <a:solidFill>
                   <a:srgbClr val="0D1F15"/>
                 </a:solidFill>
-                <a:latin typeface="Arial" pitchFamily="34" charset="0"/>
-                <a:ea typeface="Arial" pitchFamily="34" charset="-122"/>
-                <a:cs typeface="Arial" pitchFamily="34" charset="-120"/>
+                <a:latin typeface="Arial" panose="020B0604020202020204" pitchFamily="34" charset="0"/>
+                <a:ea typeface="Arial" panose="020B0604020202020204" pitchFamily="34" charset="-122"/>
+                <a:cs typeface="Arial" panose="020B0604020202020204" pitchFamily="34" charset="-120"/>
               </a:rPr>
               <a:t>Lister Home Dashboard</a:t>
             </a:r>
@@ -5296,7 +6694,7 @@
       </p:sp>
       <p:pic>
         <p:nvPicPr>
-          <p:cNvPr id="9" name="Image 1" descr="c:\Users\HP\Downloads\Firebase\OwnItapp\screenshots\25_lister_payouts.png">    </p:cNvPr>
+          <p:cNvPr id="9" name="Image 1" descr="c:\Users\HP\Downloads\Firebase\OwnItapp\screenshots\25_lister_payouts.png"/>
           <p:cNvPicPr>
             <a:picLocks noChangeAspect="1"/>
           </p:cNvPicPr>
@@ -5333,13 +6731,12 @@
             <a:avLst/>
           </a:prstGeom>
           <a:noFill/>
-          <a:ln/>
         </p:spPr>
         <p:txBody>
           <a:bodyPr wrap="square" rtlCol="0" anchor="ctr"/>
           <a:lstStyle/>
           <a:p>
-            <a:pPr algn="ctr" indent="0" marL="0">
+            <a:pPr marL="0" indent="0" algn="ctr">
               <a:buNone/>
             </a:pPr>
             <a:r>
@@ -5347,9 +6744,9 @@
                 <a:solidFill>
                   <a:srgbClr val="0D1F15"/>
                 </a:solidFill>
-                <a:latin typeface="Arial" pitchFamily="34" charset="0"/>
-                <a:ea typeface="Arial" pitchFamily="34" charset="-122"/>
-                <a:cs typeface="Arial" pitchFamily="34" charset="-120"/>
+                <a:latin typeface="Arial" panose="020B0604020202020204" pitchFamily="34" charset="0"/>
+                <a:ea typeface="Arial" panose="020B0604020202020204" pitchFamily="34" charset="-122"/>
+                <a:cs typeface="Arial" panose="020B0604020202020204" pitchFamily="34" charset="-120"/>
               </a:rPr>
               <a:t>Co-owner Payouts Portal</a:t>
             </a:r>
@@ -5367,12 +6764,13 @@
 
 <file path=ppt/slides/slide9.xml><?xml version="1.0" encoding="utf-8"?>
 <p:sld xmlns:a="http://schemas.openxmlformats.org/drawingml/2006/main" xmlns:r="http://schemas.openxmlformats.org/officeDocument/2006/relationships" xmlns:p="http://schemas.openxmlformats.org/presentationml/2006/main">
-  <p:cSld name="Slide 9">
+  <p:cSld>
     <p:bg>
       <p:bgPr>
         <a:solidFill>
           <a:srgbClr val="F4F9F5"/>
         </a:solidFill>
+        <a:effectLst/>
       </p:bgPr>
     </p:bg>
     <p:spTree>
@@ -5404,13 +6802,12 @@
             <a:avLst/>
           </a:prstGeom>
           <a:noFill/>
-          <a:ln/>
         </p:spPr>
         <p:txBody>
           <a:bodyPr wrap="square" rtlCol="0" anchor="ctr"/>
           <a:lstStyle/>
           <a:p>
-            <a:pPr indent="0" marL="0">
+            <a:pPr marL="0" indent="0">
               <a:buNone/>
             </a:pPr>
             <a:r>
@@ -5418,9 +6815,9 @@
                 <a:solidFill>
                   <a:srgbClr val="C17F00"/>
                 </a:solidFill>
-                <a:latin typeface="Arial" pitchFamily="34" charset="0"/>
-                <a:ea typeface="Arial" pitchFamily="34" charset="-122"/>
-                <a:cs typeface="Arial" pitchFamily="34" charset="-120"/>
+                <a:latin typeface="Arial" panose="020B0604020202020204" pitchFamily="34" charset="0"/>
+                <a:ea typeface="Arial" panose="020B0604020202020204" pitchFamily="34" charset="-122"/>
+                <a:cs typeface="Arial" panose="020B0604020202020204" pitchFamily="34" charset="-120"/>
               </a:rPr>
               <a:t>MARKET OPPORTUNITY</a:t>
             </a:r>
@@ -5443,23 +6840,22 @@
             <a:avLst/>
           </a:prstGeom>
           <a:noFill/>
-          <a:ln/>
         </p:spPr>
         <p:txBody>
           <a:bodyPr wrap="square" rtlCol="0" anchor="ctr"/>
           <a:lstStyle/>
           <a:p>
-            <a:pPr indent="0" marL="0">
+            <a:pPr marL="0" indent="0">
               <a:buNone/>
             </a:pPr>
             <a:r>
               <a:rPr lang="en-US" sz="2200" b="1" dirty="0">
                 <a:solidFill>
-                  <a:srgbClr val="1A7A45"/>
-                </a:solidFill>
-                <a:latin typeface="Georgia" pitchFamily="34" charset="0"/>
-                <a:ea typeface="Georgia" pitchFamily="34" charset="-122"/>
-                <a:cs typeface="Georgia" pitchFamily="34" charset="-120"/>
+                  <a:srgbClr val="0D1F15"/>
+                </a:solidFill>
+                <a:latin typeface="Georgia" panose="02040502050405020303" pitchFamily="34" charset="0"/>
+                <a:ea typeface="Georgia" panose="02040502050405020303" pitchFamily="34" charset="-122"/>
+                <a:cs typeface="Georgia" panose="02040502050405020303" pitchFamily="34" charset="-120"/>
               </a:rPr>
               <a:t>Attractive Real-world Asset Class Yields</a:t>
             </a:r>
@@ -5482,23 +6878,22 @@
             <a:avLst/>
           </a:prstGeom>
           <a:noFill/>
-          <a:ln/>
         </p:spPr>
         <p:txBody>
           <a:bodyPr wrap="square" rtlCol="0" anchor="ctr"/>
           <a:lstStyle/>
           <a:p>
-            <a:pPr indent="0" marL="0">
-              <a:buNone/>
-            </a:pPr>
-            <a:r>
-              <a:rPr lang="en-US" sz="900" dirty="0">
-                <a:solidFill>
-                  <a:srgbClr val="5D6B60"/>
-                </a:solidFill>
-                <a:latin typeface="Arial" pitchFamily="34" charset="0"/>
-                <a:ea typeface="Arial" pitchFamily="34" charset="-122"/>
-                <a:cs typeface="Arial" pitchFamily="34" charset="-120"/>
+            <a:pPr marL="0" indent="0">
+              <a:buNone/>
+            </a:pPr>
+            <a:r>
+              <a:rPr lang="en-US" sz="850" dirty="0">
+                <a:solidFill>
+                  <a:srgbClr val="5A7A68"/>
+                </a:solidFill>
+                <a:latin typeface="Arial" panose="020B0604020202020204" pitchFamily="34" charset="0"/>
+                <a:ea typeface="Arial" panose="020B0604020202020204" pitchFamily="34" charset="-122"/>
+                <a:cs typeface="Arial" panose="020B0604020202020204" pitchFamily="34" charset="-120"/>
               </a:rPr>
               <a:t>OwnIt Uganda Pitch Deck · www.ownit.ug</a:t>
             </a:r>
@@ -5532,6 +6927,10 @@
             <a:prstDash val="solid"/>
           </a:ln>
         </p:spPr>
+        <p:txBody>
+          <a:bodyPr wrap="square"/>
+          <a:p/>
+        </p:txBody>
       </p:sp>
       <p:sp>
         <p:nvSpPr>
@@ -5548,23 +6947,22 @@
             <a:avLst/>
           </a:prstGeom>
           <a:noFill/>
-          <a:ln/>
         </p:spPr>
         <p:txBody>
           <a:bodyPr wrap="square" rtlCol="0" anchor="ctr"/>
           <a:lstStyle/>
           <a:p>
-            <a:pPr algn="ctr" indent="0" marL="0">
+            <a:pPr marL="0" indent="0" algn="ctr">
               <a:buNone/>
             </a:pPr>
             <a:r>
               <a:rPr lang="en-US" sz="1600" b="1" dirty="0">
                 <a:solidFill>
-                  <a:srgbClr val="1A7A45"/>
-                </a:solidFill>
-                <a:latin typeface="Georgia" pitchFamily="34" charset="0"/>
-                <a:ea typeface="Georgia" pitchFamily="34" charset="-122"/>
-                <a:cs typeface="Georgia" pitchFamily="34" charset="-120"/>
+                  <a:srgbClr val="0D1F15"/>
+                </a:solidFill>
+                <a:latin typeface="Georgia" panose="02040502050405020303" pitchFamily="34" charset="0"/>
+                <a:ea typeface="Georgia" panose="02040502050405020303" pitchFamily="34" charset="-122"/>
+                <a:cs typeface="Georgia" panose="02040502050405020303" pitchFamily="34" charset="-120"/>
               </a:rPr>
               <a:t>Real Estate</a:t>
             </a:r>
@@ -5587,13 +6985,12 @@
             <a:avLst/>
           </a:prstGeom>
           <a:noFill/>
-          <a:ln/>
         </p:spPr>
         <p:txBody>
           <a:bodyPr wrap="square" rtlCol="0" anchor="ctr"/>
           <a:lstStyle/>
           <a:p>
-            <a:pPr algn="ctr" indent="0" marL="0">
+            <a:pPr marL="0" indent="0" algn="ctr">
               <a:buNone/>
             </a:pPr>
             <a:r>
@@ -5601,16 +6998,16 @@
                 <a:solidFill>
                   <a:srgbClr val="0D1F15"/>
                 </a:solidFill>
-                <a:latin typeface="Arial" pitchFamily="34" charset="0"/>
-                <a:ea typeface="Arial" pitchFamily="34" charset="-122"/>
-                <a:cs typeface="Arial" pitchFamily="34" charset="-120"/>
+                <a:latin typeface="Arial" panose="020B0604020202020204" pitchFamily="34" charset="0"/>
+                <a:ea typeface="Arial" panose="020B0604020202020204" pitchFamily="34" charset="-122"/>
+                <a:cs typeface="Arial" panose="020B0604020202020204" pitchFamily="34" charset="-120"/>
               </a:rPr>
               <a:t>15% - 20%</a:t>
             </a:r>
             <a:endParaRPr lang="en-US" sz="1200" dirty="0"/>
           </a:p>
           <a:p>
-            <a:pPr algn="ctr" indent="0" marL="0">
+            <a:pPr marL="0" indent="0" algn="ctr">
               <a:buNone/>
             </a:pPr>
             <a:r>
@@ -5618,22 +7015,22 @@
                 <a:solidFill>
                   <a:srgbClr val="0D1F15"/>
                 </a:solidFill>
-                <a:latin typeface="Arial" pitchFamily="34" charset="0"/>
-                <a:ea typeface="Arial" pitchFamily="34" charset="-122"/>
-                <a:cs typeface="Arial" pitchFamily="34" charset="-120"/>
+                <a:latin typeface="Arial" panose="020B0604020202020204" pitchFamily="34" charset="0"/>
+                <a:ea typeface="Arial" panose="020B0604020202020204" pitchFamily="34" charset="-122"/>
+                <a:cs typeface="Arial" panose="020B0604020202020204" pitchFamily="34" charset="-120"/>
               </a:rPr>
               <a:t>Annual Yield</a:t>
             </a:r>
             <a:endParaRPr lang="en-US" sz="1200" dirty="0"/>
           </a:p>
           <a:p>
-            <a:pPr algn="ctr" indent="0" marL="0">
+            <a:pPr marL="0" indent="0" algn="ctr">
               <a:buNone/>
             </a:pPr>
             <a:endParaRPr lang="en-US" sz="1200" dirty="0"/>
           </a:p>
           <a:p>
-            <a:pPr algn="ctr" indent="0" marL="0">
+            <a:pPr marL="0" indent="0" algn="ctr">
               <a:buNone/>
             </a:pPr>
             <a:r>
@@ -5641,9 +7038,9 @@
                 <a:solidFill>
                   <a:srgbClr val="0D1F15"/>
                 </a:solidFill>
-                <a:latin typeface="Arial" pitchFamily="34" charset="0"/>
-                <a:ea typeface="Arial" pitchFamily="34" charset="-122"/>
-                <a:cs typeface="Arial" pitchFamily="34" charset="-120"/>
+                <a:latin typeface="Arial" panose="020B0604020202020204" pitchFamily="34" charset="0"/>
+                <a:ea typeface="Arial" panose="020B0604020202020204" pitchFamily="34" charset="-122"/>
+                <a:cs typeface="Arial" panose="020B0604020202020204" pitchFamily="34" charset="-120"/>
               </a:rPr>
               <a:t>Stable commercial and residential apartments (Muyenga, Ntinda, Entebbe Road).</a:t>
             </a:r>
@@ -5677,6 +7074,10 @@
             <a:prstDash val="solid"/>
           </a:ln>
         </p:spPr>
+        <p:txBody>
+          <a:bodyPr wrap="square"/>
+          <a:p/>
+        </p:txBody>
       </p:sp>
       <p:sp>
         <p:nvSpPr>
@@ -5693,23 +7094,22 @@
             <a:avLst/>
           </a:prstGeom>
           <a:noFill/>
-          <a:ln/>
         </p:spPr>
         <p:txBody>
           <a:bodyPr wrap="square" rtlCol="0" anchor="ctr"/>
           <a:lstStyle/>
           <a:p>
-            <a:pPr algn="ctr" indent="0" marL="0">
+            <a:pPr marL="0" indent="0" algn="ctr">
               <a:buNone/>
             </a:pPr>
             <a:r>
               <a:rPr lang="en-US" sz="1600" b="1" dirty="0">
                 <a:solidFill>
-                  <a:srgbClr val="C17F00"/>
-                </a:solidFill>
-                <a:latin typeface="Georgia" pitchFamily="34" charset="0"/>
-                <a:ea typeface="Georgia" pitchFamily="34" charset="-122"/>
-                <a:cs typeface="Georgia" pitchFamily="34" charset="-120"/>
+                  <a:srgbClr val="0D1F15"/>
+                </a:solidFill>
+                <a:latin typeface="Georgia" panose="02040502050405020303" pitchFamily="34" charset="0"/>
+                <a:ea typeface="Georgia" panose="02040502050405020303" pitchFamily="34" charset="-122"/>
+                <a:cs typeface="Georgia" panose="02040502050405020303" pitchFamily="34" charset="-120"/>
               </a:rPr>
               <a:t>Agriculture &amp; Trade</a:t>
             </a:r>
@@ -5732,13 +7132,12 @@
             <a:avLst/>
           </a:prstGeom>
           <a:noFill/>
-          <a:ln/>
         </p:spPr>
         <p:txBody>
           <a:bodyPr wrap="square" rtlCol="0" anchor="ctr"/>
           <a:lstStyle/>
           <a:p>
-            <a:pPr algn="ctr" indent="0" marL="0">
+            <a:pPr marL="0" indent="0" algn="ctr">
               <a:buNone/>
             </a:pPr>
             <a:r>
@@ -5746,16 +7145,16 @@
                 <a:solidFill>
                   <a:srgbClr val="0D1F15"/>
                 </a:solidFill>
-                <a:latin typeface="Arial" pitchFamily="34" charset="0"/>
-                <a:ea typeface="Arial" pitchFamily="34" charset="-122"/>
-                <a:cs typeface="Arial" pitchFamily="34" charset="-120"/>
+                <a:latin typeface="Arial" panose="020B0604020202020204" pitchFamily="34" charset="0"/>
+                <a:ea typeface="Arial" panose="020B0604020202020204" pitchFamily="34" charset="-122"/>
+                <a:cs typeface="Arial" panose="020B0604020202020204" pitchFamily="34" charset="-120"/>
               </a:rPr>
               <a:t>23% - 32%</a:t>
             </a:r>
             <a:endParaRPr lang="en-US" sz="1200" dirty="0"/>
           </a:p>
           <a:p>
-            <a:pPr algn="ctr" indent="0" marL="0">
+            <a:pPr marL="0" indent="0" algn="ctr">
               <a:buNone/>
             </a:pPr>
             <a:r>
@@ -5763,22 +7162,22 @@
                 <a:solidFill>
                   <a:srgbClr val="0D1F15"/>
                 </a:solidFill>
-                <a:latin typeface="Arial" pitchFamily="34" charset="0"/>
-                <a:ea typeface="Arial" pitchFamily="34" charset="-122"/>
-                <a:cs typeface="Arial" pitchFamily="34" charset="-120"/>
+                <a:latin typeface="Arial" panose="020B0604020202020204" pitchFamily="34" charset="0"/>
+                <a:ea typeface="Arial" panose="020B0604020202020204" pitchFamily="34" charset="-122"/>
+                <a:cs typeface="Arial" panose="020B0604020202020204" pitchFamily="34" charset="-120"/>
               </a:rPr>
               <a:t>Turnaround Yield</a:t>
             </a:r>
             <a:endParaRPr lang="en-US" sz="1200" dirty="0"/>
           </a:p>
           <a:p>
-            <a:pPr algn="ctr" indent="0" marL="0">
+            <a:pPr marL="0" indent="0" algn="ctr">
               <a:buNone/>
             </a:pPr>
             <a:endParaRPr lang="en-US" sz="1200" dirty="0"/>
           </a:p>
           <a:p>
-            <a:pPr algn="ctr" indent="0" marL="0">
+            <a:pPr marL="0" indent="0" algn="ctr">
               <a:buNone/>
             </a:pPr>
             <a:r>
@@ -5786,9 +7185,9 @@
                 <a:solidFill>
                   <a:srgbClr val="0D1F15"/>
                 </a:solidFill>
-                <a:latin typeface="Arial" pitchFamily="34" charset="0"/>
-                <a:ea typeface="Arial" pitchFamily="34" charset="-122"/>
-                <a:cs typeface="Arial" pitchFamily="34" charset="-120"/>
+                <a:latin typeface="Arial" panose="020B0604020202020204" pitchFamily="34" charset="0"/>
+                <a:ea typeface="Arial" panose="020B0604020202020204" pitchFamily="34" charset="-122"/>
+                <a:cs typeface="Arial" panose="020B0604020202020204" pitchFamily="34" charset="-120"/>
               </a:rPr>
               <a:t>Fast export cycles (Lira sesame, Bugisu Arabica coffee, Guangzhou trade imports).</a:t>
             </a:r>
@@ -5822,6 +7221,10 @@
             <a:prstDash val="solid"/>
           </a:ln>
         </p:spPr>
+        <p:txBody>
+          <a:bodyPr wrap="square"/>
+          <a:p/>
+        </p:txBody>
       </p:sp>
       <p:sp>
         <p:nvSpPr>
@@ -5838,23 +7241,22 @@
             <a:avLst/>
           </a:prstGeom>
           <a:noFill/>
-          <a:ln/>
         </p:spPr>
         <p:txBody>
           <a:bodyPr wrap="square" rtlCol="0" anchor="ctr"/>
           <a:lstStyle/>
           <a:p>
-            <a:pPr algn="ctr" indent="0" marL="0">
+            <a:pPr marL="0" indent="0" algn="ctr">
               <a:buNone/>
             </a:pPr>
             <a:r>
               <a:rPr lang="en-US" sz="1600" b="1" dirty="0">
                 <a:solidFill>
-                  <a:srgbClr val="1A73E8"/>
-                </a:solidFill>
-                <a:latin typeface="Georgia" pitchFamily="34" charset="0"/>
-                <a:ea typeface="Georgia" pitchFamily="34" charset="-122"/>
-                <a:cs typeface="Georgia" pitchFamily="34" charset="-120"/>
+                  <a:srgbClr val="0D1F15"/>
+                </a:solidFill>
+                <a:latin typeface="Georgia" panose="02040502050405020303" pitchFamily="34" charset="0"/>
+                <a:ea typeface="Georgia" panose="02040502050405020303" pitchFamily="34" charset="-122"/>
+                <a:cs typeface="Georgia" panose="02040502050405020303" pitchFamily="34" charset="-120"/>
               </a:rPr>
               <a:t>Energy &amp; Minerals</a:t>
             </a:r>
@@ -5877,13 +7279,12 @@
             <a:avLst/>
           </a:prstGeom>
           <a:noFill/>
-          <a:ln/>
         </p:spPr>
         <p:txBody>
           <a:bodyPr wrap="square" rtlCol="0" anchor="ctr"/>
           <a:lstStyle/>
           <a:p>
-            <a:pPr algn="ctr" indent="0" marL="0">
+            <a:pPr marL="0" indent="0" algn="ctr">
               <a:buNone/>
             </a:pPr>
             <a:r>
@@ -5891,16 +7292,16 @@
                 <a:solidFill>
                   <a:srgbClr val="0D1F15"/>
                 </a:solidFill>
-                <a:latin typeface="Arial" pitchFamily="34" charset="0"/>
-                <a:ea typeface="Arial" pitchFamily="34" charset="-122"/>
-                <a:cs typeface="Arial" pitchFamily="34" charset="-120"/>
+                <a:latin typeface="Arial" panose="020B0604020202020204" pitchFamily="34" charset="0"/>
+                <a:ea typeface="Arial" panose="020B0604020202020204" pitchFamily="34" charset="-122"/>
+                <a:cs typeface="Arial" panose="020B0604020202020204" pitchFamily="34" charset="-120"/>
               </a:rPr>
               <a:t>21% - 36%</a:t>
             </a:r>
             <a:endParaRPr lang="en-US" sz="1200" dirty="0"/>
           </a:p>
           <a:p>
-            <a:pPr algn="ctr" indent="0" marL="0">
+            <a:pPr marL="0" indent="0" algn="ctr">
               <a:buNone/>
             </a:pPr>
             <a:r>
@@ -5908,22 +7309,22 @@
                 <a:solidFill>
                   <a:srgbClr val="0D1F15"/>
                 </a:solidFill>
-                <a:latin typeface="Arial" pitchFamily="34" charset="0"/>
-                <a:ea typeface="Arial" pitchFamily="34" charset="-122"/>
-                <a:cs typeface="Arial" pitchFamily="34" charset="-120"/>
+                <a:latin typeface="Arial" panose="020B0604020202020204" pitchFamily="34" charset="0"/>
+                <a:ea typeface="Arial" panose="020B0604020202020204" pitchFamily="34" charset="-122"/>
+                <a:cs typeface="Arial" panose="020B0604020202020204" pitchFamily="34" charset="-120"/>
               </a:rPr>
               <a:t>Premium Yield</a:t>
             </a:r>
             <a:endParaRPr lang="en-US" sz="1200" dirty="0"/>
           </a:p>
           <a:p>
-            <a:pPr algn="ctr" indent="0" marL="0">
+            <a:pPr marL="0" indent="0" algn="ctr">
               <a:buNone/>
             </a:pPr>
             <a:endParaRPr lang="en-US" sz="1200" dirty="0"/>
           </a:p>
           <a:p>
-            <a:pPr algn="ctr" indent="0" marL="0">
+            <a:pPr marL="0" indent="0" algn="ctr">
               <a:buNone/>
             </a:pPr>
             <a:r>
@@ -5931,9 +7332,9 @@
                 <a:solidFill>
                   <a:srgbClr val="0D1F15"/>
                 </a:solidFill>
-                <a:latin typeface="Arial" pitchFamily="34" charset="0"/>
-                <a:ea typeface="Arial" pitchFamily="34" charset="-122"/>
-                <a:cs typeface="Arial" pitchFamily="34" charset="-120"/>
+                <a:latin typeface="Arial" panose="020B0604020202020204" pitchFamily="34" charset="0"/>
+                <a:ea typeface="Arial" panose="020B0604020202020204" pitchFamily="34" charset="-122"/>
+                <a:cs typeface="Arial" panose="020B0604020202020204" pitchFamily="34" charset="-120"/>
               </a:rPr>
               <a:t>High utility assets (solar grids, toll roads) &amp; bulk refined mineral sales (Busia lithium, gold).</a:t>
             </a:r>
@@ -5992,7 +7393,7 @@
     </a:clrScheme>
     <a:fontScheme name="Office">
       <a:majorFont>
-        <a:latin typeface="Calibri Light" panose="020F0302020204030204"/>
+        <a:latin typeface="Calibri Light"/>
         <a:ea typeface=""/>
         <a:cs typeface=""/>
         <a:font script="Jpan" typeface="游ゴシック Light"/>
@@ -6025,26 +7426,9 @@
         <a:font script="Viet" typeface="Times New Roman"/>
         <a:font script="Uigh" typeface="Microsoft Uighur"/>
         <a:font script="Geor" typeface="Sylfaen"/>
-        <a:font script="Armn" typeface="Arial"/>
-        <a:font script="Bugi" typeface="Leelawadee UI"/>
-        <a:font script="Bopo" typeface="Microsoft JhengHei"/>
-        <a:font script="Java" typeface="Javanese Text"/>
-        <a:font script="Lisu" typeface="Segoe UI"/>
-        <a:font script="Mymr" typeface="Myanmar Text"/>
-        <a:font script="Nkoo" typeface="Ebrima"/>
-        <a:font script="Olck" typeface="Nirmala UI"/>
-        <a:font script="Osma" typeface="Ebrima"/>
-        <a:font script="Phag" typeface="Phagspa"/>
-        <a:font script="Syrn" typeface="Estrangelo Edessa"/>
-        <a:font script="Syrj" typeface="Estrangelo Edessa"/>
-        <a:font script="Syre" typeface="Estrangelo Edessa"/>
-        <a:font script="Sora" typeface="Nirmala UI"/>
-        <a:font script="Tale" typeface="Microsoft Tai Le"/>
-        <a:font script="Talu" typeface="Microsoft New Tai Lue"/>
-        <a:font script="Tfng" typeface="Ebrima"/>
       </a:majorFont>
       <a:minorFont>
-        <a:latin typeface="Calibri" panose="020F0502020204030204"/>
+        <a:latin typeface="Calibri"/>
         <a:ea typeface=""/>
         <a:cs typeface=""/>
         <a:font script="Jpan" typeface="游ゴシック"/>
@@ -6077,23 +7461,6 @@
         <a:font script="Viet" typeface="Arial"/>
         <a:font script="Uigh" typeface="Microsoft Uighur"/>
         <a:font script="Geor" typeface="Sylfaen"/>
-        <a:font script="Armn" typeface="Arial"/>
-        <a:font script="Bugi" typeface="Leelawadee UI"/>
-        <a:font script="Bopo" typeface="Microsoft JhengHei"/>
-        <a:font script="Java" typeface="Javanese Text"/>
-        <a:font script="Lisu" typeface="Segoe UI"/>
-        <a:font script="Mymr" typeface="Myanmar Text"/>
-        <a:font script="Nkoo" typeface="Ebrima"/>
-        <a:font script="Olck" typeface="Nirmala UI"/>
-        <a:font script="Osma" typeface="Ebrima"/>
-        <a:font script="Phag" typeface="Phagspa"/>
-        <a:font script="Syrn" typeface="Estrangelo Edessa"/>
-        <a:font script="Syrj" typeface="Estrangelo Edessa"/>
-        <a:font script="Syre" typeface="Estrangelo Edessa"/>
-        <a:font script="Sora" typeface="Nirmala UI"/>
-        <a:font script="Tale" typeface="Microsoft Tai Le"/>
-        <a:font script="Talu" typeface="Microsoft New Tai Lue"/>
-        <a:font script="Tfng" typeface="Ebrima"/>
       </a:minorFont>
     </a:fontScheme>
     <a:fmtScheme name="Office">
@@ -6234,8 +7601,265 @@
       </a:bgFillStyleLst>
     </a:fmtScheme>
   </a:themeElements>
-  <a:objectDefaults/>
-  <a:extraClrSchemeLst/>
+  <a:extLst>
+    <a:ext uri="{05A4C25C-085E-4340-85A3-A5531E510DB2}">
+      <thm15:themeFamily xmlns:thm15="http://schemas.microsoft.com/office/thememl/2012/main" name="Office Theme" id="{62F939B6-93AF-4DB8-9C6B-D6C7DFDC589F}" vid="{4A3C46E8-61CC-4603-A589-7422A47A8E4A}"/>
+    </a:ext>
+  </a:extLst>
+</a:theme>
+</file>
+
+<file path=ppt/theme/theme2.xml><?xml version="1.0" encoding="utf-8"?>
+<a:theme xmlns:a="http://schemas.openxmlformats.org/drawingml/2006/main" name="Office Theme">
+  <a:themeElements>
+    <a:clrScheme name="Office">
+      <a:dk1>
+        <a:sysClr val="windowText" lastClr="000000"/>
+      </a:dk1>
+      <a:lt1>
+        <a:sysClr val="window" lastClr="FFFFFF"/>
+      </a:lt1>
+      <a:dk2>
+        <a:srgbClr val="44546A"/>
+      </a:dk2>
+      <a:lt2>
+        <a:srgbClr val="E7E6E6"/>
+      </a:lt2>
+      <a:accent1>
+        <a:srgbClr val="4472C4"/>
+      </a:accent1>
+      <a:accent2>
+        <a:srgbClr val="ED7D31"/>
+      </a:accent2>
+      <a:accent3>
+        <a:srgbClr val="A5A5A5"/>
+      </a:accent3>
+      <a:accent4>
+        <a:srgbClr val="FFC000"/>
+      </a:accent4>
+      <a:accent5>
+        <a:srgbClr val="5B9BD5"/>
+      </a:accent5>
+      <a:accent6>
+        <a:srgbClr val="70AD47"/>
+      </a:accent6>
+      <a:hlink>
+        <a:srgbClr val="0563C1"/>
+      </a:hlink>
+      <a:folHlink>
+        <a:srgbClr val="954F72"/>
+      </a:folHlink>
+    </a:clrScheme>
+    <a:fontScheme name="Office">
+      <a:majorFont>
+        <a:latin typeface="Calibri Light"/>
+        <a:ea typeface=""/>
+        <a:cs typeface=""/>
+        <a:font script="Jpan" typeface="游ゴシック Light"/>
+        <a:font script="Hang" typeface="맑은 고딕"/>
+        <a:font script="Hans" typeface="等线 Light"/>
+        <a:font script="Hant" typeface="新細明體"/>
+        <a:font script="Arab" typeface="Times New Roman"/>
+        <a:font script="Hebr" typeface="Times New Roman"/>
+        <a:font script="Thai" typeface="Angsana New"/>
+        <a:font script="Ethi" typeface="Nyala"/>
+        <a:font script="Beng" typeface="Vrinda"/>
+        <a:font script="Gujr" typeface="Shruti"/>
+        <a:font script="Khmr" typeface="MoolBoran"/>
+        <a:font script="Knda" typeface="Tunga"/>
+        <a:font script="Guru" typeface="Raavi"/>
+        <a:font script="Cans" typeface="Euphemia"/>
+        <a:font script="Cher" typeface="Plantagenet Cherokee"/>
+        <a:font script="Yiii" typeface="Microsoft Yi Baiti"/>
+        <a:font script="Tibt" typeface="Microsoft Himalaya"/>
+        <a:font script="Thaa" typeface="MV Boli"/>
+        <a:font script="Deva" typeface="Mangal"/>
+        <a:font script="Telu" typeface="Gautami"/>
+        <a:font script="Taml" typeface="Latha"/>
+        <a:font script="Syrc" typeface="Estrangelo Edessa"/>
+        <a:font script="Orya" typeface="Kalinga"/>
+        <a:font script="Mlym" typeface="Kartika"/>
+        <a:font script="Laoo" typeface="DokChampa"/>
+        <a:font script="Sinh" typeface="Iskoola Pota"/>
+        <a:font script="Mong" typeface="Mongolian Baiti"/>
+        <a:font script="Viet" typeface="Times New Roman"/>
+        <a:font script="Uigh" typeface="Microsoft Uighur"/>
+        <a:font script="Geor" typeface="Sylfaen"/>
+      </a:majorFont>
+      <a:minorFont>
+        <a:latin typeface="Calibri"/>
+        <a:ea typeface=""/>
+        <a:cs typeface=""/>
+        <a:font script="Jpan" typeface="游ゴシック"/>
+        <a:font script="Hang" typeface="맑은 고딕"/>
+        <a:font script="Hans" typeface="等线"/>
+        <a:font script="Hant" typeface="新細明體"/>
+        <a:font script="Arab" typeface="Arial"/>
+        <a:font script="Hebr" typeface="Arial"/>
+        <a:font script="Thai" typeface="Cordia New"/>
+        <a:font script="Ethi" typeface="Nyala"/>
+        <a:font script="Beng" typeface="Vrinda"/>
+        <a:font script="Gujr" typeface="Shruti"/>
+        <a:font script="Khmr" typeface="DaunPenh"/>
+        <a:font script="Knda" typeface="Tunga"/>
+        <a:font script="Guru" typeface="Raavi"/>
+        <a:font script="Cans" typeface="Euphemia"/>
+        <a:font script="Cher" typeface="Plantagenet Cherokee"/>
+        <a:font script="Yiii" typeface="Microsoft Yi Baiti"/>
+        <a:font script="Tibt" typeface="Microsoft Himalaya"/>
+        <a:font script="Thaa" typeface="MV Boli"/>
+        <a:font script="Deva" typeface="Mangal"/>
+        <a:font script="Telu" typeface="Gautami"/>
+        <a:font script="Taml" typeface="Latha"/>
+        <a:font script="Syrc" typeface="Estrangelo Edessa"/>
+        <a:font script="Orya" typeface="Kalinga"/>
+        <a:font script="Mlym" typeface="Kartika"/>
+        <a:font script="Laoo" typeface="DokChampa"/>
+        <a:font script="Sinh" typeface="Iskoola Pota"/>
+        <a:font script="Mong" typeface="Mongolian Baiti"/>
+        <a:font script="Viet" typeface="Arial"/>
+        <a:font script="Uigh" typeface="Microsoft Uighur"/>
+        <a:font script="Geor" typeface="Sylfaen"/>
+      </a:minorFont>
+    </a:fontScheme>
+    <a:fmtScheme name="Office">
+      <a:fillStyleLst>
+        <a:solidFill>
+          <a:schemeClr val="phClr"/>
+        </a:solidFill>
+        <a:gradFill rotWithShape="1">
+          <a:gsLst>
+            <a:gs pos="0">
+              <a:schemeClr val="phClr">
+                <a:lumMod val="110000"/>
+                <a:satMod val="105000"/>
+                <a:tint val="67000"/>
+              </a:schemeClr>
+            </a:gs>
+            <a:gs pos="50000">
+              <a:schemeClr val="phClr">
+                <a:lumMod val="105000"/>
+                <a:satMod val="103000"/>
+                <a:tint val="73000"/>
+              </a:schemeClr>
+            </a:gs>
+            <a:gs pos="100000">
+              <a:schemeClr val="phClr">
+                <a:lumMod val="105000"/>
+                <a:satMod val="109000"/>
+                <a:tint val="81000"/>
+              </a:schemeClr>
+            </a:gs>
+          </a:gsLst>
+          <a:lin ang="5400000" scaled="0"/>
+        </a:gradFill>
+        <a:gradFill rotWithShape="1">
+          <a:gsLst>
+            <a:gs pos="0">
+              <a:schemeClr val="phClr">
+                <a:satMod val="103000"/>
+                <a:lumMod val="102000"/>
+                <a:tint val="94000"/>
+              </a:schemeClr>
+            </a:gs>
+            <a:gs pos="50000">
+              <a:schemeClr val="phClr">
+                <a:satMod val="110000"/>
+                <a:lumMod val="100000"/>
+                <a:shade val="100000"/>
+              </a:schemeClr>
+            </a:gs>
+            <a:gs pos="100000">
+              <a:schemeClr val="phClr">
+                <a:lumMod val="99000"/>
+                <a:satMod val="120000"/>
+                <a:shade val="78000"/>
+              </a:schemeClr>
+            </a:gs>
+          </a:gsLst>
+          <a:lin ang="5400000" scaled="0"/>
+        </a:gradFill>
+      </a:fillStyleLst>
+      <a:lnStyleLst>
+        <a:ln w="6350" cap="flat" cmpd="sng" algn="ctr">
+          <a:solidFill>
+            <a:schemeClr val="phClr"/>
+          </a:solidFill>
+          <a:prstDash val="solid"/>
+          <a:miter lim="800000"/>
+        </a:ln>
+        <a:ln w="12700" cap="flat" cmpd="sng" algn="ctr">
+          <a:solidFill>
+            <a:schemeClr val="phClr"/>
+          </a:solidFill>
+          <a:prstDash val="solid"/>
+          <a:miter lim="800000"/>
+        </a:ln>
+        <a:ln w="19050" cap="flat" cmpd="sng" algn="ctr">
+          <a:solidFill>
+            <a:schemeClr val="phClr"/>
+          </a:solidFill>
+          <a:prstDash val="solid"/>
+          <a:miter lim="800000"/>
+        </a:ln>
+      </a:lnStyleLst>
+      <a:effectStyleLst>
+        <a:effectStyle>
+          <a:effectLst/>
+        </a:effectStyle>
+        <a:effectStyle>
+          <a:effectLst/>
+        </a:effectStyle>
+        <a:effectStyle>
+          <a:effectLst>
+            <a:outerShdw blurRad="57150" dist="19050" dir="5400000" algn="ctr" rotWithShape="0">
+              <a:srgbClr val="000000">
+                <a:alpha val="63000"/>
+              </a:srgbClr>
+            </a:outerShdw>
+          </a:effectLst>
+        </a:effectStyle>
+      </a:effectStyleLst>
+      <a:bgFillStyleLst>
+        <a:solidFill>
+          <a:schemeClr val="phClr"/>
+        </a:solidFill>
+        <a:solidFill>
+          <a:schemeClr val="phClr">
+            <a:tint val="95000"/>
+            <a:satMod val="170000"/>
+          </a:schemeClr>
+        </a:solidFill>
+        <a:gradFill rotWithShape="1">
+          <a:gsLst>
+            <a:gs pos="0">
+              <a:schemeClr val="phClr">
+                <a:tint val="93000"/>
+                <a:satMod val="150000"/>
+                <a:shade val="98000"/>
+                <a:lumMod val="102000"/>
+              </a:schemeClr>
+            </a:gs>
+            <a:gs pos="50000">
+              <a:schemeClr val="phClr">
+                <a:tint val="98000"/>
+                <a:satMod val="130000"/>
+                <a:shade val="90000"/>
+                <a:lumMod val="103000"/>
+              </a:schemeClr>
+            </a:gs>
+            <a:gs pos="100000">
+              <a:schemeClr val="phClr">
+                <a:shade val="63000"/>
+                <a:satMod val="120000"/>
+              </a:schemeClr>
+            </a:gs>
+          </a:gsLst>
+          <a:lin ang="5400000" scaled="0"/>
+        </a:gradFill>
+      </a:bgFillStyleLst>
+    </a:fmtScheme>
+  </a:themeElements>
   <a:extLst>
     <a:ext uri="{05A4C25C-085E-4340-85A3-A5531E510DB2}">
       <thm15:themeFamily xmlns:thm15="http://schemas.microsoft.com/office/thememl/2012/main" name="Office Theme" id="{62F939B6-93AF-4DB8-9C6B-D6C7DFDC589F}" vid="{4A3C46E8-61CC-4603-A589-7422A47A8E4A}"/>
